--- a/Project_presentation.pptx
+++ b/Project_presentation.pptx
@@ -5,32 +5,31 @@
     <p:sldMasterId id="2147483667" r:id="rId1"/>
   </p:sldMasterIdLst>
   <p:notesMasterIdLst>
-    <p:notesMasterId r:id="rId17"/>
+    <p:notesMasterId r:id="rId16"/>
   </p:notesMasterIdLst>
   <p:sldIdLst>
     <p:sldId id="271" r:id="rId2"/>
-    <p:sldId id="273" r:id="rId3"/>
-    <p:sldId id="300" r:id="rId4"/>
-    <p:sldId id="298" r:id="rId5"/>
-    <p:sldId id="276" r:id="rId6"/>
-    <p:sldId id="306" r:id="rId7"/>
+    <p:sldId id="300" r:id="rId3"/>
+    <p:sldId id="276" r:id="rId4"/>
+    <p:sldId id="313" r:id="rId5"/>
+    <p:sldId id="306" r:id="rId6"/>
+    <p:sldId id="312" r:id="rId7"/>
     <p:sldId id="308" r:id="rId8"/>
-    <p:sldId id="302" r:id="rId9"/>
-    <p:sldId id="311" r:id="rId10"/>
-    <p:sldId id="310" r:id="rId11"/>
-    <p:sldId id="297" r:id="rId12"/>
+    <p:sldId id="314" r:id="rId9"/>
+    <p:sldId id="302" r:id="rId10"/>
+    <p:sldId id="311" r:id="rId11"/>
+    <p:sldId id="310" r:id="rId12"/>
     <p:sldId id="303" r:id="rId13"/>
-    <p:sldId id="305" r:id="rId14"/>
-    <p:sldId id="278" r:id="rId15"/>
-    <p:sldId id="296" r:id="rId16"/>
+    <p:sldId id="278" r:id="rId14"/>
+    <p:sldId id="296" r:id="rId15"/>
   </p:sldIdLst>
   <p:sldSz cx="9144000" cy="5143500" type="screen16x9"/>
   <p:notesSz cx="6858000" cy="9144000"/>
   <p:embeddedFontLst>
     <p:embeddedFont>
       <p:font typeface="Assistant" pitchFamily="2" charset="-79"/>
-      <p:regular r:id="rId18"/>
-      <p:bold r:id="rId19"/>
+      <p:regular r:id="rId17"/>
+      <p:bold r:id="rId18"/>
     </p:embeddedFont>
   </p:embeddedFontLst>
   <p:defaultTextStyle>
@@ -823,6 +822,1207 @@
   <p:cSld>
     <p:spTree>
       <p:nvGrpSpPr>
+        <p:cNvPr id="1" name="Shape 441">
+          <a:extLst>
+            <a:ext uri="{FF2B5EF4-FFF2-40B4-BE49-F238E27FC236}">
+              <a16:creationId xmlns:a16="http://schemas.microsoft.com/office/drawing/2014/main" id="{7D4F35FC-6558-2E9D-D971-6B9F8C78A1E2}"/>
+            </a:ext>
+          </a:extLst>
+        </p:cNvPr>
+        <p:cNvGrpSpPr/>
+        <p:nvPr/>
+      </p:nvGrpSpPr>
+      <p:grpSpPr>
+        <a:xfrm>
+          <a:off x="0" y="0"/>
+          <a:ext cx="0" cy="0"/>
+          <a:chOff x="0" y="0"/>
+          <a:chExt cx="0" cy="0"/>
+        </a:xfrm>
+      </p:grpSpPr>
+      <p:sp>
+        <p:nvSpPr>
+          <p:cNvPr id="442" name="Google Shape;442;gaf83f1124d_0_42:notes">
+            <a:extLst>
+              <a:ext uri="{FF2B5EF4-FFF2-40B4-BE49-F238E27FC236}">
+                <a16:creationId xmlns:a16="http://schemas.microsoft.com/office/drawing/2014/main" id="{CE9A5032-B80A-E90D-B065-1BAA1C167A50}"/>
+              </a:ext>
+            </a:extLst>
+          </p:cNvPr>
+          <p:cNvSpPr>
+            <a:spLocks noGrp="1" noRot="1" noChangeAspect="1"/>
+          </p:cNvSpPr>
+          <p:nvPr>
+            <p:ph type="sldImg" idx="2"/>
+          </p:nvPr>
+        </p:nvSpPr>
+        <p:spPr>
+          <a:xfrm>
+            <a:off x="381000" y="685800"/>
+            <a:ext cx="6096000" cy="3429000"/>
+          </a:xfrm>
+          <a:custGeom>
+            <a:avLst/>
+            <a:gdLst/>
+            <a:ahLst/>
+            <a:cxnLst/>
+            <a:rect l="l" t="t" r="r" b="b"/>
+            <a:pathLst>
+              <a:path w="120000" h="120000" extrusionOk="0">
+                <a:moveTo>
+                  <a:pt x="0" y="0"/>
+                </a:moveTo>
+                <a:lnTo>
+                  <a:pt x="120000" y="0"/>
+                </a:lnTo>
+                <a:lnTo>
+                  <a:pt x="120000" y="120000"/>
+                </a:lnTo>
+                <a:lnTo>
+                  <a:pt x="0" y="120000"/>
+                </a:lnTo>
+                <a:close/>
+              </a:path>
+            </a:pathLst>
+          </a:custGeom>
+        </p:spPr>
+      </p:sp>
+      <p:sp>
+        <p:nvSpPr>
+          <p:cNvPr id="443" name="Google Shape;443;gaf83f1124d_0_42:notes">
+            <a:extLst>
+              <a:ext uri="{FF2B5EF4-FFF2-40B4-BE49-F238E27FC236}">
+                <a16:creationId xmlns:a16="http://schemas.microsoft.com/office/drawing/2014/main" id="{B67AE73A-12E6-1C8A-B7DE-C78B01271270}"/>
+              </a:ext>
+            </a:extLst>
+          </p:cNvPr>
+          <p:cNvSpPr txBox="1">
+            <a:spLocks noGrp="1"/>
+          </p:cNvSpPr>
+          <p:nvPr>
+            <p:ph type="body" idx="1"/>
+          </p:nvPr>
+        </p:nvSpPr>
+        <p:spPr>
+          <a:xfrm>
+            <a:off x="685800" y="4343400"/>
+            <a:ext cx="5486400" cy="4114800"/>
+          </a:xfrm>
+          <a:prstGeom prst="rect">
+            <a:avLst/>
+          </a:prstGeom>
+        </p:spPr>
+        <p:txBody>
+          <a:bodyPr spcFirstLastPara="1" wrap="square" lIns="91425" tIns="91425" rIns="91425" bIns="91425" anchor="t" anchorCtr="0">
+            <a:noAutofit/>
+          </a:bodyPr>
+          <a:lstStyle/>
+          <a:p>
+            <a:pPr marL="0" lvl="0" indent="0" algn="l" rtl="0">
+              <a:spcBef>
+                <a:spcPts val="0"/>
+              </a:spcBef>
+              <a:spcAft>
+                <a:spcPts val="0"/>
+              </a:spcAft>
+              <a:buNone/>
+            </a:pPr>
+            <a:endParaRPr/>
+          </a:p>
+        </p:txBody>
+      </p:sp>
+    </p:spTree>
+    <p:extLst>
+      <p:ext uri="{BB962C8B-B14F-4D97-AF65-F5344CB8AC3E}">
+        <p14:creationId xmlns:p14="http://schemas.microsoft.com/office/powerpoint/2010/main" val="776658567"/>
+      </p:ext>
+    </p:extLst>
+  </p:cSld>
+  <p:clrMapOvr>
+    <a:masterClrMapping/>
+  </p:clrMapOvr>
+</p:notes>
+</file>
+
+<file path=ppt/notesSlides/notesSlide11.xml><?xml version="1.0" encoding="utf-8"?>
+<p:notes xmlns:a="http://schemas.openxmlformats.org/drawingml/2006/main" xmlns:r="http://schemas.openxmlformats.org/officeDocument/2006/relationships" xmlns:p="http://schemas.openxmlformats.org/presentationml/2006/main" showMasterSp="0" showMasterPhAnim="0">
+  <p:cSld>
+    <p:spTree>
+      <p:nvGrpSpPr>
+        <p:cNvPr id="1" name="Shape 454"/>
+        <p:cNvGrpSpPr/>
+        <p:nvPr/>
+      </p:nvGrpSpPr>
+      <p:grpSpPr>
+        <a:xfrm>
+          <a:off x="0" y="0"/>
+          <a:ext cx="0" cy="0"/>
+          <a:chOff x="0" y="0"/>
+          <a:chExt cx="0" cy="0"/>
+        </a:xfrm>
+      </p:grpSpPr>
+      <p:sp>
+        <p:nvSpPr>
+          <p:cNvPr id="455" name="Google Shape;455;gb56d264711_0_259:notes"/>
+          <p:cNvSpPr>
+            <a:spLocks noGrp="1" noRot="1" noChangeAspect="1"/>
+          </p:cNvSpPr>
+          <p:nvPr>
+            <p:ph type="sldImg" idx="2"/>
+          </p:nvPr>
+        </p:nvSpPr>
+        <p:spPr>
+          <a:xfrm>
+            <a:off x="381000" y="685800"/>
+            <a:ext cx="6096000" cy="3429000"/>
+          </a:xfrm>
+          <a:custGeom>
+            <a:avLst/>
+            <a:gdLst/>
+            <a:ahLst/>
+            <a:cxnLst/>
+            <a:rect l="l" t="t" r="r" b="b"/>
+            <a:pathLst>
+              <a:path w="120000" h="120000" extrusionOk="0">
+                <a:moveTo>
+                  <a:pt x="0" y="0"/>
+                </a:moveTo>
+                <a:lnTo>
+                  <a:pt x="120000" y="0"/>
+                </a:lnTo>
+                <a:lnTo>
+                  <a:pt x="120000" y="120000"/>
+                </a:lnTo>
+                <a:lnTo>
+                  <a:pt x="0" y="120000"/>
+                </a:lnTo>
+                <a:close/>
+              </a:path>
+            </a:pathLst>
+          </a:custGeom>
+        </p:spPr>
+      </p:sp>
+      <p:sp>
+        <p:nvSpPr>
+          <p:cNvPr id="456" name="Google Shape;456;gb56d264711_0_259:notes"/>
+          <p:cNvSpPr txBox="1">
+            <a:spLocks noGrp="1"/>
+          </p:cNvSpPr>
+          <p:nvPr>
+            <p:ph type="body" idx="1"/>
+          </p:nvPr>
+        </p:nvSpPr>
+        <p:spPr>
+          <a:xfrm>
+            <a:off x="685800" y="4343400"/>
+            <a:ext cx="5486400" cy="4114800"/>
+          </a:xfrm>
+          <a:prstGeom prst="rect">
+            <a:avLst/>
+          </a:prstGeom>
+        </p:spPr>
+        <p:txBody>
+          <a:bodyPr spcFirstLastPara="1" wrap="square" lIns="91425" tIns="91425" rIns="91425" bIns="91425" anchor="t" anchorCtr="0">
+            <a:noAutofit/>
+          </a:bodyPr>
+          <a:lstStyle/>
+          <a:p>
+            <a:pPr marL="0" lvl="0" indent="0" algn="l" rtl="0">
+              <a:spcBef>
+                <a:spcPts val="0"/>
+              </a:spcBef>
+              <a:spcAft>
+                <a:spcPts val="0"/>
+              </a:spcAft>
+              <a:buNone/>
+            </a:pPr>
+            <a:endParaRPr/>
+          </a:p>
+        </p:txBody>
+      </p:sp>
+    </p:spTree>
+  </p:cSld>
+  <p:clrMapOvr>
+    <a:masterClrMapping/>
+  </p:clrMapOvr>
+</p:notes>
+</file>
+
+<file path=ppt/notesSlides/notesSlide12.xml><?xml version="1.0" encoding="utf-8"?>
+<p:notes xmlns:a="http://schemas.openxmlformats.org/drawingml/2006/main" xmlns:r="http://schemas.openxmlformats.org/officeDocument/2006/relationships" xmlns:p="http://schemas.openxmlformats.org/presentationml/2006/main" showMasterSp="0" showMasterPhAnim="0">
+  <p:cSld>
+    <p:spTree>
+      <p:nvGrpSpPr>
+        <p:cNvPr id="1" name="Shape 649"/>
+        <p:cNvGrpSpPr/>
+        <p:nvPr/>
+      </p:nvGrpSpPr>
+      <p:grpSpPr>
+        <a:xfrm>
+          <a:off x="0" y="0"/>
+          <a:ext cx="0" cy="0"/>
+          <a:chOff x="0" y="0"/>
+          <a:chExt cx="0" cy="0"/>
+        </a:xfrm>
+      </p:grpSpPr>
+      <p:sp>
+        <p:nvSpPr>
+          <p:cNvPr id="650" name="Google Shape;650;gb647448be2_1_484:notes"/>
+          <p:cNvSpPr>
+            <a:spLocks noGrp="1" noRot="1" noChangeAspect="1"/>
+          </p:cNvSpPr>
+          <p:nvPr>
+            <p:ph type="sldImg" idx="2"/>
+          </p:nvPr>
+        </p:nvSpPr>
+        <p:spPr>
+          <a:xfrm>
+            <a:off x="381000" y="685800"/>
+            <a:ext cx="6096000" cy="3429000"/>
+          </a:xfrm>
+          <a:custGeom>
+            <a:avLst/>
+            <a:gdLst/>
+            <a:ahLst/>
+            <a:cxnLst/>
+            <a:rect l="l" t="t" r="r" b="b"/>
+            <a:pathLst>
+              <a:path w="120000" h="120000" extrusionOk="0">
+                <a:moveTo>
+                  <a:pt x="0" y="0"/>
+                </a:moveTo>
+                <a:lnTo>
+                  <a:pt x="120000" y="0"/>
+                </a:lnTo>
+                <a:lnTo>
+                  <a:pt x="120000" y="120000"/>
+                </a:lnTo>
+                <a:lnTo>
+                  <a:pt x="0" y="120000"/>
+                </a:lnTo>
+                <a:close/>
+              </a:path>
+            </a:pathLst>
+          </a:custGeom>
+        </p:spPr>
+      </p:sp>
+      <p:sp>
+        <p:nvSpPr>
+          <p:cNvPr id="651" name="Google Shape;651;gb647448be2_1_484:notes"/>
+          <p:cNvSpPr txBox="1">
+            <a:spLocks noGrp="1"/>
+          </p:cNvSpPr>
+          <p:nvPr>
+            <p:ph type="body" idx="1"/>
+          </p:nvPr>
+        </p:nvSpPr>
+        <p:spPr>
+          <a:xfrm>
+            <a:off x="685800" y="4343400"/>
+            <a:ext cx="5486400" cy="4114800"/>
+          </a:xfrm>
+          <a:prstGeom prst="rect">
+            <a:avLst/>
+          </a:prstGeom>
+        </p:spPr>
+        <p:txBody>
+          <a:bodyPr spcFirstLastPara="1" wrap="square" lIns="91425" tIns="91425" rIns="91425" bIns="91425" anchor="t" anchorCtr="0">
+            <a:noAutofit/>
+          </a:bodyPr>
+          <a:lstStyle/>
+          <a:p>
+            <a:pPr marL="0" lvl="0" indent="0" algn="l" rtl="0">
+              <a:spcBef>
+                <a:spcPts val="0"/>
+              </a:spcBef>
+              <a:spcAft>
+                <a:spcPts val="0"/>
+              </a:spcAft>
+              <a:buNone/>
+            </a:pPr>
+            <a:endParaRPr/>
+          </a:p>
+        </p:txBody>
+      </p:sp>
+    </p:spTree>
+  </p:cSld>
+  <p:clrMapOvr>
+    <a:masterClrMapping/>
+  </p:clrMapOvr>
+</p:notes>
+</file>
+
+<file path=ppt/notesSlides/notesSlide2.xml><?xml version="1.0" encoding="utf-8"?>
+<p:notes xmlns:a="http://schemas.openxmlformats.org/drawingml/2006/main" xmlns:r="http://schemas.openxmlformats.org/officeDocument/2006/relationships" xmlns:p="http://schemas.openxmlformats.org/presentationml/2006/main" showMasterSp="0" showMasterPhAnim="0">
+  <p:cSld>
+    <p:spTree>
+      <p:nvGrpSpPr>
+        <p:cNvPr id="1" name="Shape 441">
+          <a:extLst>
+            <a:ext uri="{FF2B5EF4-FFF2-40B4-BE49-F238E27FC236}">
+              <a16:creationId xmlns:a16="http://schemas.microsoft.com/office/drawing/2014/main" id="{C5A9E23A-8961-1917-E055-AF8514A0D686}"/>
+            </a:ext>
+          </a:extLst>
+        </p:cNvPr>
+        <p:cNvGrpSpPr/>
+        <p:nvPr/>
+      </p:nvGrpSpPr>
+      <p:grpSpPr>
+        <a:xfrm>
+          <a:off x="0" y="0"/>
+          <a:ext cx="0" cy="0"/>
+          <a:chOff x="0" y="0"/>
+          <a:chExt cx="0" cy="0"/>
+        </a:xfrm>
+      </p:grpSpPr>
+      <p:sp>
+        <p:nvSpPr>
+          <p:cNvPr id="442" name="Google Shape;442;gaf83f1124d_0_42:notes">
+            <a:extLst>
+              <a:ext uri="{FF2B5EF4-FFF2-40B4-BE49-F238E27FC236}">
+                <a16:creationId xmlns:a16="http://schemas.microsoft.com/office/drawing/2014/main" id="{FD5C637B-D764-C590-6516-0B022FC27B07}"/>
+              </a:ext>
+            </a:extLst>
+          </p:cNvPr>
+          <p:cNvSpPr>
+            <a:spLocks noGrp="1" noRot="1" noChangeAspect="1"/>
+          </p:cNvSpPr>
+          <p:nvPr>
+            <p:ph type="sldImg" idx="2"/>
+          </p:nvPr>
+        </p:nvSpPr>
+        <p:spPr>
+          <a:xfrm>
+            <a:off x="381000" y="685800"/>
+            <a:ext cx="6096000" cy="3429000"/>
+          </a:xfrm>
+          <a:custGeom>
+            <a:avLst/>
+            <a:gdLst/>
+            <a:ahLst/>
+            <a:cxnLst/>
+            <a:rect l="l" t="t" r="r" b="b"/>
+            <a:pathLst>
+              <a:path w="120000" h="120000" extrusionOk="0">
+                <a:moveTo>
+                  <a:pt x="0" y="0"/>
+                </a:moveTo>
+                <a:lnTo>
+                  <a:pt x="120000" y="0"/>
+                </a:lnTo>
+                <a:lnTo>
+                  <a:pt x="120000" y="120000"/>
+                </a:lnTo>
+                <a:lnTo>
+                  <a:pt x="0" y="120000"/>
+                </a:lnTo>
+                <a:close/>
+              </a:path>
+            </a:pathLst>
+          </a:custGeom>
+        </p:spPr>
+      </p:sp>
+      <p:sp>
+        <p:nvSpPr>
+          <p:cNvPr id="443" name="Google Shape;443;gaf83f1124d_0_42:notes">
+            <a:extLst>
+              <a:ext uri="{FF2B5EF4-FFF2-40B4-BE49-F238E27FC236}">
+                <a16:creationId xmlns:a16="http://schemas.microsoft.com/office/drawing/2014/main" id="{EDF55E03-31C0-6909-1336-6157DD357488}"/>
+              </a:ext>
+            </a:extLst>
+          </p:cNvPr>
+          <p:cNvSpPr txBox="1">
+            <a:spLocks noGrp="1"/>
+          </p:cNvSpPr>
+          <p:nvPr>
+            <p:ph type="body" idx="1"/>
+          </p:nvPr>
+        </p:nvSpPr>
+        <p:spPr>
+          <a:xfrm>
+            <a:off x="685800" y="4343400"/>
+            <a:ext cx="5486400" cy="4114800"/>
+          </a:xfrm>
+          <a:prstGeom prst="rect">
+            <a:avLst/>
+          </a:prstGeom>
+        </p:spPr>
+        <p:txBody>
+          <a:bodyPr spcFirstLastPara="1" wrap="square" lIns="91425" tIns="91425" rIns="91425" bIns="91425" anchor="t" anchorCtr="0">
+            <a:noAutofit/>
+          </a:bodyPr>
+          <a:lstStyle/>
+          <a:p>
+            <a:pPr marL="0" lvl="0" indent="0" algn="l" rtl="0">
+              <a:spcBef>
+                <a:spcPts val="0"/>
+              </a:spcBef>
+              <a:spcAft>
+                <a:spcPts val="0"/>
+              </a:spcAft>
+              <a:buNone/>
+            </a:pPr>
+            <a:endParaRPr/>
+          </a:p>
+        </p:txBody>
+      </p:sp>
+    </p:spTree>
+    <p:extLst>
+      <p:ext uri="{BB962C8B-B14F-4D97-AF65-F5344CB8AC3E}">
+        <p14:creationId xmlns:p14="http://schemas.microsoft.com/office/powerpoint/2010/main" val="370107256"/>
+      </p:ext>
+    </p:extLst>
+  </p:cSld>
+  <p:clrMapOvr>
+    <a:masterClrMapping/>
+  </p:clrMapOvr>
+</p:notes>
+</file>
+
+<file path=ppt/notesSlides/notesSlide3.xml><?xml version="1.0" encoding="utf-8"?>
+<p:notes xmlns:a="http://schemas.openxmlformats.org/drawingml/2006/main" xmlns:r="http://schemas.openxmlformats.org/officeDocument/2006/relationships" xmlns:p="http://schemas.openxmlformats.org/presentationml/2006/main" showMasterSp="0" showMasterPhAnim="0">
+  <p:cSld>
+    <p:spTree>
+      <p:nvGrpSpPr>
+        <p:cNvPr id="1" name="Shape 428"/>
+        <p:cNvGrpSpPr/>
+        <p:nvPr/>
+      </p:nvGrpSpPr>
+      <p:grpSpPr>
+        <a:xfrm>
+          <a:off x="0" y="0"/>
+          <a:ext cx="0" cy="0"/>
+          <a:chOff x="0" y="0"/>
+          <a:chExt cx="0" cy="0"/>
+        </a:xfrm>
+      </p:grpSpPr>
+      <p:sp>
+        <p:nvSpPr>
+          <p:cNvPr id="429" name="Google Shape;429;gb56d264711_0_5:notes"/>
+          <p:cNvSpPr>
+            <a:spLocks noGrp="1" noRot="1" noChangeAspect="1"/>
+          </p:cNvSpPr>
+          <p:nvPr>
+            <p:ph type="sldImg" idx="2"/>
+          </p:nvPr>
+        </p:nvSpPr>
+        <p:spPr>
+          <a:xfrm>
+            <a:off x="381000" y="685800"/>
+            <a:ext cx="6096000" cy="3429000"/>
+          </a:xfrm>
+          <a:custGeom>
+            <a:avLst/>
+            <a:gdLst/>
+            <a:ahLst/>
+            <a:cxnLst/>
+            <a:rect l="l" t="t" r="r" b="b"/>
+            <a:pathLst>
+              <a:path w="120000" h="120000" extrusionOk="0">
+                <a:moveTo>
+                  <a:pt x="0" y="0"/>
+                </a:moveTo>
+                <a:lnTo>
+                  <a:pt x="120000" y="0"/>
+                </a:lnTo>
+                <a:lnTo>
+                  <a:pt x="120000" y="120000"/>
+                </a:lnTo>
+                <a:lnTo>
+                  <a:pt x="0" y="120000"/>
+                </a:lnTo>
+                <a:close/>
+              </a:path>
+            </a:pathLst>
+          </a:custGeom>
+        </p:spPr>
+      </p:sp>
+      <p:sp>
+        <p:nvSpPr>
+          <p:cNvPr id="430" name="Google Shape;430;gb56d264711_0_5:notes"/>
+          <p:cNvSpPr txBox="1">
+            <a:spLocks noGrp="1"/>
+          </p:cNvSpPr>
+          <p:nvPr>
+            <p:ph type="body" idx="1"/>
+          </p:nvPr>
+        </p:nvSpPr>
+        <p:spPr>
+          <a:xfrm>
+            <a:off x="685800" y="4343400"/>
+            <a:ext cx="5486400" cy="4114800"/>
+          </a:xfrm>
+          <a:prstGeom prst="rect">
+            <a:avLst/>
+          </a:prstGeom>
+        </p:spPr>
+        <p:txBody>
+          <a:bodyPr spcFirstLastPara="1" wrap="square" lIns="91425" tIns="91425" rIns="91425" bIns="91425" anchor="t" anchorCtr="0">
+            <a:noAutofit/>
+          </a:bodyPr>
+          <a:lstStyle/>
+          <a:p>
+            <a:pPr marL="0" lvl="0" indent="0" algn="l" rtl="0">
+              <a:spcBef>
+                <a:spcPts val="0"/>
+              </a:spcBef>
+              <a:spcAft>
+                <a:spcPts val="0"/>
+              </a:spcAft>
+              <a:buNone/>
+            </a:pPr>
+            <a:endParaRPr dirty="0"/>
+          </a:p>
+        </p:txBody>
+      </p:sp>
+    </p:spTree>
+  </p:cSld>
+  <p:clrMapOvr>
+    <a:masterClrMapping/>
+  </p:clrMapOvr>
+</p:notes>
+</file>
+
+<file path=ppt/notesSlides/notesSlide4.xml><?xml version="1.0" encoding="utf-8"?>
+<p:notes xmlns:a="http://schemas.openxmlformats.org/drawingml/2006/main" xmlns:r="http://schemas.openxmlformats.org/officeDocument/2006/relationships" xmlns:p="http://schemas.openxmlformats.org/presentationml/2006/main" showMasterSp="0" showMasterPhAnim="0">
+  <p:cSld>
+    <p:spTree>
+      <p:nvGrpSpPr>
+        <p:cNvPr id="1" name="Shape 428">
+          <a:extLst>
+            <a:ext uri="{FF2B5EF4-FFF2-40B4-BE49-F238E27FC236}">
+              <a16:creationId xmlns:a16="http://schemas.microsoft.com/office/drawing/2014/main" id="{4E60A300-9B4C-EB8A-3CDC-E36377524F15}"/>
+            </a:ext>
+          </a:extLst>
+        </p:cNvPr>
+        <p:cNvGrpSpPr/>
+        <p:nvPr/>
+      </p:nvGrpSpPr>
+      <p:grpSpPr>
+        <a:xfrm>
+          <a:off x="0" y="0"/>
+          <a:ext cx="0" cy="0"/>
+          <a:chOff x="0" y="0"/>
+          <a:chExt cx="0" cy="0"/>
+        </a:xfrm>
+      </p:grpSpPr>
+      <p:sp>
+        <p:nvSpPr>
+          <p:cNvPr id="429" name="Google Shape;429;gb56d264711_0_5:notes">
+            <a:extLst>
+              <a:ext uri="{FF2B5EF4-FFF2-40B4-BE49-F238E27FC236}">
+                <a16:creationId xmlns:a16="http://schemas.microsoft.com/office/drawing/2014/main" id="{9E42B893-8264-8A1D-1FB0-AD8B4BC3CB16}"/>
+              </a:ext>
+            </a:extLst>
+          </p:cNvPr>
+          <p:cNvSpPr>
+            <a:spLocks noGrp="1" noRot="1" noChangeAspect="1"/>
+          </p:cNvSpPr>
+          <p:nvPr>
+            <p:ph type="sldImg" idx="2"/>
+          </p:nvPr>
+        </p:nvSpPr>
+        <p:spPr>
+          <a:xfrm>
+            <a:off x="381000" y="685800"/>
+            <a:ext cx="6096000" cy="3429000"/>
+          </a:xfrm>
+          <a:custGeom>
+            <a:avLst/>
+            <a:gdLst/>
+            <a:ahLst/>
+            <a:cxnLst/>
+            <a:rect l="l" t="t" r="r" b="b"/>
+            <a:pathLst>
+              <a:path w="120000" h="120000" extrusionOk="0">
+                <a:moveTo>
+                  <a:pt x="0" y="0"/>
+                </a:moveTo>
+                <a:lnTo>
+                  <a:pt x="120000" y="0"/>
+                </a:lnTo>
+                <a:lnTo>
+                  <a:pt x="120000" y="120000"/>
+                </a:lnTo>
+                <a:lnTo>
+                  <a:pt x="0" y="120000"/>
+                </a:lnTo>
+                <a:close/>
+              </a:path>
+            </a:pathLst>
+          </a:custGeom>
+        </p:spPr>
+      </p:sp>
+      <p:sp>
+        <p:nvSpPr>
+          <p:cNvPr id="430" name="Google Shape;430;gb56d264711_0_5:notes">
+            <a:extLst>
+              <a:ext uri="{FF2B5EF4-FFF2-40B4-BE49-F238E27FC236}">
+                <a16:creationId xmlns:a16="http://schemas.microsoft.com/office/drawing/2014/main" id="{A00DBBDA-A0EB-CE69-00A0-D91389256D84}"/>
+              </a:ext>
+            </a:extLst>
+          </p:cNvPr>
+          <p:cNvSpPr txBox="1">
+            <a:spLocks noGrp="1"/>
+          </p:cNvSpPr>
+          <p:nvPr>
+            <p:ph type="body" idx="1"/>
+          </p:nvPr>
+        </p:nvSpPr>
+        <p:spPr>
+          <a:xfrm>
+            <a:off x="685800" y="4343400"/>
+            <a:ext cx="5486400" cy="4114800"/>
+          </a:xfrm>
+          <a:prstGeom prst="rect">
+            <a:avLst/>
+          </a:prstGeom>
+        </p:spPr>
+        <p:txBody>
+          <a:bodyPr spcFirstLastPara="1" wrap="square" lIns="91425" tIns="91425" rIns="91425" bIns="91425" anchor="t" anchorCtr="0">
+            <a:noAutofit/>
+          </a:bodyPr>
+          <a:lstStyle/>
+          <a:p>
+            <a:pPr marL="0" lvl="0" indent="0" algn="l" rtl="0">
+              <a:spcBef>
+                <a:spcPts val="0"/>
+              </a:spcBef>
+              <a:spcAft>
+                <a:spcPts val="0"/>
+              </a:spcAft>
+              <a:buNone/>
+            </a:pPr>
+            <a:endParaRPr dirty="0"/>
+          </a:p>
+        </p:txBody>
+      </p:sp>
+    </p:spTree>
+    <p:extLst>
+      <p:ext uri="{BB962C8B-B14F-4D97-AF65-F5344CB8AC3E}">
+        <p14:creationId xmlns:p14="http://schemas.microsoft.com/office/powerpoint/2010/main" val="2477149044"/>
+      </p:ext>
+    </p:extLst>
+  </p:cSld>
+  <p:clrMapOvr>
+    <a:masterClrMapping/>
+  </p:clrMapOvr>
+</p:notes>
+</file>
+
+<file path=ppt/notesSlides/notesSlide5.xml><?xml version="1.0" encoding="utf-8"?>
+<p:notes xmlns:a="http://schemas.openxmlformats.org/drawingml/2006/main" xmlns:r="http://schemas.openxmlformats.org/officeDocument/2006/relationships" xmlns:p="http://schemas.openxmlformats.org/presentationml/2006/main" showMasterSp="0" showMasterPhAnim="0">
+  <p:cSld>
+    <p:spTree>
+      <p:nvGrpSpPr>
+        <p:cNvPr id="1" name="Shape 441">
+          <a:extLst>
+            <a:ext uri="{FF2B5EF4-FFF2-40B4-BE49-F238E27FC236}">
+              <a16:creationId xmlns:a16="http://schemas.microsoft.com/office/drawing/2014/main" id="{FA37D7F9-861A-EFDB-9691-51070B9293F5}"/>
+            </a:ext>
+          </a:extLst>
+        </p:cNvPr>
+        <p:cNvGrpSpPr/>
+        <p:nvPr/>
+      </p:nvGrpSpPr>
+      <p:grpSpPr>
+        <a:xfrm>
+          <a:off x="0" y="0"/>
+          <a:ext cx="0" cy="0"/>
+          <a:chOff x="0" y="0"/>
+          <a:chExt cx="0" cy="0"/>
+        </a:xfrm>
+      </p:grpSpPr>
+      <p:sp>
+        <p:nvSpPr>
+          <p:cNvPr id="442" name="Google Shape;442;gaf83f1124d_0_42:notes">
+            <a:extLst>
+              <a:ext uri="{FF2B5EF4-FFF2-40B4-BE49-F238E27FC236}">
+                <a16:creationId xmlns:a16="http://schemas.microsoft.com/office/drawing/2014/main" id="{4ABA1A8B-5195-DB52-FB97-84F393F3EF05}"/>
+              </a:ext>
+            </a:extLst>
+          </p:cNvPr>
+          <p:cNvSpPr>
+            <a:spLocks noGrp="1" noRot="1" noChangeAspect="1"/>
+          </p:cNvSpPr>
+          <p:nvPr>
+            <p:ph type="sldImg" idx="2"/>
+          </p:nvPr>
+        </p:nvSpPr>
+        <p:spPr>
+          <a:xfrm>
+            <a:off x="381000" y="685800"/>
+            <a:ext cx="6096000" cy="3429000"/>
+          </a:xfrm>
+          <a:custGeom>
+            <a:avLst/>
+            <a:gdLst/>
+            <a:ahLst/>
+            <a:cxnLst/>
+            <a:rect l="l" t="t" r="r" b="b"/>
+            <a:pathLst>
+              <a:path w="120000" h="120000" extrusionOk="0">
+                <a:moveTo>
+                  <a:pt x="0" y="0"/>
+                </a:moveTo>
+                <a:lnTo>
+                  <a:pt x="120000" y="0"/>
+                </a:lnTo>
+                <a:lnTo>
+                  <a:pt x="120000" y="120000"/>
+                </a:lnTo>
+                <a:lnTo>
+                  <a:pt x="0" y="120000"/>
+                </a:lnTo>
+                <a:close/>
+              </a:path>
+            </a:pathLst>
+          </a:custGeom>
+        </p:spPr>
+      </p:sp>
+      <p:sp>
+        <p:nvSpPr>
+          <p:cNvPr id="443" name="Google Shape;443;gaf83f1124d_0_42:notes">
+            <a:extLst>
+              <a:ext uri="{FF2B5EF4-FFF2-40B4-BE49-F238E27FC236}">
+                <a16:creationId xmlns:a16="http://schemas.microsoft.com/office/drawing/2014/main" id="{B3FDF502-745F-A613-029A-19CDC42616DE}"/>
+              </a:ext>
+            </a:extLst>
+          </p:cNvPr>
+          <p:cNvSpPr txBox="1">
+            <a:spLocks noGrp="1"/>
+          </p:cNvSpPr>
+          <p:nvPr>
+            <p:ph type="body" idx="1"/>
+          </p:nvPr>
+        </p:nvSpPr>
+        <p:spPr>
+          <a:xfrm>
+            <a:off x="685800" y="4343400"/>
+            <a:ext cx="5486400" cy="4114800"/>
+          </a:xfrm>
+          <a:prstGeom prst="rect">
+            <a:avLst/>
+          </a:prstGeom>
+        </p:spPr>
+        <p:txBody>
+          <a:bodyPr spcFirstLastPara="1" wrap="square" lIns="91425" tIns="91425" rIns="91425" bIns="91425" anchor="t" anchorCtr="0">
+            <a:noAutofit/>
+          </a:bodyPr>
+          <a:lstStyle/>
+          <a:p>
+            <a:pPr marL="0" lvl="0" indent="0" algn="l" rtl="0">
+              <a:spcBef>
+                <a:spcPts val="0"/>
+              </a:spcBef>
+              <a:spcAft>
+                <a:spcPts val="0"/>
+              </a:spcAft>
+              <a:buNone/>
+            </a:pPr>
+            <a:endParaRPr/>
+          </a:p>
+        </p:txBody>
+      </p:sp>
+    </p:spTree>
+    <p:extLst>
+      <p:ext uri="{BB962C8B-B14F-4D97-AF65-F5344CB8AC3E}">
+        <p14:creationId xmlns:p14="http://schemas.microsoft.com/office/powerpoint/2010/main" val="1597183198"/>
+      </p:ext>
+    </p:extLst>
+  </p:cSld>
+  <p:clrMapOvr>
+    <a:masterClrMapping/>
+  </p:clrMapOvr>
+</p:notes>
+</file>
+
+<file path=ppt/notesSlides/notesSlide6.xml><?xml version="1.0" encoding="utf-8"?>
+<p:notes xmlns:a="http://schemas.openxmlformats.org/drawingml/2006/main" xmlns:r="http://schemas.openxmlformats.org/officeDocument/2006/relationships" xmlns:p="http://schemas.openxmlformats.org/presentationml/2006/main" showMasterSp="0" showMasterPhAnim="0">
+  <p:cSld>
+    <p:spTree>
+      <p:nvGrpSpPr>
+        <p:cNvPr id="1" name="Shape 441">
+          <a:extLst>
+            <a:ext uri="{FF2B5EF4-FFF2-40B4-BE49-F238E27FC236}">
+              <a16:creationId xmlns:a16="http://schemas.microsoft.com/office/drawing/2014/main" id="{16CF2C9B-E300-6AD7-60A6-116AE0602952}"/>
+            </a:ext>
+          </a:extLst>
+        </p:cNvPr>
+        <p:cNvGrpSpPr/>
+        <p:nvPr/>
+      </p:nvGrpSpPr>
+      <p:grpSpPr>
+        <a:xfrm>
+          <a:off x="0" y="0"/>
+          <a:ext cx="0" cy="0"/>
+          <a:chOff x="0" y="0"/>
+          <a:chExt cx="0" cy="0"/>
+        </a:xfrm>
+      </p:grpSpPr>
+      <p:sp>
+        <p:nvSpPr>
+          <p:cNvPr id="442" name="Google Shape;442;gaf83f1124d_0_42:notes">
+            <a:extLst>
+              <a:ext uri="{FF2B5EF4-FFF2-40B4-BE49-F238E27FC236}">
+                <a16:creationId xmlns:a16="http://schemas.microsoft.com/office/drawing/2014/main" id="{6A6BFE88-C9FE-E986-4221-0D95657AA89A}"/>
+              </a:ext>
+            </a:extLst>
+          </p:cNvPr>
+          <p:cNvSpPr>
+            <a:spLocks noGrp="1" noRot="1" noChangeAspect="1"/>
+          </p:cNvSpPr>
+          <p:nvPr>
+            <p:ph type="sldImg" idx="2"/>
+          </p:nvPr>
+        </p:nvSpPr>
+        <p:spPr>
+          <a:xfrm>
+            <a:off x="381000" y="685800"/>
+            <a:ext cx="6096000" cy="3429000"/>
+          </a:xfrm>
+          <a:custGeom>
+            <a:avLst/>
+            <a:gdLst/>
+            <a:ahLst/>
+            <a:cxnLst/>
+            <a:rect l="l" t="t" r="r" b="b"/>
+            <a:pathLst>
+              <a:path w="120000" h="120000" extrusionOk="0">
+                <a:moveTo>
+                  <a:pt x="0" y="0"/>
+                </a:moveTo>
+                <a:lnTo>
+                  <a:pt x="120000" y="0"/>
+                </a:lnTo>
+                <a:lnTo>
+                  <a:pt x="120000" y="120000"/>
+                </a:lnTo>
+                <a:lnTo>
+                  <a:pt x="0" y="120000"/>
+                </a:lnTo>
+                <a:close/>
+              </a:path>
+            </a:pathLst>
+          </a:custGeom>
+        </p:spPr>
+      </p:sp>
+      <p:sp>
+        <p:nvSpPr>
+          <p:cNvPr id="443" name="Google Shape;443;gaf83f1124d_0_42:notes">
+            <a:extLst>
+              <a:ext uri="{FF2B5EF4-FFF2-40B4-BE49-F238E27FC236}">
+                <a16:creationId xmlns:a16="http://schemas.microsoft.com/office/drawing/2014/main" id="{6C127C2A-15FF-6A3D-6FF4-F1DF00537377}"/>
+              </a:ext>
+            </a:extLst>
+          </p:cNvPr>
+          <p:cNvSpPr txBox="1">
+            <a:spLocks noGrp="1"/>
+          </p:cNvSpPr>
+          <p:nvPr>
+            <p:ph type="body" idx="1"/>
+          </p:nvPr>
+        </p:nvSpPr>
+        <p:spPr>
+          <a:xfrm>
+            <a:off x="685800" y="4343400"/>
+            <a:ext cx="5486400" cy="4114800"/>
+          </a:xfrm>
+          <a:prstGeom prst="rect">
+            <a:avLst/>
+          </a:prstGeom>
+        </p:spPr>
+        <p:txBody>
+          <a:bodyPr spcFirstLastPara="1" wrap="square" lIns="91425" tIns="91425" rIns="91425" bIns="91425" anchor="t" anchorCtr="0">
+            <a:noAutofit/>
+          </a:bodyPr>
+          <a:lstStyle/>
+          <a:p>
+            <a:pPr marL="0" lvl="0" indent="0" algn="l" rtl="0">
+              <a:spcBef>
+                <a:spcPts val="0"/>
+              </a:spcBef>
+              <a:spcAft>
+                <a:spcPts val="0"/>
+              </a:spcAft>
+              <a:buNone/>
+            </a:pPr>
+            <a:endParaRPr/>
+          </a:p>
+        </p:txBody>
+      </p:sp>
+    </p:spTree>
+    <p:extLst>
+      <p:ext uri="{BB962C8B-B14F-4D97-AF65-F5344CB8AC3E}">
+        <p14:creationId xmlns:p14="http://schemas.microsoft.com/office/powerpoint/2010/main" val="1612644292"/>
+      </p:ext>
+    </p:extLst>
+  </p:cSld>
+  <p:clrMapOvr>
+    <a:masterClrMapping/>
+  </p:clrMapOvr>
+</p:notes>
+</file>
+
+<file path=ppt/notesSlides/notesSlide7.xml><?xml version="1.0" encoding="utf-8"?>
+<p:notes xmlns:a="http://schemas.openxmlformats.org/drawingml/2006/main" xmlns:r="http://schemas.openxmlformats.org/officeDocument/2006/relationships" xmlns:p="http://schemas.openxmlformats.org/presentationml/2006/main" showMasterSp="0" showMasterPhAnim="0">
+  <p:cSld>
+    <p:spTree>
+      <p:nvGrpSpPr>
+        <p:cNvPr id="1" name="Shape 441">
+          <a:extLst>
+            <a:ext uri="{FF2B5EF4-FFF2-40B4-BE49-F238E27FC236}">
+              <a16:creationId xmlns:a16="http://schemas.microsoft.com/office/drawing/2014/main" id="{E3FC1686-DB1A-6383-2630-456D62C688C0}"/>
+            </a:ext>
+          </a:extLst>
+        </p:cNvPr>
+        <p:cNvGrpSpPr/>
+        <p:nvPr/>
+      </p:nvGrpSpPr>
+      <p:grpSpPr>
+        <a:xfrm>
+          <a:off x="0" y="0"/>
+          <a:ext cx="0" cy="0"/>
+          <a:chOff x="0" y="0"/>
+          <a:chExt cx="0" cy="0"/>
+        </a:xfrm>
+      </p:grpSpPr>
+      <p:sp>
+        <p:nvSpPr>
+          <p:cNvPr id="442" name="Google Shape;442;gaf83f1124d_0_42:notes">
+            <a:extLst>
+              <a:ext uri="{FF2B5EF4-FFF2-40B4-BE49-F238E27FC236}">
+                <a16:creationId xmlns:a16="http://schemas.microsoft.com/office/drawing/2014/main" id="{9C1DECC4-F988-9CDE-88DF-EAB2684EF28C}"/>
+              </a:ext>
+            </a:extLst>
+          </p:cNvPr>
+          <p:cNvSpPr>
+            <a:spLocks noGrp="1" noRot="1" noChangeAspect="1"/>
+          </p:cNvSpPr>
+          <p:nvPr>
+            <p:ph type="sldImg" idx="2"/>
+          </p:nvPr>
+        </p:nvSpPr>
+        <p:spPr>
+          <a:xfrm>
+            <a:off x="381000" y="685800"/>
+            <a:ext cx="6096000" cy="3429000"/>
+          </a:xfrm>
+          <a:custGeom>
+            <a:avLst/>
+            <a:gdLst/>
+            <a:ahLst/>
+            <a:cxnLst/>
+            <a:rect l="l" t="t" r="r" b="b"/>
+            <a:pathLst>
+              <a:path w="120000" h="120000" extrusionOk="0">
+                <a:moveTo>
+                  <a:pt x="0" y="0"/>
+                </a:moveTo>
+                <a:lnTo>
+                  <a:pt x="120000" y="0"/>
+                </a:lnTo>
+                <a:lnTo>
+                  <a:pt x="120000" y="120000"/>
+                </a:lnTo>
+                <a:lnTo>
+                  <a:pt x="0" y="120000"/>
+                </a:lnTo>
+                <a:close/>
+              </a:path>
+            </a:pathLst>
+          </a:custGeom>
+        </p:spPr>
+      </p:sp>
+      <p:sp>
+        <p:nvSpPr>
+          <p:cNvPr id="443" name="Google Shape;443;gaf83f1124d_0_42:notes">
+            <a:extLst>
+              <a:ext uri="{FF2B5EF4-FFF2-40B4-BE49-F238E27FC236}">
+                <a16:creationId xmlns:a16="http://schemas.microsoft.com/office/drawing/2014/main" id="{9AE6D016-C0D8-C4AC-2450-CA92FB576A8A}"/>
+              </a:ext>
+            </a:extLst>
+          </p:cNvPr>
+          <p:cNvSpPr txBox="1">
+            <a:spLocks noGrp="1"/>
+          </p:cNvSpPr>
+          <p:nvPr>
+            <p:ph type="body" idx="1"/>
+          </p:nvPr>
+        </p:nvSpPr>
+        <p:spPr>
+          <a:xfrm>
+            <a:off x="685800" y="4343400"/>
+            <a:ext cx="5486400" cy="4114800"/>
+          </a:xfrm>
+          <a:prstGeom prst="rect">
+            <a:avLst/>
+          </a:prstGeom>
+        </p:spPr>
+        <p:txBody>
+          <a:bodyPr spcFirstLastPara="1" wrap="square" lIns="91425" tIns="91425" rIns="91425" bIns="91425" anchor="t" anchorCtr="0">
+            <a:noAutofit/>
+          </a:bodyPr>
+          <a:lstStyle/>
+          <a:p>
+            <a:pPr marL="0" lvl="0" indent="0" algn="l" rtl="0">
+              <a:spcBef>
+                <a:spcPts val="0"/>
+              </a:spcBef>
+              <a:spcAft>
+                <a:spcPts val="0"/>
+              </a:spcAft>
+              <a:buNone/>
+            </a:pPr>
+            <a:endParaRPr/>
+          </a:p>
+        </p:txBody>
+      </p:sp>
+    </p:spTree>
+    <p:extLst>
+      <p:ext uri="{BB962C8B-B14F-4D97-AF65-F5344CB8AC3E}">
+        <p14:creationId xmlns:p14="http://schemas.microsoft.com/office/powerpoint/2010/main" val="177988039"/>
+      </p:ext>
+    </p:extLst>
+  </p:cSld>
+  <p:clrMapOvr>
+    <a:masterClrMapping/>
+  </p:clrMapOvr>
+</p:notes>
+</file>
+
+<file path=ppt/notesSlides/notesSlide8.xml><?xml version="1.0" encoding="utf-8"?>
+<p:notes xmlns:a="http://schemas.openxmlformats.org/drawingml/2006/main" xmlns:r="http://schemas.openxmlformats.org/officeDocument/2006/relationships" xmlns:p="http://schemas.openxmlformats.org/presentationml/2006/main" showMasterSp="0" showMasterPhAnim="0">
+  <p:cSld>
+    <p:spTree>
+      <p:nvGrpSpPr>
+        <p:cNvPr id="1" name="Shape 441">
+          <a:extLst>
+            <a:ext uri="{FF2B5EF4-FFF2-40B4-BE49-F238E27FC236}">
+              <a16:creationId xmlns:a16="http://schemas.microsoft.com/office/drawing/2014/main" id="{1DC65EF7-451A-79D6-1361-D903A016D4A0}"/>
+            </a:ext>
+          </a:extLst>
+        </p:cNvPr>
+        <p:cNvGrpSpPr/>
+        <p:nvPr/>
+      </p:nvGrpSpPr>
+      <p:grpSpPr>
+        <a:xfrm>
+          <a:off x="0" y="0"/>
+          <a:ext cx="0" cy="0"/>
+          <a:chOff x="0" y="0"/>
+          <a:chExt cx="0" cy="0"/>
+        </a:xfrm>
+      </p:grpSpPr>
+      <p:sp>
+        <p:nvSpPr>
+          <p:cNvPr id="442" name="Google Shape;442;gaf83f1124d_0_42:notes">
+            <a:extLst>
+              <a:ext uri="{FF2B5EF4-FFF2-40B4-BE49-F238E27FC236}">
+                <a16:creationId xmlns:a16="http://schemas.microsoft.com/office/drawing/2014/main" id="{3FB6211C-FBF3-2CC3-1AF4-45BE9EE1491C}"/>
+              </a:ext>
+            </a:extLst>
+          </p:cNvPr>
+          <p:cNvSpPr>
+            <a:spLocks noGrp="1" noRot="1" noChangeAspect="1"/>
+          </p:cNvSpPr>
+          <p:nvPr>
+            <p:ph type="sldImg" idx="2"/>
+          </p:nvPr>
+        </p:nvSpPr>
+        <p:spPr>
+          <a:xfrm>
+            <a:off x="381000" y="685800"/>
+            <a:ext cx="6096000" cy="3429000"/>
+          </a:xfrm>
+          <a:custGeom>
+            <a:avLst/>
+            <a:gdLst/>
+            <a:ahLst/>
+            <a:cxnLst/>
+            <a:rect l="l" t="t" r="r" b="b"/>
+            <a:pathLst>
+              <a:path w="120000" h="120000" extrusionOk="0">
+                <a:moveTo>
+                  <a:pt x="0" y="0"/>
+                </a:moveTo>
+                <a:lnTo>
+                  <a:pt x="120000" y="0"/>
+                </a:lnTo>
+                <a:lnTo>
+                  <a:pt x="120000" y="120000"/>
+                </a:lnTo>
+                <a:lnTo>
+                  <a:pt x="0" y="120000"/>
+                </a:lnTo>
+                <a:close/>
+              </a:path>
+            </a:pathLst>
+          </a:custGeom>
+        </p:spPr>
+      </p:sp>
+      <p:sp>
+        <p:nvSpPr>
+          <p:cNvPr id="443" name="Google Shape;443;gaf83f1124d_0_42:notes">
+            <a:extLst>
+              <a:ext uri="{FF2B5EF4-FFF2-40B4-BE49-F238E27FC236}">
+                <a16:creationId xmlns:a16="http://schemas.microsoft.com/office/drawing/2014/main" id="{6B3901D1-C1DB-38C3-DE86-B0E148394117}"/>
+              </a:ext>
+            </a:extLst>
+          </p:cNvPr>
+          <p:cNvSpPr txBox="1">
+            <a:spLocks noGrp="1"/>
+          </p:cNvSpPr>
+          <p:nvPr>
+            <p:ph type="body" idx="1"/>
+          </p:nvPr>
+        </p:nvSpPr>
+        <p:spPr>
+          <a:xfrm>
+            <a:off x="685800" y="4343400"/>
+            <a:ext cx="5486400" cy="4114800"/>
+          </a:xfrm>
+          <a:prstGeom prst="rect">
+            <a:avLst/>
+          </a:prstGeom>
+        </p:spPr>
+        <p:txBody>
+          <a:bodyPr spcFirstLastPara="1" wrap="square" lIns="91425" tIns="91425" rIns="91425" bIns="91425" anchor="t" anchorCtr="0">
+            <a:noAutofit/>
+          </a:bodyPr>
+          <a:lstStyle/>
+          <a:p>
+            <a:pPr marL="0" lvl="0" indent="0" algn="l" rtl="0">
+              <a:spcBef>
+                <a:spcPts val="0"/>
+              </a:spcBef>
+              <a:spcAft>
+                <a:spcPts val="0"/>
+              </a:spcAft>
+              <a:buNone/>
+            </a:pPr>
+            <a:endParaRPr/>
+          </a:p>
+        </p:txBody>
+      </p:sp>
+    </p:spTree>
+    <p:extLst>
+      <p:ext uri="{BB962C8B-B14F-4D97-AF65-F5344CB8AC3E}">
+        <p14:creationId xmlns:p14="http://schemas.microsoft.com/office/powerpoint/2010/main" val="3504596559"/>
+      </p:ext>
+    </p:extLst>
+  </p:cSld>
+  <p:clrMapOvr>
+    <a:masterClrMapping/>
+  </p:clrMapOvr>
+</p:notes>
+</file>
+
+<file path=ppt/notesSlides/notesSlide9.xml><?xml version="1.0" encoding="utf-8"?>
+<p:notes xmlns:a="http://schemas.openxmlformats.org/drawingml/2006/main" xmlns:r="http://schemas.openxmlformats.org/officeDocument/2006/relationships" xmlns:p="http://schemas.openxmlformats.org/presentationml/2006/main" showMasterSp="0" showMasterPhAnim="0">
+  <p:cSld>
+    <p:spTree>
+      <p:nvGrpSpPr>
         <p:cNvPr id="1" name="Shape 428">
           <a:extLst>
             <a:ext uri="{FF2B5EF4-FFF2-40B4-BE49-F238E27FC236}">
@@ -936,1565 +2136,6 @@
     <p:extLst>
       <p:ext uri="{BB962C8B-B14F-4D97-AF65-F5344CB8AC3E}">
         <p14:creationId xmlns:p14="http://schemas.microsoft.com/office/powerpoint/2010/main" val="3692360795"/>
-      </p:ext>
-    </p:extLst>
-  </p:cSld>
-  <p:clrMapOvr>
-    <a:masterClrMapping/>
-  </p:clrMapOvr>
-</p:notes>
-</file>
-
-<file path=ppt/notesSlides/notesSlide11.xml><?xml version="1.0" encoding="utf-8"?>
-<p:notes xmlns:a="http://schemas.openxmlformats.org/drawingml/2006/main" xmlns:r="http://schemas.openxmlformats.org/officeDocument/2006/relationships" xmlns:p="http://schemas.openxmlformats.org/presentationml/2006/main" showMasterSp="0" showMasterPhAnim="0">
-  <p:cSld>
-    <p:spTree>
-      <p:nvGrpSpPr>
-        <p:cNvPr id="1" name="Shape 387">
-          <a:extLst>
-            <a:ext uri="{FF2B5EF4-FFF2-40B4-BE49-F238E27FC236}">
-              <a16:creationId xmlns:a16="http://schemas.microsoft.com/office/drawing/2014/main" id="{B02885E6-0723-199B-3A31-C7241337188A}"/>
-            </a:ext>
-          </a:extLst>
-        </p:cNvPr>
-        <p:cNvGrpSpPr/>
-        <p:nvPr/>
-      </p:nvGrpSpPr>
-      <p:grpSpPr>
-        <a:xfrm>
-          <a:off x="0" y="0"/>
-          <a:ext cx="0" cy="0"/>
-          <a:chOff x="0" y="0"/>
-          <a:chExt cx="0" cy="0"/>
-        </a:xfrm>
-      </p:grpSpPr>
-      <p:sp>
-        <p:nvSpPr>
-          <p:cNvPr id="388" name="Google Shape;388;gb647448be2_1_153:notes">
-            <a:extLst>
-              <a:ext uri="{FF2B5EF4-FFF2-40B4-BE49-F238E27FC236}">
-                <a16:creationId xmlns:a16="http://schemas.microsoft.com/office/drawing/2014/main" id="{BFFD5599-5816-4B3B-4671-8962590F88CB}"/>
-              </a:ext>
-            </a:extLst>
-          </p:cNvPr>
-          <p:cNvSpPr>
-            <a:spLocks noGrp="1" noRot="1" noChangeAspect="1"/>
-          </p:cNvSpPr>
-          <p:nvPr>
-            <p:ph type="sldImg" idx="2"/>
-          </p:nvPr>
-        </p:nvSpPr>
-        <p:spPr>
-          <a:xfrm>
-            <a:off x="381000" y="685800"/>
-            <a:ext cx="6096000" cy="3429000"/>
-          </a:xfrm>
-          <a:custGeom>
-            <a:avLst/>
-            <a:gdLst/>
-            <a:ahLst/>
-            <a:cxnLst/>
-            <a:rect l="l" t="t" r="r" b="b"/>
-            <a:pathLst>
-              <a:path w="120000" h="120000" extrusionOk="0">
-                <a:moveTo>
-                  <a:pt x="0" y="0"/>
-                </a:moveTo>
-                <a:lnTo>
-                  <a:pt x="120000" y="0"/>
-                </a:lnTo>
-                <a:lnTo>
-                  <a:pt x="120000" y="120000"/>
-                </a:lnTo>
-                <a:lnTo>
-                  <a:pt x="0" y="120000"/>
-                </a:lnTo>
-                <a:close/>
-              </a:path>
-            </a:pathLst>
-          </a:custGeom>
-        </p:spPr>
-      </p:sp>
-      <p:sp>
-        <p:nvSpPr>
-          <p:cNvPr id="389" name="Google Shape;389;gb647448be2_1_153:notes">
-            <a:extLst>
-              <a:ext uri="{FF2B5EF4-FFF2-40B4-BE49-F238E27FC236}">
-                <a16:creationId xmlns:a16="http://schemas.microsoft.com/office/drawing/2014/main" id="{B0ED2550-91A1-2DE0-2A6B-524585BCF657}"/>
-              </a:ext>
-            </a:extLst>
-          </p:cNvPr>
-          <p:cNvSpPr txBox="1">
-            <a:spLocks noGrp="1"/>
-          </p:cNvSpPr>
-          <p:nvPr>
-            <p:ph type="body" idx="1"/>
-          </p:nvPr>
-        </p:nvSpPr>
-        <p:spPr>
-          <a:xfrm>
-            <a:off x="685800" y="4343400"/>
-            <a:ext cx="5486400" cy="4114800"/>
-          </a:xfrm>
-          <a:prstGeom prst="rect">
-            <a:avLst/>
-          </a:prstGeom>
-        </p:spPr>
-        <p:txBody>
-          <a:bodyPr spcFirstLastPara="1" wrap="square" lIns="91425" tIns="91425" rIns="91425" bIns="91425" anchor="t" anchorCtr="0">
-            <a:noAutofit/>
-          </a:bodyPr>
-          <a:lstStyle/>
-          <a:p>
-            <a:pPr marL="0" lvl="0" indent="0" algn="l" rtl="0">
-              <a:spcBef>
-                <a:spcPts val="0"/>
-              </a:spcBef>
-              <a:spcAft>
-                <a:spcPts val="0"/>
-              </a:spcAft>
-              <a:buNone/>
-            </a:pPr>
-            <a:endParaRPr/>
-          </a:p>
-        </p:txBody>
-      </p:sp>
-    </p:spTree>
-    <p:extLst>
-      <p:ext uri="{BB962C8B-B14F-4D97-AF65-F5344CB8AC3E}">
-        <p14:creationId xmlns:p14="http://schemas.microsoft.com/office/powerpoint/2010/main" val="960390698"/>
-      </p:ext>
-    </p:extLst>
-  </p:cSld>
-  <p:clrMapOvr>
-    <a:masterClrMapping/>
-  </p:clrMapOvr>
-</p:notes>
-</file>
-
-<file path=ppt/notesSlides/notesSlide12.xml><?xml version="1.0" encoding="utf-8"?>
-<p:notes xmlns:a="http://schemas.openxmlformats.org/drawingml/2006/main" xmlns:r="http://schemas.openxmlformats.org/officeDocument/2006/relationships" xmlns:p="http://schemas.openxmlformats.org/presentationml/2006/main" showMasterSp="0" showMasterPhAnim="0">
-  <p:cSld>
-    <p:spTree>
-      <p:nvGrpSpPr>
-        <p:cNvPr id="1" name="Shape 441">
-          <a:extLst>
-            <a:ext uri="{FF2B5EF4-FFF2-40B4-BE49-F238E27FC236}">
-              <a16:creationId xmlns:a16="http://schemas.microsoft.com/office/drawing/2014/main" id="{7D4F35FC-6558-2E9D-D971-6B9F8C78A1E2}"/>
-            </a:ext>
-          </a:extLst>
-        </p:cNvPr>
-        <p:cNvGrpSpPr/>
-        <p:nvPr/>
-      </p:nvGrpSpPr>
-      <p:grpSpPr>
-        <a:xfrm>
-          <a:off x="0" y="0"/>
-          <a:ext cx="0" cy="0"/>
-          <a:chOff x="0" y="0"/>
-          <a:chExt cx="0" cy="0"/>
-        </a:xfrm>
-      </p:grpSpPr>
-      <p:sp>
-        <p:nvSpPr>
-          <p:cNvPr id="442" name="Google Shape;442;gaf83f1124d_0_42:notes">
-            <a:extLst>
-              <a:ext uri="{FF2B5EF4-FFF2-40B4-BE49-F238E27FC236}">
-                <a16:creationId xmlns:a16="http://schemas.microsoft.com/office/drawing/2014/main" id="{CE9A5032-B80A-E90D-B065-1BAA1C167A50}"/>
-              </a:ext>
-            </a:extLst>
-          </p:cNvPr>
-          <p:cNvSpPr>
-            <a:spLocks noGrp="1" noRot="1" noChangeAspect="1"/>
-          </p:cNvSpPr>
-          <p:nvPr>
-            <p:ph type="sldImg" idx="2"/>
-          </p:nvPr>
-        </p:nvSpPr>
-        <p:spPr>
-          <a:xfrm>
-            <a:off x="381000" y="685800"/>
-            <a:ext cx="6096000" cy="3429000"/>
-          </a:xfrm>
-          <a:custGeom>
-            <a:avLst/>
-            <a:gdLst/>
-            <a:ahLst/>
-            <a:cxnLst/>
-            <a:rect l="l" t="t" r="r" b="b"/>
-            <a:pathLst>
-              <a:path w="120000" h="120000" extrusionOk="0">
-                <a:moveTo>
-                  <a:pt x="0" y="0"/>
-                </a:moveTo>
-                <a:lnTo>
-                  <a:pt x="120000" y="0"/>
-                </a:lnTo>
-                <a:lnTo>
-                  <a:pt x="120000" y="120000"/>
-                </a:lnTo>
-                <a:lnTo>
-                  <a:pt x="0" y="120000"/>
-                </a:lnTo>
-                <a:close/>
-              </a:path>
-            </a:pathLst>
-          </a:custGeom>
-        </p:spPr>
-      </p:sp>
-      <p:sp>
-        <p:nvSpPr>
-          <p:cNvPr id="443" name="Google Shape;443;gaf83f1124d_0_42:notes">
-            <a:extLst>
-              <a:ext uri="{FF2B5EF4-FFF2-40B4-BE49-F238E27FC236}">
-                <a16:creationId xmlns:a16="http://schemas.microsoft.com/office/drawing/2014/main" id="{B67AE73A-12E6-1C8A-B7DE-C78B01271270}"/>
-              </a:ext>
-            </a:extLst>
-          </p:cNvPr>
-          <p:cNvSpPr txBox="1">
-            <a:spLocks noGrp="1"/>
-          </p:cNvSpPr>
-          <p:nvPr>
-            <p:ph type="body" idx="1"/>
-          </p:nvPr>
-        </p:nvSpPr>
-        <p:spPr>
-          <a:xfrm>
-            <a:off x="685800" y="4343400"/>
-            <a:ext cx="5486400" cy="4114800"/>
-          </a:xfrm>
-          <a:prstGeom prst="rect">
-            <a:avLst/>
-          </a:prstGeom>
-        </p:spPr>
-        <p:txBody>
-          <a:bodyPr spcFirstLastPara="1" wrap="square" lIns="91425" tIns="91425" rIns="91425" bIns="91425" anchor="t" anchorCtr="0">
-            <a:noAutofit/>
-          </a:bodyPr>
-          <a:lstStyle/>
-          <a:p>
-            <a:pPr marL="0" lvl="0" indent="0" algn="l" rtl="0">
-              <a:spcBef>
-                <a:spcPts val="0"/>
-              </a:spcBef>
-              <a:spcAft>
-                <a:spcPts val="0"/>
-              </a:spcAft>
-              <a:buNone/>
-            </a:pPr>
-            <a:endParaRPr/>
-          </a:p>
-        </p:txBody>
-      </p:sp>
-    </p:spTree>
-    <p:extLst>
-      <p:ext uri="{BB962C8B-B14F-4D97-AF65-F5344CB8AC3E}">
-        <p14:creationId xmlns:p14="http://schemas.microsoft.com/office/powerpoint/2010/main" val="776658567"/>
-      </p:ext>
-    </p:extLst>
-  </p:cSld>
-  <p:clrMapOvr>
-    <a:masterClrMapping/>
-  </p:clrMapOvr>
-</p:notes>
-</file>
-
-<file path=ppt/notesSlides/notesSlide13.xml><?xml version="1.0" encoding="utf-8"?>
-<p:notes xmlns:a="http://schemas.openxmlformats.org/drawingml/2006/main" xmlns:r="http://schemas.openxmlformats.org/officeDocument/2006/relationships" xmlns:p="http://schemas.openxmlformats.org/presentationml/2006/main" showMasterSp="0" showMasterPhAnim="0">
-  <p:cSld>
-    <p:spTree>
-      <p:nvGrpSpPr>
-        <p:cNvPr id="1" name="Shape 387">
-          <a:extLst>
-            <a:ext uri="{FF2B5EF4-FFF2-40B4-BE49-F238E27FC236}">
-              <a16:creationId xmlns:a16="http://schemas.microsoft.com/office/drawing/2014/main" id="{61275758-797E-7E03-CF36-3BB684EEBF24}"/>
-            </a:ext>
-          </a:extLst>
-        </p:cNvPr>
-        <p:cNvGrpSpPr/>
-        <p:nvPr/>
-      </p:nvGrpSpPr>
-      <p:grpSpPr>
-        <a:xfrm>
-          <a:off x="0" y="0"/>
-          <a:ext cx="0" cy="0"/>
-          <a:chOff x="0" y="0"/>
-          <a:chExt cx="0" cy="0"/>
-        </a:xfrm>
-      </p:grpSpPr>
-      <p:sp>
-        <p:nvSpPr>
-          <p:cNvPr id="388" name="Google Shape;388;gb647448be2_1_153:notes">
-            <a:extLst>
-              <a:ext uri="{FF2B5EF4-FFF2-40B4-BE49-F238E27FC236}">
-                <a16:creationId xmlns:a16="http://schemas.microsoft.com/office/drawing/2014/main" id="{5D65FA3A-0F82-06D1-CA70-A23A2FF74B88}"/>
-              </a:ext>
-            </a:extLst>
-          </p:cNvPr>
-          <p:cNvSpPr>
-            <a:spLocks noGrp="1" noRot="1" noChangeAspect="1"/>
-          </p:cNvSpPr>
-          <p:nvPr>
-            <p:ph type="sldImg" idx="2"/>
-          </p:nvPr>
-        </p:nvSpPr>
-        <p:spPr>
-          <a:xfrm>
-            <a:off x="381000" y="685800"/>
-            <a:ext cx="6096000" cy="3429000"/>
-          </a:xfrm>
-          <a:custGeom>
-            <a:avLst/>
-            <a:gdLst/>
-            <a:ahLst/>
-            <a:cxnLst/>
-            <a:rect l="l" t="t" r="r" b="b"/>
-            <a:pathLst>
-              <a:path w="120000" h="120000" extrusionOk="0">
-                <a:moveTo>
-                  <a:pt x="0" y="0"/>
-                </a:moveTo>
-                <a:lnTo>
-                  <a:pt x="120000" y="0"/>
-                </a:lnTo>
-                <a:lnTo>
-                  <a:pt x="120000" y="120000"/>
-                </a:lnTo>
-                <a:lnTo>
-                  <a:pt x="0" y="120000"/>
-                </a:lnTo>
-                <a:close/>
-              </a:path>
-            </a:pathLst>
-          </a:custGeom>
-        </p:spPr>
-      </p:sp>
-      <p:sp>
-        <p:nvSpPr>
-          <p:cNvPr id="389" name="Google Shape;389;gb647448be2_1_153:notes">
-            <a:extLst>
-              <a:ext uri="{FF2B5EF4-FFF2-40B4-BE49-F238E27FC236}">
-                <a16:creationId xmlns:a16="http://schemas.microsoft.com/office/drawing/2014/main" id="{55FFD413-0BB7-B194-3815-84D6CA96B293}"/>
-              </a:ext>
-            </a:extLst>
-          </p:cNvPr>
-          <p:cNvSpPr txBox="1">
-            <a:spLocks noGrp="1"/>
-          </p:cNvSpPr>
-          <p:nvPr>
-            <p:ph type="body" idx="1"/>
-          </p:nvPr>
-        </p:nvSpPr>
-        <p:spPr>
-          <a:xfrm>
-            <a:off x="685800" y="4343400"/>
-            <a:ext cx="5486400" cy="4114800"/>
-          </a:xfrm>
-          <a:prstGeom prst="rect">
-            <a:avLst/>
-          </a:prstGeom>
-        </p:spPr>
-        <p:txBody>
-          <a:bodyPr spcFirstLastPara="1" wrap="square" lIns="91425" tIns="91425" rIns="91425" bIns="91425" anchor="t" anchorCtr="0">
-            <a:noAutofit/>
-          </a:bodyPr>
-          <a:lstStyle/>
-          <a:p>
-            <a:pPr marL="0" lvl="0" indent="0" algn="l" rtl="0">
-              <a:spcBef>
-                <a:spcPts val="0"/>
-              </a:spcBef>
-              <a:spcAft>
-                <a:spcPts val="0"/>
-              </a:spcAft>
-              <a:buNone/>
-            </a:pPr>
-            <a:endParaRPr/>
-          </a:p>
-        </p:txBody>
-      </p:sp>
-    </p:spTree>
-    <p:extLst>
-      <p:ext uri="{BB962C8B-B14F-4D97-AF65-F5344CB8AC3E}">
-        <p14:creationId xmlns:p14="http://schemas.microsoft.com/office/powerpoint/2010/main" val="3877825363"/>
-      </p:ext>
-    </p:extLst>
-  </p:cSld>
-  <p:clrMapOvr>
-    <a:masterClrMapping/>
-  </p:clrMapOvr>
-</p:notes>
-</file>
-
-<file path=ppt/notesSlides/notesSlide14.xml><?xml version="1.0" encoding="utf-8"?>
-<p:notes xmlns:a="http://schemas.openxmlformats.org/drawingml/2006/main" xmlns:r="http://schemas.openxmlformats.org/officeDocument/2006/relationships" xmlns:p="http://schemas.openxmlformats.org/presentationml/2006/main" showMasterSp="0" showMasterPhAnim="0">
-  <p:cSld>
-    <p:spTree>
-      <p:nvGrpSpPr>
-        <p:cNvPr id="1" name="Shape 454"/>
-        <p:cNvGrpSpPr/>
-        <p:nvPr/>
-      </p:nvGrpSpPr>
-      <p:grpSpPr>
-        <a:xfrm>
-          <a:off x="0" y="0"/>
-          <a:ext cx="0" cy="0"/>
-          <a:chOff x="0" y="0"/>
-          <a:chExt cx="0" cy="0"/>
-        </a:xfrm>
-      </p:grpSpPr>
-      <p:sp>
-        <p:nvSpPr>
-          <p:cNvPr id="455" name="Google Shape;455;gb56d264711_0_259:notes"/>
-          <p:cNvSpPr>
-            <a:spLocks noGrp="1" noRot="1" noChangeAspect="1"/>
-          </p:cNvSpPr>
-          <p:nvPr>
-            <p:ph type="sldImg" idx="2"/>
-          </p:nvPr>
-        </p:nvSpPr>
-        <p:spPr>
-          <a:xfrm>
-            <a:off x="381000" y="685800"/>
-            <a:ext cx="6096000" cy="3429000"/>
-          </a:xfrm>
-          <a:custGeom>
-            <a:avLst/>
-            <a:gdLst/>
-            <a:ahLst/>
-            <a:cxnLst/>
-            <a:rect l="l" t="t" r="r" b="b"/>
-            <a:pathLst>
-              <a:path w="120000" h="120000" extrusionOk="0">
-                <a:moveTo>
-                  <a:pt x="0" y="0"/>
-                </a:moveTo>
-                <a:lnTo>
-                  <a:pt x="120000" y="0"/>
-                </a:lnTo>
-                <a:lnTo>
-                  <a:pt x="120000" y="120000"/>
-                </a:lnTo>
-                <a:lnTo>
-                  <a:pt x="0" y="120000"/>
-                </a:lnTo>
-                <a:close/>
-              </a:path>
-            </a:pathLst>
-          </a:custGeom>
-        </p:spPr>
-      </p:sp>
-      <p:sp>
-        <p:nvSpPr>
-          <p:cNvPr id="456" name="Google Shape;456;gb56d264711_0_259:notes"/>
-          <p:cNvSpPr txBox="1">
-            <a:spLocks noGrp="1"/>
-          </p:cNvSpPr>
-          <p:nvPr>
-            <p:ph type="body" idx="1"/>
-          </p:nvPr>
-        </p:nvSpPr>
-        <p:spPr>
-          <a:xfrm>
-            <a:off x="685800" y="4343400"/>
-            <a:ext cx="5486400" cy="4114800"/>
-          </a:xfrm>
-          <a:prstGeom prst="rect">
-            <a:avLst/>
-          </a:prstGeom>
-        </p:spPr>
-        <p:txBody>
-          <a:bodyPr spcFirstLastPara="1" wrap="square" lIns="91425" tIns="91425" rIns="91425" bIns="91425" anchor="t" anchorCtr="0">
-            <a:noAutofit/>
-          </a:bodyPr>
-          <a:lstStyle/>
-          <a:p>
-            <a:pPr marL="0" lvl="0" indent="0" algn="l" rtl="0">
-              <a:spcBef>
-                <a:spcPts val="0"/>
-              </a:spcBef>
-              <a:spcAft>
-                <a:spcPts val="0"/>
-              </a:spcAft>
-              <a:buNone/>
-            </a:pPr>
-            <a:endParaRPr/>
-          </a:p>
-        </p:txBody>
-      </p:sp>
-    </p:spTree>
-  </p:cSld>
-  <p:clrMapOvr>
-    <a:masterClrMapping/>
-  </p:clrMapOvr>
-</p:notes>
-</file>
-
-<file path=ppt/notesSlides/notesSlide15.xml><?xml version="1.0" encoding="utf-8"?>
-<p:notes xmlns:a="http://schemas.openxmlformats.org/drawingml/2006/main" xmlns:r="http://schemas.openxmlformats.org/officeDocument/2006/relationships" xmlns:p="http://schemas.openxmlformats.org/presentationml/2006/main" showMasterSp="0" showMasterPhAnim="0">
-  <p:cSld>
-    <p:spTree>
-      <p:nvGrpSpPr>
-        <p:cNvPr id="1" name="Shape 649"/>
-        <p:cNvGrpSpPr/>
-        <p:nvPr/>
-      </p:nvGrpSpPr>
-      <p:grpSpPr>
-        <a:xfrm>
-          <a:off x="0" y="0"/>
-          <a:ext cx="0" cy="0"/>
-          <a:chOff x="0" y="0"/>
-          <a:chExt cx="0" cy="0"/>
-        </a:xfrm>
-      </p:grpSpPr>
-      <p:sp>
-        <p:nvSpPr>
-          <p:cNvPr id="650" name="Google Shape;650;gb647448be2_1_484:notes"/>
-          <p:cNvSpPr>
-            <a:spLocks noGrp="1" noRot="1" noChangeAspect="1"/>
-          </p:cNvSpPr>
-          <p:nvPr>
-            <p:ph type="sldImg" idx="2"/>
-          </p:nvPr>
-        </p:nvSpPr>
-        <p:spPr>
-          <a:xfrm>
-            <a:off x="381000" y="685800"/>
-            <a:ext cx="6096000" cy="3429000"/>
-          </a:xfrm>
-          <a:custGeom>
-            <a:avLst/>
-            <a:gdLst/>
-            <a:ahLst/>
-            <a:cxnLst/>
-            <a:rect l="l" t="t" r="r" b="b"/>
-            <a:pathLst>
-              <a:path w="120000" h="120000" extrusionOk="0">
-                <a:moveTo>
-                  <a:pt x="0" y="0"/>
-                </a:moveTo>
-                <a:lnTo>
-                  <a:pt x="120000" y="0"/>
-                </a:lnTo>
-                <a:lnTo>
-                  <a:pt x="120000" y="120000"/>
-                </a:lnTo>
-                <a:lnTo>
-                  <a:pt x="0" y="120000"/>
-                </a:lnTo>
-                <a:close/>
-              </a:path>
-            </a:pathLst>
-          </a:custGeom>
-        </p:spPr>
-      </p:sp>
-      <p:sp>
-        <p:nvSpPr>
-          <p:cNvPr id="651" name="Google Shape;651;gb647448be2_1_484:notes"/>
-          <p:cNvSpPr txBox="1">
-            <a:spLocks noGrp="1"/>
-          </p:cNvSpPr>
-          <p:nvPr>
-            <p:ph type="body" idx="1"/>
-          </p:nvPr>
-        </p:nvSpPr>
-        <p:spPr>
-          <a:xfrm>
-            <a:off x="685800" y="4343400"/>
-            <a:ext cx="5486400" cy="4114800"/>
-          </a:xfrm>
-          <a:prstGeom prst="rect">
-            <a:avLst/>
-          </a:prstGeom>
-        </p:spPr>
-        <p:txBody>
-          <a:bodyPr spcFirstLastPara="1" wrap="square" lIns="91425" tIns="91425" rIns="91425" bIns="91425" anchor="t" anchorCtr="0">
-            <a:noAutofit/>
-          </a:bodyPr>
-          <a:lstStyle/>
-          <a:p>
-            <a:pPr marL="0" lvl="0" indent="0" algn="l" rtl="0">
-              <a:spcBef>
-                <a:spcPts val="0"/>
-              </a:spcBef>
-              <a:spcAft>
-                <a:spcPts val="0"/>
-              </a:spcAft>
-              <a:buNone/>
-            </a:pPr>
-            <a:endParaRPr/>
-          </a:p>
-        </p:txBody>
-      </p:sp>
-    </p:spTree>
-  </p:cSld>
-  <p:clrMapOvr>
-    <a:masterClrMapping/>
-  </p:clrMapOvr>
-</p:notes>
-</file>
-
-<file path=ppt/notesSlides/notesSlide2.xml><?xml version="1.0" encoding="utf-8"?>
-<p:notes xmlns:a="http://schemas.openxmlformats.org/drawingml/2006/main" xmlns:r="http://schemas.openxmlformats.org/officeDocument/2006/relationships" xmlns:p="http://schemas.openxmlformats.org/presentationml/2006/main" showMasterSp="0" showMasterPhAnim="0">
-  <p:cSld>
-    <p:spTree>
-      <p:nvGrpSpPr>
-        <p:cNvPr id="1" name="Shape 408"/>
-        <p:cNvGrpSpPr/>
-        <p:nvPr/>
-      </p:nvGrpSpPr>
-      <p:grpSpPr>
-        <a:xfrm>
-          <a:off x="0" y="0"/>
-          <a:ext cx="0" cy="0"/>
-          <a:chOff x="0" y="0"/>
-          <a:chExt cx="0" cy="0"/>
-        </a:xfrm>
-      </p:grpSpPr>
-      <p:sp>
-        <p:nvSpPr>
-          <p:cNvPr id="409" name="Google Shape;409;gb56d264711_0_0:notes"/>
-          <p:cNvSpPr>
-            <a:spLocks noGrp="1" noRot="1" noChangeAspect="1"/>
-          </p:cNvSpPr>
-          <p:nvPr>
-            <p:ph type="sldImg" idx="2"/>
-          </p:nvPr>
-        </p:nvSpPr>
-        <p:spPr>
-          <a:xfrm>
-            <a:off x="381000" y="685800"/>
-            <a:ext cx="6096000" cy="3429000"/>
-          </a:xfrm>
-          <a:custGeom>
-            <a:avLst/>
-            <a:gdLst/>
-            <a:ahLst/>
-            <a:cxnLst/>
-            <a:rect l="l" t="t" r="r" b="b"/>
-            <a:pathLst>
-              <a:path w="120000" h="120000" extrusionOk="0">
-                <a:moveTo>
-                  <a:pt x="0" y="0"/>
-                </a:moveTo>
-                <a:lnTo>
-                  <a:pt x="120000" y="0"/>
-                </a:lnTo>
-                <a:lnTo>
-                  <a:pt x="120000" y="120000"/>
-                </a:lnTo>
-                <a:lnTo>
-                  <a:pt x="0" y="120000"/>
-                </a:lnTo>
-                <a:close/>
-              </a:path>
-            </a:pathLst>
-          </a:custGeom>
-        </p:spPr>
-      </p:sp>
-      <p:sp>
-        <p:nvSpPr>
-          <p:cNvPr id="410" name="Google Shape;410;gb56d264711_0_0:notes"/>
-          <p:cNvSpPr txBox="1">
-            <a:spLocks noGrp="1"/>
-          </p:cNvSpPr>
-          <p:nvPr>
-            <p:ph type="body" idx="1"/>
-          </p:nvPr>
-        </p:nvSpPr>
-        <p:spPr>
-          <a:xfrm>
-            <a:off x="685800" y="4343400"/>
-            <a:ext cx="5486400" cy="4114800"/>
-          </a:xfrm>
-          <a:prstGeom prst="rect">
-            <a:avLst/>
-          </a:prstGeom>
-        </p:spPr>
-        <p:txBody>
-          <a:bodyPr spcFirstLastPara="1" wrap="square" lIns="91425" tIns="91425" rIns="91425" bIns="91425" anchor="t" anchorCtr="0">
-            <a:noAutofit/>
-          </a:bodyPr>
-          <a:lstStyle/>
-          <a:p>
-            <a:pPr marL="0" lvl="0" indent="0" algn="l" rtl="0">
-              <a:spcBef>
-                <a:spcPts val="0"/>
-              </a:spcBef>
-              <a:spcAft>
-                <a:spcPts val="0"/>
-              </a:spcAft>
-              <a:buNone/>
-            </a:pPr>
-            <a:endParaRPr/>
-          </a:p>
-        </p:txBody>
-      </p:sp>
-    </p:spTree>
-  </p:cSld>
-  <p:clrMapOvr>
-    <a:masterClrMapping/>
-  </p:clrMapOvr>
-</p:notes>
-</file>
-
-<file path=ppt/notesSlides/notesSlide3.xml><?xml version="1.0" encoding="utf-8"?>
-<p:notes xmlns:a="http://schemas.openxmlformats.org/drawingml/2006/main" xmlns:r="http://schemas.openxmlformats.org/officeDocument/2006/relationships" xmlns:p="http://schemas.openxmlformats.org/presentationml/2006/main" showMasterSp="0" showMasterPhAnim="0">
-  <p:cSld>
-    <p:spTree>
-      <p:nvGrpSpPr>
-        <p:cNvPr id="1" name="Shape 441">
-          <a:extLst>
-            <a:ext uri="{FF2B5EF4-FFF2-40B4-BE49-F238E27FC236}">
-              <a16:creationId xmlns:a16="http://schemas.microsoft.com/office/drawing/2014/main" id="{C5A9E23A-8961-1917-E055-AF8514A0D686}"/>
-            </a:ext>
-          </a:extLst>
-        </p:cNvPr>
-        <p:cNvGrpSpPr/>
-        <p:nvPr/>
-      </p:nvGrpSpPr>
-      <p:grpSpPr>
-        <a:xfrm>
-          <a:off x="0" y="0"/>
-          <a:ext cx="0" cy="0"/>
-          <a:chOff x="0" y="0"/>
-          <a:chExt cx="0" cy="0"/>
-        </a:xfrm>
-      </p:grpSpPr>
-      <p:sp>
-        <p:nvSpPr>
-          <p:cNvPr id="442" name="Google Shape;442;gaf83f1124d_0_42:notes">
-            <a:extLst>
-              <a:ext uri="{FF2B5EF4-FFF2-40B4-BE49-F238E27FC236}">
-                <a16:creationId xmlns:a16="http://schemas.microsoft.com/office/drawing/2014/main" id="{FD5C637B-D764-C590-6516-0B022FC27B07}"/>
-              </a:ext>
-            </a:extLst>
-          </p:cNvPr>
-          <p:cNvSpPr>
-            <a:spLocks noGrp="1" noRot="1" noChangeAspect="1"/>
-          </p:cNvSpPr>
-          <p:nvPr>
-            <p:ph type="sldImg" idx="2"/>
-          </p:nvPr>
-        </p:nvSpPr>
-        <p:spPr>
-          <a:xfrm>
-            <a:off x="381000" y="685800"/>
-            <a:ext cx="6096000" cy="3429000"/>
-          </a:xfrm>
-          <a:custGeom>
-            <a:avLst/>
-            <a:gdLst/>
-            <a:ahLst/>
-            <a:cxnLst/>
-            <a:rect l="l" t="t" r="r" b="b"/>
-            <a:pathLst>
-              <a:path w="120000" h="120000" extrusionOk="0">
-                <a:moveTo>
-                  <a:pt x="0" y="0"/>
-                </a:moveTo>
-                <a:lnTo>
-                  <a:pt x="120000" y="0"/>
-                </a:lnTo>
-                <a:lnTo>
-                  <a:pt x="120000" y="120000"/>
-                </a:lnTo>
-                <a:lnTo>
-                  <a:pt x="0" y="120000"/>
-                </a:lnTo>
-                <a:close/>
-              </a:path>
-            </a:pathLst>
-          </a:custGeom>
-        </p:spPr>
-      </p:sp>
-      <p:sp>
-        <p:nvSpPr>
-          <p:cNvPr id="443" name="Google Shape;443;gaf83f1124d_0_42:notes">
-            <a:extLst>
-              <a:ext uri="{FF2B5EF4-FFF2-40B4-BE49-F238E27FC236}">
-                <a16:creationId xmlns:a16="http://schemas.microsoft.com/office/drawing/2014/main" id="{EDF55E03-31C0-6909-1336-6157DD357488}"/>
-              </a:ext>
-            </a:extLst>
-          </p:cNvPr>
-          <p:cNvSpPr txBox="1">
-            <a:spLocks noGrp="1"/>
-          </p:cNvSpPr>
-          <p:nvPr>
-            <p:ph type="body" idx="1"/>
-          </p:nvPr>
-        </p:nvSpPr>
-        <p:spPr>
-          <a:xfrm>
-            <a:off x="685800" y="4343400"/>
-            <a:ext cx="5486400" cy="4114800"/>
-          </a:xfrm>
-          <a:prstGeom prst="rect">
-            <a:avLst/>
-          </a:prstGeom>
-        </p:spPr>
-        <p:txBody>
-          <a:bodyPr spcFirstLastPara="1" wrap="square" lIns="91425" tIns="91425" rIns="91425" bIns="91425" anchor="t" anchorCtr="0">
-            <a:noAutofit/>
-          </a:bodyPr>
-          <a:lstStyle/>
-          <a:p>
-            <a:pPr marL="0" lvl="0" indent="0" algn="l" rtl="0">
-              <a:spcBef>
-                <a:spcPts val="0"/>
-              </a:spcBef>
-              <a:spcAft>
-                <a:spcPts val="0"/>
-              </a:spcAft>
-              <a:buNone/>
-            </a:pPr>
-            <a:endParaRPr/>
-          </a:p>
-        </p:txBody>
-      </p:sp>
-    </p:spTree>
-    <p:extLst>
-      <p:ext uri="{BB962C8B-B14F-4D97-AF65-F5344CB8AC3E}">
-        <p14:creationId xmlns:p14="http://schemas.microsoft.com/office/powerpoint/2010/main" val="370107256"/>
-      </p:ext>
-    </p:extLst>
-  </p:cSld>
-  <p:clrMapOvr>
-    <a:masterClrMapping/>
-  </p:clrMapOvr>
-</p:notes>
-</file>
-
-<file path=ppt/notesSlides/notesSlide4.xml><?xml version="1.0" encoding="utf-8"?>
-<p:notes xmlns:a="http://schemas.openxmlformats.org/drawingml/2006/main" xmlns:r="http://schemas.openxmlformats.org/officeDocument/2006/relationships" xmlns:p="http://schemas.openxmlformats.org/presentationml/2006/main" showMasterSp="0" showMasterPhAnim="0">
-  <p:cSld>
-    <p:spTree>
-      <p:nvGrpSpPr>
-        <p:cNvPr id="1" name="Shape 387">
-          <a:extLst>
-            <a:ext uri="{FF2B5EF4-FFF2-40B4-BE49-F238E27FC236}">
-              <a16:creationId xmlns:a16="http://schemas.microsoft.com/office/drawing/2014/main" id="{A0D081F3-F898-E420-C369-A860D1566839}"/>
-            </a:ext>
-          </a:extLst>
-        </p:cNvPr>
-        <p:cNvGrpSpPr/>
-        <p:nvPr/>
-      </p:nvGrpSpPr>
-      <p:grpSpPr>
-        <a:xfrm>
-          <a:off x="0" y="0"/>
-          <a:ext cx="0" cy="0"/>
-          <a:chOff x="0" y="0"/>
-          <a:chExt cx="0" cy="0"/>
-        </a:xfrm>
-      </p:grpSpPr>
-      <p:sp>
-        <p:nvSpPr>
-          <p:cNvPr id="388" name="Google Shape;388;gb647448be2_1_153:notes">
-            <a:extLst>
-              <a:ext uri="{FF2B5EF4-FFF2-40B4-BE49-F238E27FC236}">
-                <a16:creationId xmlns:a16="http://schemas.microsoft.com/office/drawing/2014/main" id="{78667555-4E5C-CFE7-3D50-FB7A7E39B5CB}"/>
-              </a:ext>
-            </a:extLst>
-          </p:cNvPr>
-          <p:cNvSpPr>
-            <a:spLocks noGrp="1" noRot="1" noChangeAspect="1"/>
-          </p:cNvSpPr>
-          <p:nvPr>
-            <p:ph type="sldImg" idx="2"/>
-          </p:nvPr>
-        </p:nvSpPr>
-        <p:spPr>
-          <a:xfrm>
-            <a:off x="381000" y="685800"/>
-            <a:ext cx="6096000" cy="3429000"/>
-          </a:xfrm>
-          <a:custGeom>
-            <a:avLst/>
-            <a:gdLst/>
-            <a:ahLst/>
-            <a:cxnLst/>
-            <a:rect l="l" t="t" r="r" b="b"/>
-            <a:pathLst>
-              <a:path w="120000" h="120000" extrusionOk="0">
-                <a:moveTo>
-                  <a:pt x="0" y="0"/>
-                </a:moveTo>
-                <a:lnTo>
-                  <a:pt x="120000" y="0"/>
-                </a:lnTo>
-                <a:lnTo>
-                  <a:pt x="120000" y="120000"/>
-                </a:lnTo>
-                <a:lnTo>
-                  <a:pt x="0" y="120000"/>
-                </a:lnTo>
-                <a:close/>
-              </a:path>
-            </a:pathLst>
-          </a:custGeom>
-        </p:spPr>
-      </p:sp>
-      <p:sp>
-        <p:nvSpPr>
-          <p:cNvPr id="389" name="Google Shape;389;gb647448be2_1_153:notes">
-            <a:extLst>
-              <a:ext uri="{FF2B5EF4-FFF2-40B4-BE49-F238E27FC236}">
-                <a16:creationId xmlns:a16="http://schemas.microsoft.com/office/drawing/2014/main" id="{577445B1-E0DE-57FD-316C-AD811FE5D765}"/>
-              </a:ext>
-            </a:extLst>
-          </p:cNvPr>
-          <p:cNvSpPr txBox="1">
-            <a:spLocks noGrp="1"/>
-          </p:cNvSpPr>
-          <p:nvPr>
-            <p:ph type="body" idx="1"/>
-          </p:nvPr>
-        </p:nvSpPr>
-        <p:spPr>
-          <a:xfrm>
-            <a:off x="685800" y="4343400"/>
-            <a:ext cx="5486400" cy="4114800"/>
-          </a:xfrm>
-          <a:prstGeom prst="rect">
-            <a:avLst/>
-          </a:prstGeom>
-        </p:spPr>
-        <p:txBody>
-          <a:bodyPr spcFirstLastPara="1" wrap="square" lIns="91425" tIns="91425" rIns="91425" bIns="91425" anchor="t" anchorCtr="0">
-            <a:noAutofit/>
-          </a:bodyPr>
-          <a:lstStyle/>
-          <a:p>
-            <a:pPr marL="0" lvl="0" indent="0" algn="l" rtl="0">
-              <a:spcBef>
-                <a:spcPts val="0"/>
-              </a:spcBef>
-              <a:spcAft>
-                <a:spcPts val="0"/>
-              </a:spcAft>
-              <a:buNone/>
-            </a:pPr>
-            <a:endParaRPr/>
-          </a:p>
-        </p:txBody>
-      </p:sp>
-    </p:spTree>
-    <p:extLst>
-      <p:ext uri="{BB962C8B-B14F-4D97-AF65-F5344CB8AC3E}">
-        <p14:creationId xmlns:p14="http://schemas.microsoft.com/office/powerpoint/2010/main" val="2629907878"/>
-      </p:ext>
-    </p:extLst>
-  </p:cSld>
-  <p:clrMapOvr>
-    <a:masterClrMapping/>
-  </p:clrMapOvr>
-</p:notes>
-</file>
-
-<file path=ppt/notesSlides/notesSlide5.xml><?xml version="1.0" encoding="utf-8"?>
-<p:notes xmlns:a="http://schemas.openxmlformats.org/drawingml/2006/main" xmlns:r="http://schemas.openxmlformats.org/officeDocument/2006/relationships" xmlns:p="http://schemas.openxmlformats.org/presentationml/2006/main" showMasterSp="0" showMasterPhAnim="0">
-  <p:cSld>
-    <p:spTree>
-      <p:nvGrpSpPr>
-        <p:cNvPr id="1" name="Shape 428"/>
-        <p:cNvGrpSpPr/>
-        <p:nvPr/>
-      </p:nvGrpSpPr>
-      <p:grpSpPr>
-        <a:xfrm>
-          <a:off x="0" y="0"/>
-          <a:ext cx="0" cy="0"/>
-          <a:chOff x="0" y="0"/>
-          <a:chExt cx="0" cy="0"/>
-        </a:xfrm>
-      </p:grpSpPr>
-      <p:sp>
-        <p:nvSpPr>
-          <p:cNvPr id="429" name="Google Shape;429;gb56d264711_0_5:notes"/>
-          <p:cNvSpPr>
-            <a:spLocks noGrp="1" noRot="1" noChangeAspect="1"/>
-          </p:cNvSpPr>
-          <p:nvPr>
-            <p:ph type="sldImg" idx="2"/>
-          </p:nvPr>
-        </p:nvSpPr>
-        <p:spPr>
-          <a:xfrm>
-            <a:off x="381000" y="685800"/>
-            <a:ext cx="6096000" cy="3429000"/>
-          </a:xfrm>
-          <a:custGeom>
-            <a:avLst/>
-            <a:gdLst/>
-            <a:ahLst/>
-            <a:cxnLst/>
-            <a:rect l="l" t="t" r="r" b="b"/>
-            <a:pathLst>
-              <a:path w="120000" h="120000" extrusionOk="0">
-                <a:moveTo>
-                  <a:pt x="0" y="0"/>
-                </a:moveTo>
-                <a:lnTo>
-                  <a:pt x="120000" y="0"/>
-                </a:lnTo>
-                <a:lnTo>
-                  <a:pt x="120000" y="120000"/>
-                </a:lnTo>
-                <a:lnTo>
-                  <a:pt x="0" y="120000"/>
-                </a:lnTo>
-                <a:close/>
-              </a:path>
-            </a:pathLst>
-          </a:custGeom>
-        </p:spPr>
-      </p:sp>
-      <p:sp>
-        <p:nvSpPr>
-          <p:cNvPr id="430" name="Google Shape;430;gb56d264711_0_5:notes"/>
-          <p:cNvSpPr txBox="1">
-            <a:spLocks noGrp="1"/>
-          </p:cNvSpPr>
-          <p:nvPr>
-            <p:ph type="body" idx="1"/>
-          </p:nvPr>
-        </p:nvSpPr>
-        <p:spPr>
-          <a:xfrm>
-            <a:off x="685800" y="4343400"/>
-            <a:ext cx="5486400" cy="4114800"/>
-          </a:xfrm>
-          <a:prstGeom prst="rect">
-            <a:avLst/>
-          </a:prstGeom>
-        </p:spPr>
-        <p:txBody>
-          <a:bodyPr spcFirstLastPara="1" wrap="square" lIns="91425" tIns="91425" rIns="91425" bIns="91425" anchor="t" anchorCtr="0">
-            <a:noAutofit/>
-          </a:bodyPr>
-          <a:lstStyle/>
-          <a:p>
-            <a:pPr marL="0" lvl="0" indent="0" algn="l" rtl="0">
-              <a:spcBef>
-                <a:spcPts val="0"/>
-              </a:spcBef>
-              <a:spcAft>
-                <a:spcPts val="0"/>
-              </a:spcAft>
-              <a:buNone/>
-            </a:pPr>
-            <a:endParaRPr dirty="0"/>
-          </a:p>
-        </p:txBody>
-      </p:sp>
-    </p:spTree>
-  </p:cSld>
-  <p:clrMapOvr>
-    <a:masterClrMapping/>
-  </p:clrMapOvr>
-</p:notes>
-</file>
-
-<file path=ppt/notesSlides/notesSlide6.xml><?xml version="1.0" encoding="utf-8"?>
-<p:notes xmlns:a="http://schemas.openxmlformats.org/drawingml/2006/main" xmlns:r="http://schemas.openxmlformats.org/officeDocument/2006/relationships" xmlns:p="http://schemas.openxmlformats.org/presentationml/2006/main" showMasterSp="0" showMasterPhAnim="0">
-  <p:cSld>
-    <p:spTree>
-      <p:nvGrpSpPr>
-        <p:cNvPr id="1" name="Shape 441">
-          <a:extLst>
-            <a:ext uri="{FF2B5EF4-FFF2-40B4-BE49-F238E27FC236}">
-              <a16:creationId xmlns:a16="http://schemas.microsoft.com/office/drawing/2014/main" id="{FA37D7F9-861A-EFDB-9691-51070B9293F5}"/>
-            </a:ext>
-          </a:extLst>
-        </p:cNvPr>
-        <p:cNvGrpSpPr/>
-        <p:nvPr/>
-      </p:nvGrpSpPr>
-      <p:grpSpPr>
-        <a:xfrm>
-          <a:off x="0" y="0"/>
-          <a:ext cx="0" cy="0"/>
-          <a:chOff x="0" y="0"/>
-          <a:chExt cx="0" cy="0"/>
-        </a:xfrm>
-      </p:grpSpPr>
-      <p:sp>
-        <p:nvSpPr>
-          <p:cNvPr id="442" name="Google Shape;442;gaf83f1124d_0_42:notes">
-            <a:extLst>
-              <a:ext uri="{FF2B5EF4-FFF2-40B4-BE49-F238E27FC236}">
-                <a16:creationId xmlns:a16="http://schemas.microsoft.com/office/drawing/2014/main" id="{4ABA1A8B-5195-DB52-FB97-84F393F3EF05}"/>
-              </a:ext>
-            </a:extLst>
-          </p:cNvPr>
-          <p:cNvSpPr>
-            <a:spLocks noGrp="1" noRot="1" noChangeAspect="1"/>
-          </p:cNvSpPr>
-          <p:nvPr>
-            <p:ph type="sldImg" idx="2"/>
-          </p:nvPr>
-        </p:nvSpPr>
-        <p:spPr>
-          <a:xfrm>
-            <a:off x="381000" y="685800"/>
-            <a:ext cx="6096000" cy="3429000"/>
-          </a:xfrm>
-          <a:custGeom>
-            <a:avLst/>
-            <a:gdLst/>
-            <a:ahLst/>
-            <a:cxnLst/>
-            <a:rect l="l" t="t" r="r" b="b"/>
-            <a:pathLst>
-              <a:path w="120000" h="120000" extrusionOk="0">
-                <a:moveTo>
-                  <a:pt x="0" y="0"/>
-                </a:moveTo>
-                <a:lnTo>
-                  <a:pt x="120000" y="0"/>
-                </a:lnTo>
-                <a:lnTo>
-                  <a:pt x="120000" y="120000"/>
-                </a:lnTo>
-                <a:lnTo>
-                  <a:pt x="0" y="120000"/>
-                </a:lnTo>
-                <a:close/>
-              </a:path>
-            </a:pathLst>
-          </a:custGeom>
-        </p:spPr>
-      </p:sp>
-      <p:sp>
-        <p:nvSpPr>
-          <p:cNvPr id="443" name="Google Shape;443;gaf83f1124d_0_42:notes">
-            <a:extLst>
-              <a:ext uri="{FF2B5EF4-FFF2-40B4-BE49-F238E27FC236}">
-                <a16:creationId xmlns:a16="http://schemas.microsoft.com/office/drawing/2014/main" id="{B3FDF502-745F-A613-029A-19CDC42616DE}"/>
-              </a:ext>
-            </a:extLst>
-          </p:cNvPr>
-          <p:cNvSpPr txBox="1">
-            <a:spLocks noGrp="1"/>
-          </p:cNvSpPr>
-          <p:nvPr>
-            <p:ph type="body" idx="1"/>
-          </p:nvPr>
-        </p:nvSpPr>
-        <p:spPr>
-          <a:xfrm>
-            <a:off x="685800" y="4343400"/>
-            <a:ext cx="5486400" cy="4114800"/>
-          </a:xfrm>
-          <a:prstGeom prst="rect">
-            <a:avLst/>
-          </a:prstGeom>
-        </p:spPr>
-        <p:txBody>
-          <a:bodyPr spcFirstLastPara="1" wrap="square" lIns="91425" tIns="91425" rIns="91425" bIns="91425" anchor="t" anchorCtr="0">
-            <a:noAutofit/>
-          </a:bodyPr>
-          <a:lstStyle/>
-          <a:p>
-            <a:pPr marL="0" lvl="0" indent="0" algn="l" rtl="0">
-              <a:spcBef>
-                <a:spcPts val="0"/>
-              </a:spcBef>
-              <a:spcAft>
-                <a:spcPts val="0"/>
-              </a:spcAft>
-              <a:buNone/>
-            </a:pPr>
-            <a:endParaRPr/>
-          </a:p>
-        </p:txBody>
-      </p:sp>
-    </p:spTree>
-    <p:extLst>
-      <p:ext uri="{BB962C8B-B14F-4D97-AF65-F5344CB8AC3E}">
-        <p14:creationId xmlns:p14="http://schemas.microsoft.com/office/powerpoint/2010/main" val="1597183198"/>
-      </p:ext>
-    </p:extLst>
-  </p:cSld>
-  <p:clrMapOvr>
-    <a:masterClrMapping/>
-  </p:clrMapOvr>
-</p:notes>
-</file>
-
-<file path=ppt/notesSlides/notesSlide7.xml><?xml version="1.0" encoding="utf-8"?>
-<p:notes xmlns:a="http://schemas.openxmlformats.org/drawingml/2006/main" xmlns:r="http://schemas.openxmlformats.org/officeDocument/2006/relationships" xmlns:p="http://schemas.openxmlformats.org/presentationml/2006/main" showMasterSp="0" showMasterPhAnim="0">
-  <p:cSld>
-    <p:spTree>
-      <p:nvGrpSpPr>
-        <p:cNvPr id="1" name="Shape 441">
-          <a:extLst>
-            <a:ext uri="{FF2B5EF4-FFF2-40B4-BE49-F238E27FC236}">
-              <a16:creationId xmlns:a16="http://schemas.microsoft.com/office/drawing/2014/main" id="{16CF2C9B-E300-6AD7-60A6-116AE0602952}"/>
-            </a:ext>
-          </a:extLst>
-        </p:cNvPr>
-        <p:cNvGrpSpPr/>
-        <p:nvPr/>
-      </p:nvGrpSpPr>
-      <p:grpSpPr>
-        <a:xfrm>
-          <a:off x="0" y="0"/>
-          <a:ext cx="0" cy="0"/>
-          <a:chOff x="0" y="0"/>
-          <a:chExt cx="0" cy="0"/>
-        </a:xfrm>
-      </p:grpSpPr>
-      <p:sp>
-        <p:nvSpPr>
-          <p:cNvPr id="442" name="Google Shape;442;gaf83f1124d_0_42:notes">
-            <a:extLst>
-              <a:ext uri="{FF2B5EF4-FFF2-40B4-BE49-F238E27FC236}">
-                <a16:creationId xmlns:a16="http://schemas.microsoft.com/office/drawing/2014/main" id="{6A6BFE88-C9FE-E986-4221-0D95657AA89A}"/>
-              </a:ext>
-            </a:extLst>
-          </p:cNvPr>
-          <p:cNvSpPr>
-            <a:spLocks noGrp="1" noRot="1" noChangeAspect="1"/>
-          </p:cNvSpPr>
-          <p:nvPr>
-            <p:ph type="sldImg" idx="2"/>
-          </p:nvPr>
-        </p:nvSpPr>
-        <p:spPr>
-          <a:xfrm>
-            <a:off x="381000" y="685800"/>
-            <a:ext cx="6096000" cy="3429000"/>
-          </a:xfrm>
-          <a:custGeom>
-            <a:avLst/>
-            <a:gdLst/>
-            <a:ahLst/>
-            <a:cxnLst/>
-            <a:rect l="l" t="t" r="r" b="b"/>
-            <a:pathLst>
-              <a:path w="120000" h="120000" extrusionOk="0">
-                <a:moveTo>
-                  <a:pt x="0" y="0"/>
-                </a:moveTo>
-                <a:lnTo>
-                  <a:pt x="120000" y="0"/>
-                </a:lnTo>
-                <a:lnTo>
-                  <a:pt x="120000" y="120000"/>
-                </a:lnTo>
-                <a:lnTo>
-                  <a:pt x="0" y="120000"/>
-                </a:lnTo>
-                <a:close/>
-              </a:path>
-            </a:pathLst>
-          </a:custGeom>
-        </p:spPr>
-      </p:sp>
-      <p:sp>
-        <p:nvSpPr>
-          <p:cNvPr id="443" name="Google Shape;443;gaf83f1124d_0_42:notes">
-            <a:extLst>
-              <a:ext uri="{FF2B5EF4-FFF2-40B4-BE49-F238E27FC236}">
-                <a16:creationId xmlns:a16="http://schemas.microsoft.com/office/drawing/2014/main" id="{6C127C2A-15FF-6A3D-6FF4-F1DF00537377}"/>
-              </a:ext>
-            </a:extLst>
-          </p:cNvPr>
-          <p:cNvSpPr txBox="1">
-            <a:spLocks noGrp="1"/>
-          </p:cNvSpPr>
-          <p:nvPr>
-            <p:ph type="body" idx="1"/>
-          </p:nvPr>
-        </p:nvSpPr>
-        <p:spPr>
-          <a:xfrm>
-            <a:off x="685800" y="4343400"/>
-            <a:ext cx="5486400" cy="4114800"/>
-          </a:xfrm>
-          <a:prstGeom prst="rect">
-            <a:avLst/>
-          </a:prstGeom>
-        </p:spPr>
-        <p:txBody>
-          <a:bodyPr spcFirstLastPara="1" wrap="square" lIns="91425" tIns="91425" rIns="91425" bIns="91425" anchor="t" anchorCtr="0">
-            <a:noAutofit/>
-          </a:bodyPr>
-          <a:lstStyle/>
-          <a:p>
-            <a:pPr marL="0" lvl="0" indent="0" algn="l" rtl="0">
-              <a:spcBef>
-                <a:spcPts val="0"/>
-              </a:spcBef>
-              <a:spcAft>
-                <a:spcPts val="0"/>
-              </a:spcAft>
-              <a:buNone/>
-            </a:pPr>
-            <a:endParaRPr/>
-          </a:p>
-        </p:txBody>
-      </p:sp>
-    </p:spTree>
-    <p:extLst>
-      <p:ext uri="{BB962C8B-B14F-4D97-AF65-F5344CB8AC3E}">
-        <p14:creationId xmlns:p14="http://schemas.microsoft.com/office/powerpoint/2010/main" val="1612644292"/>
-      </p:ext>
-    </p:extLst>
-  </p:cSld>
-  <p:clrMapOvr>
-    <a:masterClrMapping/>
-  </p:clrMapOvr>
-</p:notes>
-</file>
-
-<file path=ppt/notesSlides/notesSlide8.xml><?xml version="1.0" encoding="utf-8"?>
-<p:notes xmlns:a="http://schemas.openxmlformats.org/drawingml/2006/main" xmlns:r="http://schemas.openxmlformats.org/officeDocument/2006/relationships" xmlns:p="http://schemas.openxmlformats.org/presentationml/2006/main" showMasterSp="0" showMasterPhAnim="0">
-  <p:cSld>
-    <p:spTree>
-      <p:nvGrpSpPr>
-        <p:cNvPr id="1" name="Shape 441">
-          <a:extLst>
-            <a:ext uri="{FF2B5EF4-FFF2-40B4-BE49-F238E27FC236}">
-              <a16:creationId xmlns:a16="http://schemas.microsoft.com/office/drawing/2014/main" id="{E3FC1686-DB1A-6383-2630-456D62C688C0}"/>
-            </a:ext>
-          </a:extLst>
-        </p:cNvPr>
-        <p:cNvGrpSpPr/>
-        <p:nvPr/>
-      </p:nvGrpSpPr>
-      <p:grpSpPr>
-        <a:xfrm>
-          <a:off x="0" y="0"/>
-          <a:ext cx="0" cy="0"/>
-          <a:chOff x="0" y="0"/>
-          <a:chExt cx="0" cy="0"/>
-        </a:xfrm>
-      </p:grpSpPr>
-      <p:sp>
-        <p:nvSpPr>
-          <p:cNvPr id="442" name="Google Shape;442;gaf83f1124d_0_42:notes">
-            <a:extLst>
-              <a:ext uri="{FF2B5EF4-FFF2-40B4-BE49-F238E27FC236}">
-                <a16:creationId xmlns:a16="http://schemas.microsoft.com/office/drawing/2014/main" id="{9C1DECC4-F988-9CDE-88DF-EAB2684EF28C}"/>
-              </a:ext>
-            </a:extLst>
-          </p:cNvPr>
-          <p:cNvSpPr>
-            <a:spLocks noGrp="1" noRot="1" noChangeAspect="1"/>
-          </p:cNvSpPr>
-          <p:nvPr>
-            <p:ph type="sldImg" idx="2"/>
-          </p:nvPr>
-        </p:nvSpPr>
-        <p:spPr>
-          <a:xfrm>
-            <a:off x="381000" y="685800"/>
-            <a:ext cx="6096000" cy="3429000"/>
-          </a:xfrm>
-          <a:custGeom>
-            <a:avLst/>
-            <a:gdLst/>
-            <a:ahLst/>
-            <a:cxnLst/>
-            <a:rect l="l" t="t" r="r" b="b"/>
-            <a:pathLst>
-              <a:path w="120000" h="120000" extrusionOk="0">
-                <a:moveTo>
-                  <a:pt x="0" y="0"/>
-                </a:moveTo>
-                <a:lnTo>
-                  <a:pt x="120000" y="0"/>
-                </a:lnTo>
-                <a:lnTo>
-                  <a:pt x="120000" y="120000"/>
-                </a:lnTo>
-                <a:lnTo>
-                  <a:pt x="0" y="120000"/>
-                </a:lnTo>
-                <a:close/>
-              </a:path>
-            </a:pathLst>
-          </a:custGeom>
-        </p:spPr>
-      </p:sp>
-      <p:sp>
-        <p:nvSpPr>
-          <p:cNvPr id="443" name="Google Shape;443;gaf83f1124d_0_42:notes">
-            <a:extLst>
-              <a:ext uri="{FF2B5EF4-FFF2-40B4-BE49-F238E27FC236}">
-                <a16:creationId xmlns:a16="http://schemas.microsoft.com/office/drawing/2014/main" id="{9AE6D016-C0D8-C4AC-2450-CA92FB576A8A}"/>
-              </a:ext>
-            </a:extLst>
-          </p:cNvPr>
-          <p:cNvSpPr txBox="1">
-            <a:spLocks noGrp="1"/>
-          </p:cNvSpPr>
-          <p:nvPr>
-            <p:ph type="body" idx="1"/>
-          </p:nvPr>
-        </p:nvSpPr>
-        <p:spPr>
-          <a:xfrm>
-            <a:off x="685800" y="4343400"/>
-            <a:ext cx="5486400" cy="4114800"/>
-          </a:xfrm>
-          <a:prstGeom prst="rect">
-            <a:avLst/>
-          </a:prstGeom>
-        </p:spPr>
-        <p:txBody>
-          <a:bodyPr spcFirstLastPara="1" wrap="square" lIns="91425" tIns="91425" rIns="91425" bIns="91425" anchor="t" anchorCtr="0">
-            <a:noAutofit/>
-          </a:bodyPr>
-          <a:lstStyle/>
-          <a:p>
-            <a:pPr marL="0" lvl="0" indent="0" algn="l" rtl="0">
-              <a:spcBef>
-                <a:spcPts val="0"/>
-              </a:spcBef>
-              <a:spcAft>
-                <a:spcPts val="0"/>
-              </a:spcAft>
-              <a:buNone/>
-            </a:pPr>
-            <a:endParaRPr/>
-          </a:p>
-        </p:txBody>
-      </p:sp>
-    </p:spTree>
-    <p:extLst>
-      <p:ext uri="{BB962C8B-B14F-4D97-AF65-F5344CB8AC3E}">
-        <p14:creationId xmlns:p14="http://schemas.microsoft.com/office/powerpoint/2010/main" val="177988039"/>
-      </p:ext>
-    </p:extLst>
-  </p:cSld>
-  <p:clrMapOvr>
-    <a:masterClrMapping/>
-  </p:clrMapOvr>
-</p:notes>
-</file>
-
-<file path=ppt/notesSlides/notesSlide9.xml><?xml version="1.0" encoding="utf-8"?>
-<p:notes xmlns:a="http://schemas.openxmlformats.org/drawingml/2006/main" xmlns:r="http://schemas.openxmlformats.org/officeDocument/2006/relationships" xmlns:p="http://schemas.openxmlformats.org/presentationml/2006/main" showMasterSp="0" showMasterPhAnim="0">
-  <p:cSld>
-    <p:spTree>
-      <p:nvGrpSpPr>
-        <p:cNvPr id="1" name="Shape 441">
-          <a:extLst>
-            <a:ext uri="{FF2B5EF4-FFF2-40B4-BE49-F238E27FC236}">
-              <a16:creationId xmlns:a16="http://schemas.microsoft.com/office/drawing/2014/main" id="{1DC65EF7-451A-79D6-1361-D903A016D4A0}"/>
-            </a:ext>
-          </a:extLst>
-        </p:cNvPr>
-        <p:cNvGrpSpPr/>
-        <p:nvPr/>
-      </p:nvGrpSpPr>
-      <p:grpSpPr>
-        <a:xfrm>
-          <a:off x="0" y="0"/>
-          <a:ext cx="0" cy="0"/>
-          <a:chOff x="0" y="0"/>
-          <a:chExt cx="0" cy="0"/>
-        </a:xfrm>
-      </p:grpSpPr>
-      <p:sp>
-        <p:nvSpPr>
-          <p:cNvPr id="442" name="Google Shape;442;gaf83f1124d_0_42:notes">
-            <a:extLst>
-              <a:ext uri="{FF2B5EF4-FFF2-40B4-BE49-F238E27FC236}">
-                <a16:creationId xmlns:a16="http://schemas.microsoft.com/office/drawing/2014/main" id="{3FB6211C-FBF3-2CC3-1AF4-45BE9EE1491C}"/>
-              </a:ext>
-            </a:extLst>
-          </p:cNvPr>
-          <p:cNvSpPr>
-            <a:spLocks noGrp="1" noRot="1" noChangeAspect="1"/>
-          </p:cNvSpPr>
-          <p:nvPr>
-            <p:ph type="sldImg" idx="2"/>
-          </p:nvPr>
-        </p:nvSpPr>
-        <p:spPr>
-          <a:xfrm>
-            <a:off x="381000" y="685800"/>
-            <a:ext cx="6096000" cy="3429000"/>
-          </a:xfrm>
-          <a:custGeom>
-            <a:avLst/>
-            <a:gdLst/>
-            <a:ahLst/>
-            <a:cxnLst/>
-            <a:rect l="l" t="t" r="r" b="b"/>
-            <a:pathLst>
-              <a:path w="120000" h="120000" extrusionOk="0">
-                <a:moveTo>
-                  <a:pt x="0" y="0"/>
-                </a:moveTo>
-                <a:lnTo>
-                  <a:pt x="120000" y="0"/>
-                </a:lnTo>
-                <a:lnTo>
-                  <a:pt x="120000" y="120000"/>
-                </a:lnTo>
-                <a:lnTo>
-                  <a:pt x="0" y="120000"/>
-                </a:lnTo>
-                <a:close/>
-              </a:path>
-            </a:pathLst>
-          </a:custGeom>
-        </p:spPr>
-      </p:sp>
-      <p:sp>
-        <p:nvSpPr>
-          <p:cNvPr id="443" name="Google Shape;443;gaf83f1124d_0_42:notes">
-            <a:extLst>
-              <a:ext uri="{FF2B5EF4-FFF2-40B4-BE49-F238E27FC236}">
-                <a16:creationId xmlns:a16="http://schemas.microsoft.com/office/drawing/2014/main" id="{6B3901D1-C1DB-38C3-DE86-B0E148394117}"/>
-              </a:ext>
-            </a:extLst>
-          </p:cNvPr>
-          <p:cNvSpPr txBox="1">
-            <a:spLocks noGrp="1"/>
-          </p:cNvSpPr>
-          <p:nvPr>
-            <p:ph type="body" idx="1"/>
-          </p:nvPr>
-        </p:nvSpPr>
-        <p:spPr>
-          <a:xfrm>
-            <a:off x="685800" y="4343400"/>
-            <a:ext cx="5486400" cy="4114800"/>
-          </a:xfrm>
-          <a:prstGeom prst="rect">
-            <a:avLst/>
-          </a:prstGeom>
-        </p:spPr>
-        <p:txBody>
-          <a:bodyPr spcFirstLastPara="1" wrap="square" lIns="91425" tIns="91425" rIns="91425" bIns="91425" anchor="t" anchorCtr="0">
-            <a:noAutofit/>
-          </a:bodyPr>
-          <a:lstStyle/>
-          <a:p>
-            <a:pPr marL="0" lvl="0" indent="0" algn="l" rtl="0">
-              <a:spcBef>
-                <a:spcPts val="0"/>
-              </a:spcBef>
-              <a:spcAft>
-                <a:spcPts val="0"/>
-              </a:spcAft>
-              <a:buNone/>
-            </a:pPr>
-            <a:endParaRPr/>
-          </a:p>
-        </p:txBody>
-      </p:sp>
-    </p:spTree>
-    <p:extLst>
-      <p:ext uri="{BB962C8B-B14F-4D97-AF65-F5344CB8AC3E}">
-        <p14:creationId xmlns:p14="http://schemas.microsoft.com/office/powerpoint/2010/main" val="3504596559"/>
       </p:ext>
     </p:extLst>
   </p:cSld>
@@ -3471,384 +3112,6 @@
 </file>
 
 <file path=ppt/slideLayouts/slideLayout2.xml><?xml version="1.0" encoding="utf-8"?>
-<p:sldLayout xmlns:a="http://schemas.openxmlformats.org/drawingml/2006/main" xmlns:r="http://schemas.openxmlformats.org/officeDocument/2006/relationships" xmlns:p="http://schemas.openxmlformats.org/presentationml/2006/main" matchingName="Section header 1" type="secHead">
-  <p:cSld name="SECTION_HEADER">
-    <p:bg>
-      <p:bgPr>
-        <a:noFill/>
-        <a:effectLst/>
-      </p:bgPr>
-    </p:bg>
-    <p:spTree>
-      <p:nvGrpSpPr>
-        <p:cNvPr id="1" name="Shape 39"/>
-        <p:cNvGrpSpPr/>
-        <p:nvPr/>
-      </p:nvGrpSpPr>
-      <p:grpSpPr>
-        <a:xfrm>
-          <a:off x="0" y="0"/>
-          <a:ext cx="0" cy="0"/>
-          <a:chOff x="0" y="0"/>
-          <a:chExt cx="0" cy="0"/>
-        </a:xfrm>
-      </p:grpSpPr>
-      <p:sp>
-        <p:nvSpPr>
-          <p:cNvPr id="40" name="Google Shape;40;p4"/>
-          <p:cNvSpPr/>
-          <p:nvPr/>
-        </p:nvSpPr>
-        <p:spPr>
-          <a:xfrm>
-            <a:off x="0" y="0"/>
-            <a:ext cx="9144000" cy="5143500"/>
-          </a:xfrm>
-          <a:prstGeom prst="rect">
-            <a:avLst/>
-          </a:prstGeom>
-          <a:solidFill>
-            <a:schemeClr val="accent1"/>
-          </a:solidFill>
-          <a:ln>
-            <a:noFill/>
-          </a:ln>
-        </p:spPr>
-        <p:txBody>
-          <a:bodyPr spcFirstLastPara="1" wrap="square" lIns="91425" tIns="91425" rIns="91425" bIns="91425" anchor="ctr" anchorCtr="0">
-            <a:noAutofit/>
-          </a:bodyPr>
-          <a:lstStyle/>
-          <a:p>
-            <a:pPr marL="0" lvl="0" indent="0" algn="l" rtl="0">
-              <a:spcBef>
-                <a:spcPts val="0"/>
-              </a:spcBef>
-              <a:spcAft>
-                <a:spcPts val="0"/>
-              </a:spcAft>
-              <a:buNone/>
-            </a:pPr>
-            <a:endParaRPr/>
-          </a:p>
-        </p:txBody>
-      </p:sp>
-      <p:sp>
-        <p:nvSpPr>
-          <p:cNvPr id="41" name="Google Shape;41;p4"/>
-          <p:cNvSpPr txBox="1">
-            <a:spLocks noGrp="1"/>
-          </p:cNvSpPr>
-          <p:nvPr>
-            <p:ph type="title"/>
-          </p:nvPr>
-        </p:nvSpPr>
-        <p:spPr>
-          <a:xfrm>
-            <a:off x="311700" y="2150850"/>
-            <a:ext cx="8520600" cy="841800"/>
-          </a:xfrm>
-          <a:prstGeom prst="rect">
-            <a:avLst/>
-          </a:prstGeom>
-        </p:spPr>
-        <p:txBody>
-          <a:bodyPr spcFirstLastPara="1" wrap="square" lIns="91425" tIns="91425" rIns="91425" bIns="91425" anchor="ctr" anchorCtr="0">
-            <a:normAutofit/>
-          </a:bodyPr>
-          <a:lstStyle>
-            <a:lvl1pPr lvl="0" algn="ctr">
-              <a:spcBef>
-                <a:spcPts val="0"/>
-              </a:spcBef>
-              <a:spcAft>
-                <a:spcPts val="0"/>
-              </a:spcAft>
-              <a:buClr>
-                <a:schemeClr val="lt1"/>
-              </a:buClr>
-              <a:buSzPts val="3600"/>
-              <a:buNone/>
-              <a:defRPr sz="3600">
-                <a:solidFill>
-                  <a:schemeClr val="lt1"/>
-                </a:solidFill>
-              </a:defRPr>
-            </a:lvl1pPr>
-            <a:lvl2pPr lvl="1" algn="ctr">
-              <a:spcBef>
-                <a:spcPts val="0"/>
-              </a:spcBef>
-              <a:spcAft>
-                <a:spcPts val="0"/>
-              </a:spcAft>
-              <a:buClr>
-                <a:schemeClr val="lt1"/>
-              </a:buClr>
-              <a:buSzPts val="3600"/>
-              <a:buNone/>
-              <a:defRPr sz="3600">
-                <a:solidFill>
-                  <a:schemeClr val="lt1"/>
-                </a:solidFill>
-              </a:defRPr>
-            </a:lvl2pPr>
-            <a:lvl3pPr lvl="2" algn="ctr">
-              <a:spcBef>
-                <a:spcPts val="0"/>
-              </a:spcBef>
-              <a:spcAft>
-                <a:spcPts val="0"/>
-              </a:spcAft>
-              <a:buClr>
-                <a:schemeClr val="lt1"/>
-              </a:buClr>
-              <a:buSzPts val="3600"/>
-              <a:buNone/>
-              <a:defRPr sz="3600">
-                <a:solidFill>
-                  <a:schemeClr val="lt1"/>
-                </a:solidFill>
-              </a:defRPr>
-            </a:lvl3pPr>
-            <a:lvl4pPr lvl="3" algn="ctr">
-              <a:spcBef>
-                <a:spcPts val="0"/>
-              </a:spcBef>
-              <a:spcAft>
-                <a:spcPts val="0"/>
-              </a:spcAft>
-              <a:buClr>
-                <a:schemeClr val="lt1"/>
-              </a:buClr>
-              <a:buSzPts val="3600"/>
-              <a:buNone/>
-              <a:defRPr sz="3600">
-                <a:solidFill>
-                  <a:schemeClr val="lt1"/>
-                </a:solidFill>
-              </a:defRPr>
-            </a:lvl4pPr>
-            <a:lvl5pPr lvl="4" algn="ctr">
-              <a:spcBef>
-                <a:spcPts val="0"/>
-              </a:spcBef>
-              <a:spcAft>
-                <a:spcPts val="0"/>
-              </a:spcAft>
-              <a:buClr>
-                <a:schemeClr val="lt1"/>
-              </a:buClr>
-              <a:buSzPts val="3600"/>
-              <a:buNone/>
-              <a:defRPr sz="3600">
-                <a:solidFill>
-                  <a:schemeClr val="lt1"/>
-                </a:solidFill>
-              </a:defRPr>
-            </a:lvl5pPr>
-            <a:lvl6pPr lvl="5" algn="ctr">
-              <a:spcBef>
-                <a:spcPts val="0"/>
-              </a:spcBef>
-              <a:spcAft>
-                <a:spcPts val="0"/>
-              </a:spcAft>
-              <a:buClr>
-                <a:schemeClr val="lt1"/>
-              </a:buClr>
-              <a:buSzPts val="3600"/>
-              <a:buNone/>
-              <a:defRPr sz="3600">
-                <a:solidFill>
-                  <a:schemeClr val="lt1"/>
-                </a:solidFill>
-              </a:defRPr>
-            </a:lvl6pPr>
-            <a:lvl7pPr lvl="6" algn="ctr">
-              <a:spcBef>
-                <a:spcPts val="0"/>
-              </a:spcBef>
-              <a:spcAft>
-                <a:spcPts val="0"/>
-              </a:spcAft>
-              <a:buClr>
-                <a:schemeClr val="lt1"/>
-              </a:buClr>
-              <a:buSzPts val="3600"/>
-              <a:buNone/>
-              <a:defRPr sz="3600">
-                <a:solidFill>
-                  <a:schemeClr val="lt1"/>
-                </a:solidFill>
-              </a:defRPr>
-            </a:lvl7pPr>
-            <a:lvl8pPr lvl="7" algn="ctr">
-              <a:spcBef>
-                <a:spcPts val="0"/>
-              </a:spcBef>
-              <a:spcAft>
-                <a:spcPts val="0"/>
-              </a:spcAft>
-              <a:buClr>
-                <a:schemeClr val="lt1"/>
-              </a:buClr>
-              <a:buSzPts val="3600"/>
-              <a:buNone/>
-              <a:defRPr sz="3600">
-                <a:solidFill>
-                  <a:schemeClr val="lt1"/>
-                </a:solidFill>
-              </a:defRPr>
-            </a:lvl8pPr>
-            <a:lvl9pPr lvl="8" algn="ctr">
-              <a:spcBef>
-                <a:spcPts val="0"/>
-              </a:spcBef>
-              <a:spcAft>
-                <a:spcPts val="0"/>
-              </a:spcAft>
-              <a:buClr>
-                <a:schemeClr val="lt1"/>
-              </a:buClr>
-              <a:buSzPts val="3600"/>
-              <a:buNone/>
-              <a:defRPr sz="3600">
-                <a:solidFill>
-                  <a:schemeClr val="lt1"/>
-                </a:solidFill>
-              </a:defRPr>
-            </a:lvl9pPr>
-          </a:lstStyle>
-          <a:p>
-            <a:endParaRPr/>
-          </a:p>
-        </p:txBody>
-      </p:sp>
-      <p:sp>
-        <p:nvSpPr>
-          <p:cNvPr id="42" name="Google Shape;42;p4"/>
-          <p:cNvSpPr txBox="1">
-            <a:spLocks noGrp="1"/>
-          </p:cNvSpPr>
-          <p:nvPr>
-            <p:ph type="sldNum" idx="12"/>
-          </p:nvPr>
-        </p:nvSpPr>
-        <p:spPr>
-          <a:xfrm>
-            <a:off x="8466613" y="4762672"/>
-            <a:ext cx="365700" cy="274200"/>
-          </a:xfrm>
-          <a:prstGeom prst="rect">
-            <a:avLst/>
-          </a:prstGeom>
-        </p:spPr>
-        <p:txBody>
-          <a:bodyPr spcFirstLastPara="1" wrap="square" lIns="91425" tIns="91425" rIns="91425" bIns="91425" anchor="ctr" anchorCtr="0">
-            <a:normAutofit fontScale="92500" lnSpcReduction="20000"/>
-          </a:bodyPr>
-          <a:lstStyle>
-            <a:lvl1pPr lvl="0">
-              <a:buNone/>
-              <a:defRPr>
-                <a:solidFill>
-                  <a:schemeClr val="lt1"/>
-                </a:solidFill>
-              </a:defRPr>
-            </a:lvl1pPr>
-            <a:lvl2pPr lvl="1">
-              <a:buNone/>
-              <a:defRPr>
-                <a:solidFill>
-                  <a:schemeClr val="lt1"/>
-                </a:solidFill>
-              </a:defRPr>
-            </a:lvl2pPr>
-            <a:lvl3pPr lvl="2">
-              <a:buNone/>
-              <a:defRPr>
-                <a:solidFill>
-                  <a:schemeClr val="lt1"/>
-                </a:solidFill>
-              </a:defRPr>
-            </a:lvl3pPr>
-            <a:lvl4pPr lvl="3">
-              <a:buNone/>
-              <a:defRPr>
-                <a:solidFill>
-                  <a:schemeClr val="lt1"/>
-                </a:solidFill>
-              </a:defRPr>
-            </a:lvl4pPr>
-            <a:lvl5pPr lvl="4">
-              <a:buNone/>
-              <a:defRPr>
-                <a:solidFill>
-                  <a:schemeClr val="lt1"/>
-                </a:solidFill>
-              </a:defRPr>
-            </a:lvl5pPr>
-            <a:lvl6pPr lvl="5">
-              <a:buNone/>
-              <a:defRPr>
-                <a:solidFill>
-                  <a:schemeClr val="lt1"/>
-                </a:solidFill>
-              </a:defRPr>
-            </a:lvl6pPr>
-            <a:lvl7pPr lvl="6">
-              <a:buNone/>
-              <a:defRPr>
-                <a:solidFill>
-                  <a:schemeClr val="lt1"/>
-                </a:solidFill>
-              </a:defRPr>
-            </a:lvl7pPr>
-            <a:lvl8pPr lvl="7">
-              <a:buNone/>
-              <a:defRPr>
-                <a:solidFill>
-                  <a:schemeClr val="lt1"/>
-                </a:solidFill>
-              </a:defRPr>
-            </a:lvl8pPr>
-            <a:lvl9pPr lvl="8">
-              <a:buNone/>
-              <a:defRPr>
-                <a:solidFill>
-                  <a:schemeClr val="lt1"/>
-                </a:solidFill>
-              </a:defRPr>
-            </a:lvl9pPr>
-          </a:lstStyle>
-          <a:p>
-            <a:pPr marL="0" lvl="0" indent="0" algn="r" rtl="0">
-              <a:spcBef>
-                <a:spcPts val="0"/>
-              </a:spcBef>
-              <a:spcAft>
-                <a:spcPts val="0"/>
-              </a:spcAft>
-              <a:buNone/>
-            </a:pPr>
-            <a:fld id="{00000000-1234-1234-1234-123412341234}" type="slidenum">
-              <a:rPr lang="en"/>
-              <a:t>‹#›</a:t>
-            </a:fld>
-            <a:endParaRPr/>
-          </a:p>
-        </p:txBody>
-      </p:sp>
-    </p:spTree>
-  </p:cSld>
-  <p:clrMapOvr>
-    <a:masterClrMapping/>
-  </p:clrMapOvr>
-</p:sldLayout>
-</file>
-
-<file path=ppt/slideLayouts/slideLayout3.xml><?xml version="1.0" encoding="utf-8"?>
 <p:sldLayout xmlns:a="http://schemas.openxmlformats.org/drawingml/2006/main" xmlns:r="http://schemas.openxmlformats.org/officeDocument/2006/relationships" xmlns:p="http://schemas.openxmlformats.org/presentationml/2006/main" matchingName="Title and body 1" type="tx">
   <p:cSld name="TITLE_AND_BODY">
     <p:spTree>
@@ -4210,7 +3473,7 @@
 </p:sldLayout>
 </file>
 
-<file path=ppt/slideLayouts/slideLayout4.xml><?xml version="1.0" encoding="utf-8"?>
+<file path=ppt/slideLayouts/slideLayout3.xml><?xml version="1.0" encoding="utf-8"?>
 <p:sldLayout xmlns:a="http://schemas.openxmlformats.org/drawingml/2006/main" xmlns:r="http://schemas.openxmlformats.org/officeDocument/2006/relationships" xmlns:p="http://schemas.openxmlformats.org/presentationml/2006/main" matchingName="Thanks and contact">
   <p:cSld name="MAIN_POINT_1">
     <p:spTree>
@@ -5462,7 +4725,7 @@
             <p:nvPr/>
           </p:nvPicPr>
           <p:blipFill rotWithShape="1">
-            <a:blip r:embed="rId6">
+            <a:blip r:embed="rId5">
               <a:alphaModFix/>
             </a:blip>
             <a:srcRect l="79" r="79"/>
@@ -5488,9 +4751,8 @@
   <p:clrMap bg1="lt1" tx1="dk1" bg2="dk2" tx2="lt2" accent1="accent1" accent2="accent2" accent3="accent3" accent4="accent4" accent5="accent5" accent6="accent6" hlink="hlink" folHlink="folHlink"/>
   <p:sldLayoutIdLst>
     <p:sldLayoutId id="2147483648" r:id="rId1"/>
-    <p:sldLayoutId id="2147483650" r:id="rId2"/>
-    <p:sldLayoutId id="2147483653" r:id="rId3"/>
-    <p:sldLayoutId id="2147483661" r:id="rId4"/>
+    <p:sldLayoutId id="2147483653" r:id="rId2"/>
+    <p:sldLayoutId id="2147483661" r:id="rId3"/>
   </p:sldLayoutIdLst>
   <p:hf hdr="0" ftr="0" dt="0"/>
   <p:txStyles>
@@ -6230,48 +5492,6 @@
       </p:grpSpPr>
       <p:sp>
         <p:nvSpPr>
-          <p:cNvPr id="397" name="Google Shape;397;p36"/>
-          <p:cNvSpPr txBox="1">
-            <a:spLocks noGrp="1"/>
-          </p:cNvSpPr>
-          <p:nvPr>
-            <p:ph type="ctrTitle"/>
-          </p:nvPr>
-        </p:nvSpPr>
-        <p:spPr>
-          <a:xfrm>
-            <a:off x="311700" y="1239060"/>
-            <a:ext cx="6089100" cy="1776300"/>
-          </a:xfrm>
-          <a:prstGeom prst="rect">
-            <a:avLst/>
-          </a:prstGeom>
-        </p:spPr>
-        <p:txBody>
-          <a:bodyPr spcFirstLastPara="1" wrap="square" lIns="91425" tIns="91425" rIns="91425" bIns="91425" anchor="b" anchorCtr="0">
-            <a:normAutofit fontScale="90000"/>
-          </a:bodyPr>
-          <a:lstStyle/>
-          <a:p>
-            <a:pPr marL="0" lvl="0" indent="0" algn="l" rtl="0">
-              <a:spcBef>
-                <a:spcPts val="0"/>
-              </a:spcBef>
-              <a:spcAft>
-                <a:spcPts val="0"/>
-              </a:spcAft>
-              <a:buNone/>
-            </a:pPr>
-            <a:r>
-              <a:rPr lang="en" dirty="0"/>
-              <a:t>Machine Learning project presentation</a:t>
-            </a:r>
-            <a:endParaRPr dirty="0"/>
-          </a:p>
-        </p:txBody>
-      </p:sp>
-      <p:sp>
-        <p:nvSpPr>
           <p:cNvPr id="398" name="Google Shape;398;p36"/>
           <p:cNvSpPr txBox="1">
             <a:spLocks noGrp="1"/>
@@ -6282,7 +5502,7 @@
         </p:nvSpPr>
         <p:spPr>
           <a:xfrm>
-            <a:off x="311700" y="3015350"/>
+            <a:off x="368850" y="2593317"/>
             <a:ext cx="6089100" cy="792600"/>
           </a:xfrm>
           <a:prstGeom prst="rect">
@@ -6291,14 +5511,14 @@
         </p:spPr>
         <p:txBody>
           <a:bodyPr spcFirstLastPara="1" wrap="square" lIns="91425" tIns="91425" rIns="91425" bIns="91425" anchor="t" anchorCtr="0">
-            <a:normAutofit/>
+            <a:normAutofit fontScale="85000" lnSpcReduction="20000"/>
           </a:bodyPr>
           <a:lstStyle/>
           <a:p>
             <a:pPr marL="0" lvl="0" indent="0"/>
             <a:r>
               <a:rPr lang="en-US" dirty="0"/>
-              <a:t>Customer Churn Prediction</a:t>
+              <a:t>Using Machine Learning to identify at-risk customers</a:t>
             </a:r>
             <a:endParaRPr dirty="0"/>
           </a:p>
@@ -6306,87 +5526,75 @@
       </p:sp>
       <p:sp>
         <p:nvSpPr>
-          <p:cNvPr id="399" name="Google Shape;399;p36"/>
+          <p:cNvPr id="3" name="Title 2">
+            <a:extLst>
+              <a:ext uri="{FF2B5EF4-FFF2-40B4-BE49-F238E27FC236}">
+                <a16:creationId xmlns:a16="http://schemas.microsoft.com/office/drawing/2014/main" id="{071EDF27-3845-5302-8675-2AC79DBE121D}"/>
+              </a:ext>
+            </a:extLst>
+          </p:cNvPr>
+          <p:cNvSpPr>
+            <a:spLocks noGrp="1"/>
+          </p:cNvSpPr>
+          <p:nvPr>
+            <p:ph type="ctrTitle"/>
+          </p:nvPr>
+        </p:nvSpPr>
+        <p:spPr>
+          <a:xfrm>
+            <a:off x="311700" y="896160"/>
+            <a:ext cx="6089100" cy="1776300"/>
+          </a:xfrm>
+        </p:spPr>
+        <p:txBody>
+          <a:bodyPr>
+            <a:normAutofit/>
+          </a:bodyPr>
+          <a:lstStyle/>
+          <a:p>
+            <a:r>
+              <a:rPr lang="en-US" sz="3000" dirty="0"/>
+              <a:t>Customer Churn Prediction</a:t>
+            </a:r>
+            <a:br>
+              <a:rPr lang="en-US" sz="3000" dirty="0"/>
+            </a:br>
+            <a:endParaRPr lang="en-US" sz="3000" dirty="0"/>
+          </a:p>
+        </p:txBody>
+      </p:sp>
+      <p:sp>
+        <p:nvSpPr>
+          <p:cNvPr id="4" name="TextBox 3">
+            <a:extLst>
+              <a:ext uri="{FF2B5EF4-FFF2-40B4-BE49-F238E27FC236}">
+                <a16:creationId xmlns:a16="http://schemas.microsoft.com/office/drawing/2014/main" id="{2B1611FF-1E2E-523C-8E72-F56D0D69089B}"/>
+              </a:ext>
+            </a:extLst>
+          </p:cNvPr>
           <p:cNvSpPr txBox="1"/>
           <p:nvPr/>
         </p:nvSpPr>
         <p:spPr>
           <a:xfrm>
-            <a:off x="311700" y="4099375"/>
-            <a:ext cx="2953800" cy="563700"/>
+            <a:off x="368850" y="4061840"/>
+            <a:ext cx="2226892" cy="307777"/>
           </a:xfrm>
           <a:prstGeom prst="rect">
             <a:avLst/>
           </a:prstGeom>
           <a:noFill/>
-          <a:ln>
-            <a:noFill/>
-          </a:ln>
         </p:spPr>
         <p:txBody>
-          <a:bodyPr spcFirstLastPara="1" wrap="square" lIns="91425" tIns="91425" rIns="91425" bIns="91425" anchor="b" anchorCtr="0">
-            <a:noAutofit/>
+          <a:bodyPr wrap="none" rtlCol="0">
+            <a:spAutoFit/>
           </a:bodyPr>
           <a:lstStyle/>
           <a:p>
-            <a:pPr marL="0" lvl="0" indent="0" algn="l" rtl="0">
-              <a:lnSpc>
-                <a:spcPct val="100000"/>
-              </a:lnSpc>
-              <a:spcBef>
-                <a:spcPts val="0"/>
-              </a:spcBef>
-              <a:spcAft>
-                <a:spcPts val="0"/>
-              </a:spcAft>
-              <a:buSzPts val="865"/>
-              <a:buNone/>
-            </a:pPr>
             <a:r>
-              <a:rPr lang="en" sz="1000" b="1" dirty="0">
-                <a:solidFill>
-                  <a:schemeClr val="dk1"/>
-                </a:solidFill>
-                <a:latin typeface="Assistant"/>
-                <a:ea typeface="Assistant"/>
-                <a:cs typeface="Assistant"/>
-                <a:sym typeface="Assistant"/>
-              </a:rPr>
+              <a:rPr lang="en-US" dirty="0"/>
               <a:t>Nosayaba Godswill Osayi</a:t>
             </a:r>
-            <a:endParaRPr sz="1000" b="1" dirty="0">
-              <a:solidFill>
-                <a:schemeClr val="dk1"/>
-              </a:solidFill>
-              <a:latin typeface="Assistant"/>
-              <a:ea typeface="Assistant"/>
-              <a:cs typeface="Assistant"/>
-              <a:sym typeface="Assistant"/>
-            </a:endParaRPr>
-          </a:p>
-          <a:p>
-            <a:pPr marL="0" lvl="0" indent="0" algn="l" rtl="0">
-              <a:lnSpc>
-                <a:spcPct val="100000"/>
-              </a:lnSpc>
-              <a:spcBef>
-                <a:spcPts val="0"/>
-              </a:spcBef>
-              <a:spcAft>
-                <a:spcPts val="0"/>
-              </a:spcAft>
-              <a:buSzPts val="865"/>
-              <a:buNone/>
-            </a:pPr>
-            <a:endParaRPr sz="1000" b="1" dirty="0">
-              <a:solidFill>
-                <a:schemeClr val="dk1"/>
-              </a:solidFill>
-              <a:latin typeface="Assistant"/>
-              <a:ea typeface="Assistant"/>
-              <a:cs typeface="Assistant"/>
-              <a:sym typeface="Assistant"/>
-            </a:endParaRPr>
           </a:p>
         </p:txBody>
       </p:sp>
@@ -6399,6 +5607,376 @@
 </file>
 
 <file path=ppt/slides/slide10.xml><?xml version="1.0" encoding="utf-8"?>
+<p:sld xmlns:a="http://schemas.openxmlformats.org/drawingml/2006/main" xmlns:r="http://schemas.openxmlformats.org/officeDocument/2006/relationships" xmlns:p="http://schemas.openxmlformats.org/presentationml/2006/main">
+  <p:cSld>
+    <p:spTree>
+      <p:nvGrpSpPr>
+        <p:cNvPr id="1" name="Shape 444">
+          <a:extLst>
+            <a:ext uri="{FF2B5EF4-FFF2-40B4-BE49-F238E27FC236}">
+              <a16:creationId xmlns:a16="http://schemas.microsoft.com/office/drawing/2014/main" id="{A7C46DA7-78FD-6408-34B2-0DF18A62D8ED}"/>
+            </a:ext>
+          </a:extLst>
+        </p:cNvPr>
+        <p:cNvGrpSpPr/>
+        <p:nvPr/>
+      </p:nvGrpSpPr>
+      <p:grpSpPr>
+        <a:xfrm>
+          <a:off x="0" y="0"/>
+          <a:ext cx="0" cy="0"/>
+          <a:chOff x="0" y="0"/>
+          <a:chExt cx="0" cy="0"/>
+        </a:xfrm>
+      </p:grpSpPr>
+      <p:sp>
+        <p:nvSpPr>
+          <p:cNvPr id="3" name="Title 2">
+            <a:extLst>
+              <a:ext uri="{FF2B5EF4-FFF2-40B4-BE49-F238E27FC236}">
+                <a16:creationId xmlns:a16="http://schemas.microsoft.com/office/drawing/2014/main" id="{6E99D350-BB3B-3CA5-D285-B8F1977E51F4}"/>
+              </a:ext>
+            </a:extLst>
+          </p:cNvPr>
+          <p:cNvSpPr>
+            <a:spLocks noGrp="1"/>
+          </p:cNvSpPr>
+          <p:nvPr>
+            <p:ph type="title"/>
+          </p:nvPr>
+        </p:nvSpPr>
+        <p:spPr/>
+        <p:txBody>
+          <a:bodyPr>
+            <a:noAutofit/>
+          </a:bodyPr>
+          <a:lstStyle/>
+          <a:p>
+            <a:r>
+              <a:rPr lang="en-US" sz="2000" dirty="0"/>
+              <a:t>Confusion Matrices of Top 3 Models</a:t>
+            </a:r>
+          </a:p>
+        </p:txBody>
+      </p:sp>
+      <p:sp>
+        <p:nvSpPr>
+          <p:cNvPr id="4" name="TextBox 3">
+            <a:extLst>
+              <a:ext uri="{FF2B5EF4-FFF2-40B4-BE49-F238E27FC236}">
+                <a16:creationId xmlns:a16="http://schemas.microsoft.com/office/drawing/2014/main" id="{77635EC7-2E34-396A-C103-BCF852AA9DD1}"/>
+              </a:ext>
+            </a:extLst>
+          </p:cNvPr>
+          <p:cNvSpPr txBox="1"/>
+          <p:nvPr/>
+        </p:nvSpPr>
+        <p:spPr>
+          <a:xfrm>
+            <a:off x="631371" y="1143001"/>
+            <a:ext cx="6226629" cy="1815882"/>
+          </a:xfrm>
+          <a:prstGeom prst="rect">
+            <a:avLst/>
+          </a:prstGeom>
+          <a:noFill/>
+        </p:spPr>
+        <p:txBody>
+          <a:bodyPr wrap="square">
+            <a:spAutoFit/>
+          </a:bodyPr>
+          <a:lstStyle/>
+          <a:p>
+            <a:r>
+              <a:rPr lang="en-US" dirty="0" err="1"/>
+              <a:t>XGBoost</a:t>
+            </a:r>
+            <a:r>
+              <a:rPr lang="en-US" dirty="0"/>
+              <a:t> Optimized makes the most correct predictions (5,757)</a:t>
+            </a:r>
+          </a:p>
+          <a:p>
+            <a:endParaRPr lang="en-US" dirty="0"/>
+          </a:p>
+          <a:p>
+            <a:r>
+              <a:rPr lang="en-US" dirty="0"/>
+              <a:t>Gradient Boosting misses the fewest churners (817)</a:t>
+            </a:r>
+          </a:p>
+          <a:p>
+            <a:endParaRPr lang="en-US" dirty="0"/>
+          </a:p>
+          <a:p>
+            <a:r>
+              <a:rPr lang="en-US" dirty="0"/>
+              <a:t>All models struggle with False Positives (~2,400-2,500)</a:t>
+            </a:r>
+          </a:p>
+          <a:p>
+            <a:endParaRPr lang="en-US" dirty="0"/>
+          </a:p>
+          <a:p>
+            <a:r>
+              <a:rPr lang="en-US" dirty="0"/>
+              <a:t>False Negatives are most costly, because the business loses customers that could have been saved.</a:t>
+            </a:r>
+          </a:p>
+        </p:txBody>
+      </p:sp>
+      <p:grpSp>
+        <p:nvGrpSpPr>
+          <p:cNvPr id="2" name="Google Shape;451;p42">
+            <a:extLst>
+              <a:ext uri="{FF2B5EF4-FFF2-40B4-BE49-F238E27FC236}">
+                <a16:creationId xmlns:a16="http://schemas.microsoft.com/office/drawing/2014/main" id="{D176D2F1-EEA0-6034-89BF-F7B7CC757C8D}"/>
+              </a:ext>
+            </a:extLst>
+          </p:cNvPr>
+          <p:cNvGrpSpPr/>
+          <p:nvPr/>
+        </p:nvGrpSpPr>
+        <p:grpSpPr>
+          <a:xfrm rot="10800000">
+            <a:off x="203785" y="4564699"/>
+            <a:ext cx="427586" cy="471802"/>
+            <a:chOff x="4185575" y="3320360"/>
+            <a:chExt cx="1104178" cy="1104176"/>
+          </a:xfrm>
+        </p:grpSpPr>
+        <p:sp>
+          <p:nvSpPr>
+            <p:cNvPr id="5" name="Google Shape;452;p42">
+              <a:extLst>
+                <a:ext uri="{FF2B5EF4-FFF2-40B4-BE49-F238E27FC236}">
+                  <a16:creationId xmlns:a16="http://schemas.microsoft.com/office/drawing/2014/main" id="{5AD37647-041B-FB21-C2D2-EC24F7EC9FCD}"/>
+                </a:ext>
+              </a:extLst>
+            </p:cNvPr>
+            <p:cNvSpPr/>
+            <p:nvPr/>
+          </p:nvSpPr>
+          <p:spPr>
+            <a:xfrm>
+              <a:off x="4185575" y="3421936"/>
+              <a:ext cx="1002600" cy="1002600"/>
+            </a:xfrm>
+            <a:prstGeom prst="ellipse">
+              <a:avLst/>
+            </a:prstGeom>
+            <a:solidFill>
+              <a:schemeClr val="accent1"/>
+            </a:solidFill>
+            <a:ln>
+              <a:noFill/>
+            </a:ln>
+          </p:spPr>
+          <p:txBody>
+            <a:bodyPr spcFirstLastPara="1" wrap="square" lIns="91425" tIns="91425" rIns="91425" bIns="91425" anchor="ctr" anchorCtr="0">
+              <a:noAutofit/>
+            </a:bodyPr>
+            <a:lstStyle/>
+            <a:p>
+              <a:pPr marL="0" lvl="0" indent="0" algn="l" rtl="0">
+                <a:spcBef>
+                  <a:spcPts val="0"/>
+                </a:spcBef>
+                <a:spcAft>
+                  <a:spcPts val="0"/>
+                </a:spcAft>
+                <a:buNone/>
+              </a:pPr>
+              <a:endParaRPr/>
+            </a:p>
+          </p:txBody>
+        </p:sp>
+        <p:sp>
+          <p:nvSpPr>
+            <p:cNvPr id="6" name="Google Shape;453;p42">
+              <a:extLst>
+                <a:ext uri="{FF2B5EF4-FFF2-40B4-BE49-F238E27FC236}">
+                  <a16:creationId xmlns:a16="http://schemas.microsoft.com/office/drawing/2014/main" id="{FBE4F53B-76A7-FB67-268F-40EAB1BF5A25}"/>
+                </a:ext>
+              </a:extLst>
+            </p:cNvPr>
+            <p:cNvSpPr/>
+            <p:nvPr/>
+          </p:nvSpPr>
+          <p:spPr>
+            <a:xfrm>
+              <a:off x="4287153" y="3320360"/>
+              <a:ext cx="1002600" cy="1002600"/>
+            </a:xfrm>
+            <a:prstGeom prst="ellipse">
+              <a:avLst/>
+            </a:prstGeom>
+            <a:noFill/>
+            <a:ln w="19050" cap="flat" cmpd="sng">
+              <a:solidFill>
+                <a:schemeClr val="dk1"/>
+              </a:solidFill>
+              <a:prstDash val="solid"/>
+              <a:round/>
+              <a:headEnd type="none" w="sm" len="sm"/>
+              <a:tailEnd type="none" w="sm" len="sm"/>
+            </a:ln>
+          </p:spPr>
+          <p:txBody>
+            <a:bodyPr spcFirstLastPara="1" wrap="square" lIns="91425" tIns="91425" rIns="91425" bIns="91425" anchor="ctr" anchorCtr="0">
+              <a:noAutofit/>
+            </a:bodyPr>
+            <a:lstStyle/>
+            <a:p>
+              <a:pPr marL="0" lvl="0" indent="0" algn="l" rtl="0">
+                <a:spcBef>
+                  <a:spcPts val="0"/>
+                </a:spcBef>
+                <a:spcAft>
+                  <a:spcPts val="0"/>
+                </a:spcAft>
+                <a:buNone/>
+              </a:pPr>
+              <a:endParaRPr/>
+            </a:p>
+          </p:txBody>
+        </p:sp>
+      </p:grpSp>
+      <p:grpSp>
+        <p:nvGrpSpPr>
+          <p:cNvPr id="7" name="Google Shape;438;p41">
+            <a:extLst>
+              <a:ext uri="{FF2B5EF4-FFF2-40B4-BE49-F238E27FC236}">
+                <a16:creationId xmlns:a16="http://schemas.microsoft.com/office/drawing/2014/main" id="{EBAE6D97-CB67-AC58-1030-54045E9A926A}"/>
+              </a:ext>
+            </a:extLst>
+          </p:cNvPr>
+          <p:cNvGrpSpPr/>
+          <p:nvPr/>
+        </p:nvGrpSpPr>
+        <p:grpSpPr>
+          <a:xfrm rot="8100353">
+            <a:off x="8588324" y="4388227"/>
+            <a:ext cx="474828" cy="511970"/>
+            <a:chOff x="673800" y="3053202"/>
+            <a:chExt cx="948075" cy="873823"/>
+          </a:xfrm>
+        </p:grpSpPr>
+        <p:sp>
+          <p:nvSpPr>
+            <p:cNvPr id="8" name="Google Shape;439;p41">
+              <a:extLst>
+                <a:ext uri="{FF2B5EF4-FFF2-40B4-BE49-F238E27FC236}">
+                  <a16:creationId xmlns:a16="http://schemas.microsoft.com/office/drawing/2014/main" id="{5B1ED891-7350-CC21-C33E-0C61425EF92A}"/>
+                </a:ext>
+              </a:extLst>
+            </p:cNvPr>
+            <p:cNvSpPr/>
+            <p:nvPr/>
+          </p:nvSpPr>
+          <p:spPr>
+            <a:xfrm>
+              <a:off x="706575" y="3053202"/>
+              <a:ext cx="915300" cy="791701"/>
+            </a:xfrm>
+            <a:prstGeom prst="triangle">
+              <a:avLst>
+                <a:gd name="adj" fmla="val 50000"/>
+              </a:avLst>
+            </a:prstGeom>
+            <a:solidFill>
+              <a:schemeClr val="accent1"/>
+            </a:solidFill>
+            <a:ln>
+              <a:noFill/>
+            </a:ln>
+          </p:spPr>
+          <p:txBody>
+            <a:bodyPr spcFirstLastPara="1" wrap="square" lIns="91425" tIns="91425" rIns="91425" bIns="91425" anchor="ctr" anchorCtr="0">
+              <a:noAutofit/>
+            </a:bodyPr>
+            <a:lstStyle/>
+            <a:p>
+              <a:pPr marL="0" lvl="0" indent="0" algn="l" rtl="0">
+                <a:spcBef>
+                  <a:spcPts val="0"/>
+                </a:spcBef>
+                <a:spcAft>
+                  <a:spcPts val="0"/>
+                </a:spcAft>
+                <a:buNone/>
+              </a:pPr>
+              <a:endParaRPr dirty="0"/>
+            </a:p>
+          </p:txBody>
+        </p:sp>
+        <p:sp>
+          <p:nvSpPr>
+            <p:cNvPr id="9" name="Google Shape;440;p41">
+              <a:extLst>
+                <a:ext uri="{FF2B5EF4-FFF2-40B4-BE49-F238E27FC236}">
+                  <a16:creationId xmlns:a16="http://schemas.microsoft.com/office/drawing/2014/main" id="{6846E118-5BCE-C352-E1ED-E834B165A878}"/>
+                </a:ext>
+              </a:extLst>
+            </p:cNvPr>
+            <p:cNvSpPr/>
+            <p:nvPr/>
+          </p:nvSpPr>
+          <p:spPr>
+            <a:xfrm>
+              <a:off x="673800" y="3135325"/>
+              <a:ext cx="915300" cy="791700"/>
+            </a:xfrm>
+            <a:prstGeom prst="triangle">
+              <a:avLst>
+                <a:gd name="adj" fmla="val 50000"/>
+              </a:avLst>
+            </a:prstGeom>
+            <a:noFill/>
+            <a:ln w="19050" cap="flat" cmpd="sng">
+              <a:solidFill>
+                <a:schemeClr val="dk1"/>
+              </a:solidFill>
+              <a:prstDash val="solid"/>
+              <a:round/>
+              <a:headEnd type="none" w="sm" len="sm"/>
+              <a:tailEnd type="none" w="sm" len="sm"/>
+            </a:ln>
+          </p:spPr>
+          <p:txBody>
+            <a:bodyPr spcFirstLastPara="1" wrap="square" lIns="91425" tIns="91425" rIns="91425" bIns="91425" anchor="ctr" anchorCtr="0">
+              <a:noAutofit/>
+            </a:bodyPr>
+            <a:lstStyle/>
+            <a:p>
+              <a:pPr marL="0" lvl="0" indent="0" algn="l" rtl="0">
+                <a:spcBef>
+                  <a:spcPts val="0"/>
+                </a:spcBef>
+                <a:spcAft>
+                  <a:spcPts val="0"/>
+                </a:spcAft>
+                <a:buNone/>
+              </a:pPr>
+              <a:endParaRPr/>
+            </a:p>
+          </p:txBody>
+        </p:sp>
+      </p:grpSp>
+    </p:spTree>
+    <p:extLst>
+      <p:ext uri="{BB962C8B-B14F-4D97-AF65-F5344CB8AC3E}">
+        <p14:creationId xmlns:p14="http://schemas.microsoft.com/office/powerpoint/2010/main" val="2026826386"/>
+      </p:ext>
+    </p:extLst>
+  </p:cSld>
+  <p:clrMapOvr>
+    <a:masterClrMapping/>
+  </p:clrMapOvr>
+</p:sld>
+</file>
+
+<file path=ppt/slides/slide11.xml><?xml version="1.0" encoding="utf-8"?>
 <p:sld xmlns:a="http://schemas.openxmlformats.org/drawingml/2006/main" xmlns:r="http://schemas.openxmlformats.org/officeDocument/2006/relationships" xmlns:p="http://schemas.openxmlformats.org/presentationml/2006/main">
   <p:cSld>
     <p:spTree>
@@ -6451,7 +6029,7 @@
           <a:p>
             <a:r>
               <a:rPr lang="en-US" sz="2000" dirty="0"/>
-              <a:t>ROC Curves  of Top 3 Models</a:t>
+              <a:t>ROC curves  of top three models</a:t>
             </a:r>
           </a:p>
         </p:txBody>
@@ -6494,13 +6072,8 @@
             </a:r>
             <a:r>
               <a:rPr lang="en-US" dirty="0"/>
-              <a:t> Optimized showing a marginal </a:t>
+              <a:t> optimized showing a marginal advantage</a:t>
             </a:r>
-            <a:r>
-              <a:rPr lang="en-US" dirty="0" err="1"/>
-              <a:t>advantagely</a:t>
-            </a:r>
-            <a:endParaRPr lang="en-US" dirty="0"/>
           </a:p>
         </p:txBody>
       </p:sp>
@@ -6534,173 +6107,127 @@
           </a:prstGeom>
         </p:spPr>
       </p:pic>
+      <p:grpSp>
+        <p:nvGrpSpPr>
+          <p:cNvPr id="2" name="Google Shape;451;p42">
+            <a:extLst>
+              <a:ext uri="{FF2B5EF4-FFF2-40B4-BE49-F238E27FC236}">
+                <a16:creationId xmlns:a16="http://schemas.microsoft.com/office/drawing/2014/main" id="{DDCD0E84-6BA0-968A-305C-2659ACBA4B20}"/>
+              </a:ext>
+            </a:extLst>
+          </p:cNvPr>
+          <p:cNvGrpSpPr/>
+          <p:nvPr/>
+        </p:nvGrpSpPr>
+        <p:grpSpPr>
+          <a:xfrm rot="10800000">
+            <a:off x="133111" y="4669970"/>
+            <a:ext cx="389403" cy="473529"/>
+            <a:chOff x="4185575" y="3320360"/>
+            <a:chExt cx="1104178" cy="1104176"/>
+          </a:xfrm>
+        </p:grpSpPr>
+        <p:sp>
+          <p:nvSpPr>
+            <p:cNvPr id="4" name="Google Shape;452;p42">
+              <a:extLst>
+                <a:ext uri="{FF2B5EF4-FFF2-40B4-BE49-F238E27FC236}">
+                  <a16:creationId xmlns:a16="http://schemas.microsoft.com/office/drawing/2014/main" id="{E6E54789-CF85-F1D7-A1B8-4D2F80FC85D5}"/>
+                </a:ext>
+              </a:extLst>
+            </p:cNvPr>
+            <p:cNvSpPr/>
+            <p:nvPr/>
+          </p:nvSpPr>
+          <p:spPr>
+            <a:xfrm>
+              <a:off x="4185575" y="3421936"/>
+              <a:ext cx="1002600" cy="1002600"/>
+            </a:xfrm>
+            <a:prstGeom prst="ellipse">
+              <a:avLst/>
+            </a:prstGeom>
+            <a:solidFill>
+              <a:schemeClr val="accent1"/>
+            </a:solidFill>
+            <a:ln>
+              <a:noFill/>
+            </a:ln>
+          </p:spPr>
+          <p:txBody>
+            <a:bodyPr spcFirstLastPara="1" wrap="square" lIns="91425" tIns="91425" rIns="91425" bIns="91425" anchor="ctr" anchorCtr="0">
+              <a:noAutofit/>
+            </a:bodyPr>
+            <a:lstStyle/>
+            <a:p>
+              <a:pPr marL="0" lvl="0" indent="0" algn="l" rtl="0">
+                <a:spcBef>
+                  <a:spcPts val="0"/>
+                </a:spcBef>
+                <a:spcAft>
+                  <a:spcPts val="0"/>
+                </a:spcAft>
+                <a:buNone/>
+              </a:pPr>
+              <a:endParaRPr/>
+            </a:p>
+          </p:txBody>
+        </p:sp>
+        <p:sp>
+          <p:nvSpPr>
+            <p:cNvPr id="5" name="Google Shape;453;p42">
+              <a:extLst>
+                <a:ext uri="{FF2B5EF4-FFF2-40B4-BE49-F238E27FC236}">
+                  <a16:creationId xmlns:a16="http://schemas.microsoft.com/office/drawing/2014/main" id="{7A9D21FD-3D8E-1C4B-E965-E1AAD03C43AE}"/>
+                </a:ext>
+              </a:extLst>
+            </p:cNvPr>
+            <p:cNvSpPr/>
+            <p:nvPr/>
+          </p:nvSpPr>
+          <p:spPr>
+            <a:xfrm>
+              <a:off x="4287153" y="3320360"/>
+              <a:ext cx="1002600" cy="1002600"/>
+            </a:xfrm>
+            <a:prstGeom prst="ellipse">
+              <a:avLst/>
+            </a:prstGeom>
+            <a:noFill/>
+            <a:ln w="19050" cap="flat" cmpd="sng">
+              <a:solidFill>
+                <a:schemeClr val="dk1"/>
+              </a:solidFill>
+              <a:prstDash val="solid"/>
+              <a:round/>
+              <a:headEnd type="none" w="sm" len="sm"/>
+              <a:tailEnd type="none" w="sm" len="sm"/>
+            </a:ln>
+          </p:spPr>
+          <p:txBody>
+            <a:bodyPr spcFirstLastPara="1" wrap="square" lIns="91425" tIns="91425" rIns="91425" bIns="91425" anchor="ctr" anchorCtr="0">
+              <a:noAutofit/>
+            </a:bodyPr>
+            <a:lstStyle/>
+            <a:p>
+              <a:pPr marL="0" lvl="0" indent="0" algn="l" rtl="0">
+                <a:spcBef>
+                  <a:spcPts val="0"/>
+                </a:spcBef>
+                <a:spcAft>
+                  <a:spcPts val="0"/>
+                </a:spcAft>
+                <a:buNone/>
+              </a:pPr>
+              <a:endParaRPr/>
+            </a:p>
+          </p:txBody>
+        </p:sp>
+      </p:grpSp>
     </p:spTree>
     <p:extLst>
       <p:ext uri="{BB962C8B-B14F-4D97-AF65-F5344CB8AC3E}">
         <p14:creationId xmlns:p14="http://schemas.microsoft.com/office/powerpoint/2010/main" val="1616626132"/>
-      </p:ext>
-    </p:extLst>
-  </p:cSld>
-  <p:clrMapOvr>
-    <a:masterClrMapping/>
-  </p:clrMapOvr>
-</p:sld>
-</file>
-
-<file path=ppt/slides/slide11.xml><?xml version="1.0" encoding="utf-8"?>
-<p:sld xmlns:a="http://schemas.openxmlformats.org/drawingml/2006/main" xmlns:r="http://schemas.openxmlformats.org/officeDocument/2006/relationships" xmlns:p="http://schemas.openxmlformats.org/presentationml/2006/main">
-  <p:cSld>
-    <p:spTree>
-      <p:nvGrpSpPr>
-        <p:cNvPr id="1" name="Shape 390">
-          <a:extLst>
-            <a:ext uri="{FF2B5EF4-FFF2-40B4-BE49-F238E27FC236}">
-              <a16:creationId xmlns:a16="http://schemas.microsoft.com/office/drawing/2014/main" id="{75044FD1-ECD6-3840-186D-4C79C900C7DF}"/>
-            </a:ext>
-          </a:extLst>
-        </p:cNvPr>
-        <p:cNvGrpSpPr/>
-        <p:nvPr/>
-      </p:nvGrpSpPr>
-      <p:grpSpPr>
-        <a:xfrm>
-          <a:off x="0" y="0"/>
-          <a:ext cx="0" cy="0"/>
-          <a:chOff x="0" y="0"/>
-          <a:chExt cx="0" cy="0"/>
-        </a:xfrm>
-      </p:grpSpPr>
-      <p:sp>
-        <p:nvSpPr>
-          <p:cNvPr id="391" name="Google Shape;391;p35">
-            <a:extLst>
-              <a:ext uri="{FF2B5EF4-FFF2-40B4-BE49-F238E27FC236}">
-                <a16:creationId xmlns:a16="http://schemas.microsoft.com/office/drawing/2014/main" id="{49546FAC-5EAB-1AC0-3C1E-EB0BE4FC6AB9}"/>
-              </a:ext>
-            </a:extLst>
-          </p:cNvPr>
-          <p:cNvSpPr txBox="1">
-            <a:spLocks noGrp="1"/>
-          </p:cNvSpPr>
-          <p:nvPr>
-            <p:ph type="title"/>
-          </p:nvPr>
-        </p:nvSpPr>
-        <p:spPr>
-          <a:xfrm>
-            <a:off x="311700" y="2150850"/>
-            <a:ext cx="8520600" cy="841800"/>
-          </a:xfrm>
-          <a:prstGeom prst="rect">
-            <a:avLst/>
-          </a:prstGeom>
-        </p:spPr>
-        <p:txBody>
-          <a:bodyPr spcFirstLastPara="1" wrap="square" lIns="91425" tIns="91425" rIns="91425" bIns="91425" anchor="ctr" anchorCtr="0">
-            <a:normAutofit/>
-          </a:bodyPr>
-          <a:lstStyle/>
-          <a:p>
-            <a:pPr lvl="0"/>
-            <a:r>
-              <a:rPr lang="en-US" dirty="0"/>
-              <a:t>What did you learn?</a:t>
-            </a:r>
-            <a:endParaRPr b="1" dirty="0">
-              <a:latin typeface="Assistant"/>
-              <a:ea typeface="Assistant"/>
-              <a:cs typeface="Assistant"/>
-              <a:sym typeface="Assistant"/>
-            </a:endParaRPr>
-          </a:p>
-        </p:txBody>
-      </p:sp>
-      <p:sp>
-        <p:nvSpPr>
-          <p:cNvPr id="392" name="Google Shape;392;p35">
-            <a:extLst>
-              <a:ext uri="{FF2B5EF4-FFF2-40B4-BE49-F238E27FC236}">
-                <a16:creationId xmlns:a16="http://schemas.microsoft.com/office/drawing/2014/main" id="{AC81107D-02CD-7F92-72E8-82A284E77D78}"/>
-              </a:ext>
-            </a:extLst>
-          </p:cNvPr>
-          <p:cNvSpPr txBox="1">
-            <a:spLocks noGrp="1"/>
-          </p:cNvSpPr>
-          <p:nvPr>
-            <p:ph type="sldNum" idx="12"/>
-          </p:nvPr>
-        </p:nvSpPr>
-        <p:spPr>
-          <a:xfrm>
-            <a:off x="8466613" y="4762672"/>
-            <a:ext cx="365700" cy="274200"/>
-          </a:xfrm>
-          <a:prstGeom prst="rect">
-            <a:avLst/>
-          </a:prstGeom>
-        </p:spPr>
-        <p:txBody>
-          <a:bodyPr spcFirstLastPara="1" wrap="square" lIns="91425" tIns="91425" rIns="91425" bIns="91425" anchor="ctr" anchorCtr="0">
-            <a:normAutofit fontScale="92500" lnSpcReduction="20000"/>
-          </a:bodyPr>
-          <a:lstStyle/>
-          <a:p>
-            <a:pPr marL="0" lvl="0" indent="0" algn="r" rtl="0">
-              <a:spcBef>
-                <a:spcPts val="0"/>
-              </a:spcBef>
-              <a:spcAft>
-                <a:spcPts val="0"/>
-              </a:spcAft>
-              <a:buNone/>
-            </a:pPr>
-            <a:fld id="{00000000-1234-1234-1234-123412341234}" type="slidenum">
-              <a:rPr lang="en"/>
-              <a:t>11</a:t>
-            </a:fld>
-            <a:endParaRPr/>
-          </a:p>
-        </p:txBody>
-      </p:sp>
-      <p:pic>
-        <p:nvPicPr>
-          <p:cNvPr id="4" name="Google Shape;464;p43">
-            <a:extLst>
-              <a:ext uri="{FF2B5EF4-FFF2-40B4-BE49-F238E27FC236}">
-                <a16:creationId xmlns:a16="http://schemas.microsoft.com/office/drawing/2014/main" id="{0592D4F6-B956-A3B7-1590-F0D2F95171DB}"/>
-              </a:ext>
-            </a:extLst>
-          </p:cNvPr>
-          <p:cNvPicPr preferRelativeResize="0"/>
-          <p:nvPr/>
-        </p:nvPicPr>
-        <p:blipFill>
-          <a:blip r:embed="rId3">
-            <a:alphaModFix/>
-          </a:blip>
-          <a:stretch>
-            <a:fillRect/>
-          </a:stretch>
-        </p:blipFill>
-        <p:spPr>
-          <a:xfrm>
-            <a:off x="7729530" y="3411635"/>
-            <a:ext cx="1084950" cy="1135025"/>
-          </a:xfrm>
-          <a:prstGeom prst="rect">
-            <a:avLst/>
-          </a:prstGeom>
-          <a:noFill/>
-          <a:ln>
-            <a:noFill/>
-          </a:ln>
-        </p:spPr>
-      </p:pic>
-    </p:spTree>
-    <p:extLst>
-      <p:ext uri="{BB962C8B-B14F-4D97-AF65-F5344CB8AC3E}">
-        <p14:creationId xmlns:p14="http://schemas.microsoft.com/office/powerpoint/2010/main" val="3361893011"/>
       </p:ext>
     </p:extLst>
   </p:cSld>
@@ -6766,7 +6293,7 @@
           <a:p>
             <a:r>
               <a:rPr lang="en-US" dirty="0"/>
-              <a:t>Skills and knowledge gained</a:t>
+              <a:t>Key Takeaways</a:t>
             </a:r>
           </a:p>
         </p:txBody>
@@ -6802,25 +6329,23 @@
           </a:bodyPr>
           <a:lstStyle/>
           <a:p>
-            <a:pPr lvl="0">
+            <a:pPr marL="114300" indent="0">
+              <a:spcBef>
+                <a:spcPts val="1000"/>
+              </a:spcBef>
+              <a:buNone/>
+            </a:pPr>
+            <a:endParaRPr lang="en-US" dirty="0"/>
+          </a:p>
+          <a:p>
+            <a:pPr>
               <a:spcBef>
                 <a:spcPts val="1000"/>
               </a:spcBef>
             </a:pPr>
             <a:r>
               <a:rPr lang="en-US" dirty="0"/>
-              <a:t>Data cleaning: Cleaning and standardizing messy dataset</a:t>
-            </a:r>
-          </a:p>
-          <a:p>
-            <a:pPr lvl="0">
-              <a:spcBef>
-                <a:spcPts val="1000"/>
-              </a:spcBef>
-            </a:pPr>
-            <a:r>
-              <a:rPr lang="en-US" dirty="0"/>
-              <a:t>Data visualization &amp; reporting</a:t>
+              <a:t>Data quality is the foundation — 35 % of effort was cleaning alone </a:t>
             </a:r>
           </a:p>
           <a:p>
@@ -6831,22 +6356,37 @@
             </a:pPr>
             <a:r>
               <a:rPr lang="en-US" dirty="0"/>
-              <a:t>Feature engineering: Creating new features </a:t>
+              <a:t>Contract type and tenure are the strongest churn signals</a:t>
             </a:r>
           </a:p>
           <a:p>
-            <a:pPr lvl="0">
+            <a:pPr>
               <a:spcBef>
                 <a:spcPts val="1000"/>
               </a:spcBef>
             </a:pPr>
             <a:r>
               <a:rPr lang="en-US" dirty="0"/>
-              <a:t>Model selection and  Hyperparameter tuning</a:t>
+              <a:t>No single model dominates </a:t>
             </a:r>
           </a:p>
           <a:p>
-            <a:pPr lvl="0">
+            <a:pPr>
+              <a:spcBef>
+                <a:spcPts val="1000"/>
+              </a:spcBef>
+            </a:pPr>
+            <a:r>
+              <a:rPr lang="en-US" dirty="0" err="1"/>
+              <a:t>XGBoost</a:t>
+            </a:r>
+            <a:r>
+              <a:rPr lang="en-US" dirty="0"/>
+              <a:t> wins on AUC, Logistic Regression wins on recall</a:t>
+            </a:r>
+          </a:p>
+          <a:p>
+            <a:pPr>
               <a:spcBef>
                 <a:spcPts val="1000"/>
               </a:spcBef>
@@ -6857,16 +6397,7 @@
             </a:r>
           </a:p>
           <a:p>
-            <a:pPr marL="114300" lvl="0" indent="0">
-              <a:spcBef>
-                <a:spcPts val="1000"/>
-              </a:spcBef>
-              <a:buNone/>
-            </a:pPr>
-            <a:endParaRPr lang="en-US" dirty="0"/>
-          </a:p>
-          <a:p>
-            <a:pPr marL="114300" lvl="0" indent="0">
+            <a:pPr marL="114300" indent="0">
               <a:spcBef>
                 <a:spcPts val="1000"/>
               </a:spcBef>
@@ -7055,8 +6586,8 @@
         </p:nvGrpSpPr>
         <p:grpSpPr>
           <a:xfrm rot="10800000">
-            <a:off x="7557850" y="1607810"/>
-            <a:ext cx="1104178" cy="1104176"/>
+            <a:off x="7961970" y="3345366"/>
+            <a:ext cx="870329" cy="979554"/>
             <a:chOff x="4185575" y="3320360"/>
             <a:chExt cx="1104178" cy="1104176"/>
           </a:xfrm>
@@ -7103,7 +6634,7 @@
                 </a:spcAft>
                 <a:buNone/>
               </a:pPr>
-              <a:endParaRPr/>
+              <a:endParaRPr dirty="0"/>
             </a:p>
           </p:txBody>
         </p:sp>
@@ -7176,135 +6707,6 @@
   <p:cSld>
     <p:spTree>
       <p:nvGrpSpPr>
-        <p:cNvPr id="1" name="Shape 390">
-          <a:extLst>
-            <a:ext uri="{FF2B5EF4-FFF2-40B4-BE49-F238E27FC236}">
-              <a16:creationId xmlns:a16="http://schemas.microsoft.com/office/drawing/2014/main" id="{5397FB58-2200-CBFE-1ACA-AD3949F154F4}"/>
-            </a:ext>
-          </a:extLst>
-        </p:cNvPr>
-        <p:cNvGrpSpPr/>
-        <p:nvPr/>
-      </p:nvGrpSpPr>
-      <p:grpSpPr>
-        <a:xfrm>
-          <a:off x="0" y="0"/>
-          <a:ext cx="0" cy="0"/>
-          <a:chOff x="0" y="0"/>
-          <a:chExt cx="0" cy="0"/>
-        </a:xfrm>
-      </p:grpSpPr>
-      <p:sp>
-        <p:nvSpPr>
-          <p:cNvPr id="391" name="Google Shape;391;p35">
-            <a:extLst>
-              <a:ext uri="{FF2B5EF4-FFF2-40B4-BE49-F238E27FC236}">
-                <a16:creationId xmlns:a16="http://schemas.microsoft.com/office/drawing/2014/main" id="{A81CF36E-190F-4FD6-4CC5-21CBF9F1F942}"/>
-              </a:ext>
-            </a:extLst>
-          </p:cNvPr>
-          <p:cNvSpPr txBox="1">
-            <a:spLocks noGrp="1"/>
-          </p:cNvSpPr>
-          <p:nvPr>
-            <p:ph type="title"/>
-          </p:nvPr>
-        </p:nvSpPr>
-        <p:spPr>
-          <a:xfrm>
-            <a:off x="311700" y="2150850"/>
-            <a:ext cx="8520600" cy="841800"/>
-          </a:xfrm>
-          <a:prstGeom prst="rect">
-            <a:avLst/>
-          </a:prstGeom>
-        </p:spPr>
-        <p:txBody>
-          <a:bodyPr spcFirstLastPara="1" wrap="square" lIns="91425" tIns="91425" rIns="91425" bIns="91425" anchor="ctr" anchorCtr="0">
-            <a:normAutofit/>
-          </a:bodyPr>
-          <a:lstStyle/>
-          <a:p>
-            <a:pPr lvl="0"/>
-            <a:r>
-              <a:rPr lang="en-US" dirty="0"/>
-              <a:t>What are the next steps?</a:t>
-            </a:r>
-            <a:endParaRPr b="1" dirty="0">
-              <a:latin typeface="Assistant"/>
-              <a:ea typeface="Assistant"/>
-              <a:cs typeface="Assistant"/>
-              <a:sym typeface="Assistant"/>
-            </a:endParaRPr>
-          </a:p>
-        </p:txBody>
-      </p:sp>
-      <p:sp>
-        <p:nvSpPr>
-          <p:cNvPr id="392" name="Google Shape;392;p35">
-            <a:extLst>
-              <a:ext uri="{FF2B5EF4-FFF2-40B4-BE49-F238E27FC236}">
-                <a16:creationId xmlns:a16="http://schemas.microsoft.com/office/drawing/2014/main" id="{481A2338-C72D-3DB1-04B7-763016208FF2}"/>
-              </a:ext>
-            </a:extLst>
-          </p:cNvPr>
-          <p:cNvSpPr txBox="1">
-            <a:spLocks noGrp="1"/>
-          </p:cNvSpPr>
-          <p:nvPr>
-            <p:ph type="sldNum" idx="12"/>
-          </p:nvPr>
-        </p:nvSpPr>
-        <p:spPr>
-          <a:xfrm>
-            <a:off x="8466613" y="4762672"/>
-            <a:ext cx="365700" cy="274200"/>
-          </a:xfrm>
-          <a:prstGeom prst="rect">
-            <a:avLst/>
-          </a:prstGeom>
-        </p:spPr>
-        <p:txBody>
-          <a:bodyPr spcFirstLastPara="1" wrap="square" lIns="91425" tIns="91425" rIns="91425" bIns="91425" anchor="ctr" anchorCtr="0">
-            <a:normAutofit fontScale="92500" lnSpcReduction="20000"/>
-          </a:bodyPr>
-          <a:lstStyle/>
-          <a:p>
-            <a:pPr marL="0" lvl="0" indent="0" algn="r" rtl="0">
-              <a:spcBef>
-                <a:spcPts val="0"/>
-              </a:spcBef>
-              <a:spcAft>
-                <a:spcPts val="0"/>
-              </a:spcAft>
-              <a:buNone/>
-            </a:pPr>
-            <a:fld id="{00000000-1234-1234-1234-123412341234}" type="slidenum">
-              <a:rPr lang="en"/>
-              <a:t>13</a:t>
-            </a:fld>
-            <a:endParaRPr/>
-          </a:p>
-        </p:txBody>
-      </p:sp>
-    </p:spTree>
-    <p:extLst>
-      <p:ext uri="{BB962C8B-B14F-4D97-AF65-F5344CB8AC3E}">
-        <p14:creationId xmlns:p14="http://schemas.microsoft.com/office/powerpoint/2010/main" val="110651552"/>
-      </p:ext>
-    </p:extLst>
-  </p:cSld>
-  <p:clrMapOvr>
-    <a:masterClrMapping/>
-  </p:clrMapOvr>
-</p:sld>
-</file>
-
-<file path=ppt/slides/slide14.xml><?xml version="1.0" encoding="utf-8"?>
-<p:sld xmlns:a="http://schemas.openxmlformats.org/drawingml/2006/main" xmlns:r="http://schemas.openxmlformats.org/officeDocument/2006/relationships" xmlns:p="http://schemas.openxmlformats.org/presentationml/2006/main">
-  <p:cSld>
-    <p:spTree>
-      <p:nvGrpSpPr>
         <p:cNvPr id="1" name="Shape 457"/>
         <p:cNvGrpSpPr/>
         <p:nvPr/>
@@ -7376,25 +6778,59 @@
           </a:bodyPr>
           <a:lstStyle/>
           <a:p>
-            <a:pPr>
+            <a:pPr marL="114300" indent="0">
               <a:spcBef>
                 <a:spcPts val="1000"/>
               </a:spcBef>
+              <a:buNone/>
             </a:pPr>
             <a:r>
               <a:rPr lang="en-US" dirty="0"/>
-              <a:t>Enhance my project with further machine learning methods (Test different algorithms and deployment)</a:t>
+              <a:t>Deploy model via API to identify at-risk customers in real time</a:t>
             </a:r>
           </a:p>
           <a:p>
-            <a:pPr>
+            <a:pPr marL="114300" indent="0">
               <a:spcBef>
                 <a:spcPts val="1000"/>
               </a:spcBef>
+              <a:buNone/>
             </a:pPr>
             <a:r>
               <a:rPr lang="en-US" dirty="0"/>
-              <a:t>Practice more machine learning projects on Kaggle</a:t>
+              <a:t>A/B test retention offers on model-flagged high-risk customers</a:t>
+            </a:r>
+          </a:p>
+          <a:p>
+            <a:pPr marL="114300" indent="0">
+              <a:spcBef>
+                <a:spcPts val="1000"/>
+              </a:spcBef>
+              <a:buNone/>
+            </a:pPr>
+            <a:r>
+              <a:rPr lang="en-US" dirty="0"/>
+              <a:t>Monitor model drift monthly as customer </a:t>
+            </a:r>
+            <a:r>
+              <a:rPr lang="en-US" dirty="0" err="1"/>
+              <a:t>behaviour</a:t>
+            </a:r>
+            <a:r>
+              <a:rPr lang="en-US" dirty="0"/>
+              <a:t> shifts</a:t>
+            </a:r>
+          </a:p>
+          <a:p>
+            <a:pPr marL="114300" indent="0">
+              <a:spcBef>
+                <a:spcPts val="1000"/>
+              </a:spcBef>
+              <a:buNone/>
+            </a:pPr>
+            <a:r>
+              <a:rPr lang="en-US" dirty="0"/>
+              <a:t>Expand to multi-class prediction (why customers churn, not just if)</a:t>
             </a:r>
           </a:p>
         </p:txBody>
@@ -7435,7 +6871,7 @@
             </a:pPr>
             <a:fld id="{00000000-1234-1234-1234-123412341234}" type="slidenum">
               <a:rPr lang="en"/>
-              <a:t>14</a:t>
+              <a:t>13</a:t>
             </a:fld>
             <a:endParaRPr/>
           </a:p>
@@ -7564,7 +7000,7 @@
         </p:blipFill>
         <p:spPr>
           <a:xfrm>
-            <a:off x="7747370" y="1972579"/>
+            <a:off x="7683238" y="3298021"/>
             <a:ext cx="1084950" cy="1135025"/>
           </a:xfrm>
           <a:prstGeom prst="rect">
@@ -7584,7 +7020,7 @@
 </p:sld>
 </file>
 
-<file path=ppt/slides/slide15.xml><?xml version="1.0" encoding="utf-8"?>
+<file path=ppt/slides/slide14.xml><?xml version="1.0" encoding="utf-8"?>
 <p:sld xmlns:a="http://schemas.openxmlformats.org/drawingml/2006/main" xmlns:r="http://schemas.openxmlformats.org/officeDocument/2006/relationships" xmlns:p="http://schemas.openxmlformats.org/presentationml/2006/main">
   <p:cSld>
     <p:spTree>
@@ -7637,7 +7073,7 @@
             </a:pPr>
             <a:fld id="{00000000-1234-1234-1234-123412341234}" type="slidenum">
               <a:rPr lang="en"/>
-              <a:t>15</a:t>
+              <a:t>14</a:t>
             </a:fld>
             <a:endParaRPr/>
           </a:p>
@@ -7694,105 +7130,6 @@
 </file>
 
 <file path=ppt/slides/slide2.xml><?xml version="1.0" encoding="utf-8"?>
-<p:sld xmlns:a="http://schemas.openxmlformats.org/drawingml/2006/main" xmlns:r="http://schemas.openxmlformats.org/officeDocument/2006/relationships" xmlns:p="http://schemas.openxmlformats.org/presentationml/2006/main">
-  <p:cSld>
-    <p:spTree>
-      <p:nvGrpSpPr>
-        <p:cNvPr id="1" name="Shape 411"/>
-        <p:cNvGrpSpPr/>
-        <p:nvPr/>
-      </p:nvGrpSpPr>
-      <p:grpSpPr>
-        <a:xfrm>
-          <a:off x="0" y="0"/>
-          <a:ext cx="0" cy="0"/>
-          <a:chOff x="0" y="0"/>
-          <a:chExt cx="0" cy="0"/>
-        </a:xfrm>
-      </p:grpSpPr>
-      <p:sp>
-        <p:nvSpPr>
-          <p:cNvPr id="412" name="Google Shape;412;p38"/>
-          <p:cNvSpPr txBox="1">
-            <a:spLocks noGrp="1"/>
-          </p:cNvSpPr>
-          <p:nvPr>
-            <p:ph type="title"/>
-          </p:nvPr>
-        </p:nvSpPr>
-        <p:spPr>
-          <a:xfrm>
-            <a:off x="311700" y="2014925"/>
-            <a:ext cx="8520600" cy="841800"/>
-          </a:xfrm>
-          <a:prstGeom prst="rect">
-            <a:avLst/>
-          </a:prstGeom>
-        </p:spPr>
-        <p:txBody>
-          <a:bodyPr spcFirstLastPara="1" wrap="square" lIns="91425" tIns="91425" rIns="91425" bIns="91425" anchor="ctr" anchorCtr="0">
-            <a:normAutofit/>
-          </a:bodyPr>
-          <a:lstStyle/>
-          <a:p>
-            <a:r>
-              <a:rPr lang="en-US" dirty="0"/>
-              <a:t>What inspired you to choose this project?</a:t>
-            </a:r>
-          </a:p>
-        </p:txBody>
-      </p:sp>
-      <p:sp>
-        <p:nvSpPr>
-          <p:cNvPr id="413" name="Google Shape;413;p38"/>
-          <p:cNvSpPr txBox="1">
-            <a:spLocks noGrp="1"/>
-          </p:cNvSpPr>
-          <p:nvPr>
-            <p:ph type="sldNum" idx="12"/>
-          </p:nvPr>
-        </p:nvSpPr>
-        <p:spPr>
-          <a:xfrm>
-            <a:off x="8466613" y="4762672"/>
-            <a:ext cx="365700" cy="274200"/>
-          </a:xfrm>
-          <a:prstGeom prst="rect">
-            <a:avLst/>
-          </a:prstGeom>
-        </p:spPr>
-        <p:txBody>
-          <a:bodyPr spcFirstLastPara="1" wrap="square" lIns="91425" tIns="91425" rIns="91425" bIns="91425" anchor="ctr" anchorCtr="0">
-            <a:normAutofit fontScale="92500" lnSpcReduction="20000"/>
-          </a:bodyPr>
-          <a:lstStyle/>
-          <a:p>
-            <a:pPr marL="0" lvl="0" indent="0" algn="r" rtl="0">
-              <a:spcBef>
-                <a:spcPts val="0"/>
-              </a:spcBef>
-              <a:spcAft>
-                <a:spcPts val="0"/>
-              </a:spcAft>
-              <a:buNone/>
-            </a:pPr>
-            <a:fld id="{00000000-1234-1234-1234-123412341234}" type="slidenum">
-              <a:rPr lang="en"/>
-              <a:t>2</a:t>
-            </a:fld>
-            <a:endParaRPr/>
-          </a:p>
-        </p:txBody>
-      </p:sp>
-    </p:spTree>
-  </p:cSld>
-  <p:clrMapOvr>
-    <a:masterClrMapping/>
-  </p:clrMapOvr>
-</p:sld>
-</file>
-
-<file path=ppt/slides/slide3.xml><?xml version="1.0" encoding="utf-8"?>
 <p:sld xmlns:a="http://schemas.openxmlformats.org/drawingml/2006/main" xmlns:r="http://schemas.openxmlformats.org/officeDocument/2006/relationships" xmlns:p="http://schemas.openxmlformats.org/presentationml/2006/main">
   <p:cSld>
     <p:spTree>
@@ -7846,26 +7183,10 @@
           </a:bodyPr>
           <a:lstStyle/>
           <a:p>
-            <a:pPr marL="0" lvl="0" indent="0" algn="l" rtl="0">
-              <a:spcBef>
-                <a:spcPts val="0"/>
-              </a:spcBef>
-              <a:spcAft>
-                <a:spcPts val="0"/>
-              </a:spcAft>
-              <a:buNone/>
-            </a:pPr>
-            <a:r>
-              <a:rPr lang="en" dirty="0"/>
-              <a:t>Reasons why </a:t>
-            </a:r>
+            <a:pPr lvl="0"/>
             <a:r>
               <a:rPr lang="en-US" dirty="0"/>
-              <a:t>I</a:t>
-            </a:r>
-            <a:r>
-              <a:rPr lang="en" dirty="0"/>
-              <a:t> choose this topic </a:t>
+              <a:t>What inspired you to choose this project?</a:t>
             </a:r>
             <a:endParaRPr b="1" dirty="0">
               <a:latin typeface="Assistant"/>
@@ -7907,7 +7228,10 @@
           </a:bodyPr>
           <a:lstStyle/>
           <a:p>
-            <a:pPr marL="114300" lvl="0" indent="0">
+            <a:pPr marL="114300" lvl="0" indent="0" algn="just">
+              <a:lnSpc>
+                <a:spcPct val="150000"/>
+              </a:lnSpc>
               <a:spcBef>
                 <a:spcPts val="1000"/>
               </a:spcBef>
@@ -7916,26 +7240,55 @@
             <a:endParaRPr lang="en-US" dirty="0"/>
           </a:p>
           <a:p>
-            <a:pPr>
+            <a:pPr algn="just">
+              <a:lnSpc>
+                <a:spcPct val="150000"/>
+              </a:lnSpc>
               <a:spcBef>
                 <a:spcPts val="1000"/>
               </a:spcBef>
             </a:pPr>
             <a:r>
               <a:rPr lang="en-US" dirty="0"/>
-              <a:t>I chose this topic because customer churn is a high impact business problem that allows demonstration of a complete data science workflow</a:t>
+              <a:t>To assess strategies for identifying high risk customers prior to churn.</a:t>
             </a:r>
           </a:p>
           <a:p>
-            <a:pPr>
+            <a:pPr algn="just">
+              <a:lnSpc>
+                <a:spcPct val="150000"/>
+              </a:lnSpc>
               <a:spcBef>
                 <a:spcPts val="1000"/>
               </a:spcBef>
             </a:pPr>
             <a:r>
               <a:rPr lang="en-US" dirty="0"/>
-              <a:t>To explore strategies to detect high-risk churners before they leave.. </a:t>
+              <a:t>To implement an end-to-end data science workflow encompassing data cleaning, modeling, and explainability.</a:t>
             </a:r>
+          </a:p>
+          <a:p>
+            <a:pPr algn="just">
+              <a:lnSpc>
+                <a:spcPct val="150000"/>
+              </a:lnSpc>
+              <a:spcBef>
+                <a:spcPts val="1000"/>
+              </a:spcBef>
+            </a:pPr>
+            <a:r>
+              <a:rPr lang="en-US" dirty="0"/>
+              <a:t>Maximize revenue retention by prioritizing early intervention</a:t>
+            </a:r>
+          </a:p>
+          <a:p>
+            <a:pPr marL="114300" indent="0">
+              <a:spcBef>
+                <a:spcPts val="1000"/>
+              </a:spcBef>
+              <a:buNone/>
+            </a:pPr>
+            <a:endParaRPr lang="en-US" dirty="0"/>
           </a:p>
         </p:txBody>
       </p:sp>
@@ -7981,12 +7334,250 @@
             </a:pPr>
             <a:fld id="{00000000-1234-1234-1234-123412341234}" type="slidenum">
               <a:rPr lang="en"/>
-              <a:t>3</a:t>
+              <a:t>2</a:t>
             </a:fld>
             <a:endParaRPr/>
           </a:p>
         </p:txBody>
       </p:sp>
+      <p:grpSp>
+        <p:nvGrpSpPr>
+          <p:cNvPr id="2" name="Google Shape;438;p41">
+            <a:extLst>
+              <a:ext uri="{FF2B5EF4-FFF2-40B4-BE49-F238E27FC236}">
+                <a16:creationId xmlns:a16="http://schemas.microsoft.com/office/drawing/2014/main" id="{416C415B-88A1-B477-52FA-CEAFD31A6DA6}"/>
+              </a:ext>
+            </a:extLst>
+          </p:cNvPr>
+          <p:cNvGrpSpPr/>
+          <p:nvPr/>
+        </p:nvGrpSpPr>
+        <p:grpSpPr>
+          <a:xfrm rot="8100353">
+            <a:off x="349361" y="4583695"/>
+            <a:ext cx="516372" cy="433809"/>
+            <a:chOff x="521400" y="3135325"/>
+            <a:chExt cx="1067700" cy="867900"/>
+          </a:xfrm>
+        </p:grpSpPr>
+        <p:sp>
+          <p:nvSpPr>
+            <p:cNvPr id="3" name="Google Shape;439;p41">
+              <a:extLst>
+                <a:ext uri="{FF2B5EF4-FFF2-40B4-BE49-F238E27FC236}">
+                  <a16:creationId xmlns:a16="http://schemas.microsoft.com/office/drawing/2014/main" id="{2ECEFFAF-85D6-8CB6-68DC-DD29CABAB97F}"/>
+                </a:ext>
+              </a:extLst>
+            </p:cNvPr>
+            <p:cNvSpPr/>
+            <p:nvPr/>
+          </p:nvSpPr>
+          <p:spPr>
+            <a:xfrm>
+              <a:off x="521400" y="3211525"/>
+              <a:ext cx="915300" cy="791700"/>
+            </a:xfrm>
+            <a:prstGeom prst="triangle">
+              <a:avLst>
+                <a:gd name="adj" fmla="val 50000"/>
+              </a:avLst>
+            </a:prstGeom>
+            <a:solidFill>
+              <a:schemeClr val="accent1"/>
+            </a:solidFill>
+            <a:ln>
+              <a:noFill/>
+            </a:ln>
+          </p:spPr>
+          <p:txBody>
+            <a:bodyPr spcFirstLastPara="1" wrap="square" lIns="91425" tIns="91425" rIns="91425" bIns="91425" anchor="ctr" anchorCtr="0">
+              <a:noAutofit/>
+            </a:bodyPr>
+            <a:lstStyle/>
+            <a:p>
+              <a:pPr marL="0" lvl="0" indent="0" algn="l" rtl="0">
+                <a:spcBef>
+                  <a:spcPts val="0"/>
+                </a:spcBef>
+                <a:spcAft>
+                  <a:spcPts val="0"/>
+                </a:spcAft>
+                <a:buNone/>
+              </a:pPr>
+              <a:endParaRPr/>
+            </a:p>
+          </p:txBody>
+        </p:sp>
+        <p:sp>
+          <p:nvSpPr>
+            <p:cNvPr id="4" name="Google Shape;440;p41">
+              <a:extLst>
+                <a:ext uri="{FF2B5EF4-FFF2-40B4-BE49-F238E27FC236}">
+                  <a16:creationId xmlns:a16="http://schemas.microsoft.com/office/drawing/2014/main" id="{C44EFA18-F861-CA91-5DB5-5B436C3325A7}"/>
+                </a:ext>
+              </a:extLst>
+            </p:cNvPr>
+            <p:cNvSpPr/>
+            <p:nvPr/>
+          </p:nvSpPr>
+          <p:spPr>
+            <a:xfrm>
+              <a:off x="673800" y="3135325"/>
+              <a:ext cx="915300" cy="791700"/>
+            </a:xfrm>
+            <a:prstGeom prst="triangle">
+              <a:avLst>
+                <a:gd name="adj" fmla="val 50000"/>
+              </a:avLst>
+            </a:prstGeom>
+            <a:noFill/>
+            <a:ln w="19050" cap="flat" cmpd="sng">
+              <a:solidFill>
+                <a:schemeClr val="dk1"/>
+              </a:solidFill>
+              <a:prstDash val="solid"/>
+              <a:round/>
+              <a:headEnd type="none" w="sm" len="sm"/>
+              <a:tailEnd type="none" w="sm" len="sm"/>
+            </a:ln>
+          </p:spPr>
+          <p:txBody>
+            <a:bodyPr spcFirstLastPara="1" wrap="square" lIns="91425" tIns="91425" rIns="91425" bIns="91425" anchor="ctr" anchorCtr="0">
+              <a:noAutofit/>
+            </a:bodyPr>
+            <a:lstStyle/>
+            <a:p>
+              <a:pPr marL="0" lvl="0" indent="0" algn="l" rtl="0">
+                <a:spcBef>
+                  <a:spcPts val="0"/>
+                </a:spcBef>
+                <a:spcAft>
+                  <a:spcPts val="0"/>
+                </a:spcAft>
+                <a:buNone/>
+              </a:pPr>
+              <a:endParaRPr/>
+            </a:p>
+          </p:txBody>
+        </p:sp>
+      </p:grpSp>
+      <p:grpSp>
+        <p:nvGrpSpPr>
+          <p:cNvPr id="5" name="Google Shape;451;p42">
+            <a:extLst>
+              <a:ext uri="{FF2B5EF4-FFF2-40B4-BE49-F238E27FC236}">
+                <a16:creationId xmlns:a16="http://schemas.microsoft.com/office/drawing/2014/main" id="{C18799E3-E120-0E81-ACEC-771D9FECF690}"/>
+              </a:ext>
+            </a:extLst>
+          </p:cNvPr>
+          <p:cNvGrpSpPr/>
+          <p:nvPr/>
+        </p:nvGrpSpPr>
+        <p:grpSpPr>
+          <a:xfrm rot="10800000">
+            <a:off x="8237763" y="3950881"/>
+            <a:ext cx="522235" cy="592827"/>
+            <a:chOff x="4185575" y="3320360"/>
+            <a:chExt cx="1104178" cy="1104176"/>
+          </a:xfrm>
+        </p:grpSpPr>
+        <p:sp>
+          <p:nvSpPr>
+            <p:cNvPr id="6" name="Google Shape;452;p42">
+              <a:extLst>
+                <a:ext uri="{FF2B5EF4-FFF2-40B4-BE49-F238E27FC236}">
+                  <a16:creationId xmlns:a16="http://schemas.microsoft.com/office/drawing/2014/main" id="{3EDB4ECC-4400-0676-3051-089293D30A3C}"/>
+                </a:ext>
+              </a:extLst>
+            </p:cNvPr>
+            <p:cNvSpPr/>
+            <p:nvPr/>
+          </p:nvSpPr>
+          <p:spPr>
+            <a:xfrm>
+              <a:off x="4185575" y="3421936"/>
+              <a:ext cx="1002600" cy="1002600"/>
+            </a:xfrm>
+            <a:prstGeom prst="ellipse">
+              <a:avLst/>
+            </a:prstGeom>
+            <a:solidFill>
+              <a:schemeClr val="accent1"/>
+            </a:solidFill>
+            <a:ln>
+              <a:noFill/>
+            </a:ln>
+          </p:spPr>
+          <p:txBody>
+            <a:bodyPr spcFirstLastPara="1" wrap="square" lIns="91425" tIns="91425" rIns="91425" bIns="91425" anchor="ctr" anchorCtr="0">
+              <a:noAutofit/>
+            </a:bodyPr>
+            <a:lstStyle/>
+            <a:p>
+              <a:pPr marL="0" lvl="0" indent="0" algn="l" rtl="0">
+                <a:spcBef>
+                  <a:spcPts val="0"/>
+                </a:spcBef>
+                <a:spcAft>
+                  <a:spcPts val="0"/>
+                </a:spcAft>
+                <a:buNone/>
+              </a:pPr>
+              <a:endParaRPr/>
+            </a:p>
+          </p:txBody>
+        </p:sp>
+        <p:sp>
+          <p:nvSpPr>
+            <p:cNvPr id="7" name="Google Shape;453;p42">
+              <a:extLst>
+                <a:ext uri="{FF2B5EF4-FFF2-40B4-BE49-F238E27FC236}">
+                  <a16:creationId xmlns:a16="http://schemas.microsoft.com/office/drawing/2014/main" id="{D767E2CB-4C88-2278-F01A-75F78A931BDA}"/>
+                </a:ext>
+              </a:extLst>
+            </p:cNvPr>
+            <p:cNvSpPr/>
+            <p:nvPr/>
+          </p:nvSpPr>
+          <p:spPr>
+            <a:xfrm>
+              <a:off x="4287153" y="3320360"/>
+              <a:ext cx="1002600" cy="1002600"/>
+            </a:xfrm>
+            <a:prstGeom prst="ellipse">
+              <a:avLst/>
+            </a:prstGeom>
+            <a:noFill/>
+            <a:ln w="19050" cap="flat" cmpd="sng">
+              <a:solidFill>
+                <a:schemeClr val="dk1"/>
+              </a:solidFill>
+              <a:prstDash val="solid"/>
+              <a:round/>
+              <a:headEnd type="none" w="sm" len="sm"/>
+              <a:tailEnd type="none" w="sm" len="sm"/>
+            </a:ln>
+          </p:spPr>
+          <p:txBody>
+            <a:bodyPr spcFirstLastPara="1" wrap="square" lIns="91425" tIns="91425" rIns="91425" bIns="91425" anchor="ctr" anchorCtr="0">
+              <a:noAutofit/>
+            </a:bodyPr>
+            <a:lstStyle/>
+            <a:p>
+              <a:pPr marL="0" lvl="0" indent="0" algn="l" rtl="0">
+                <a:spcBef>
+                  <a:spcPts val="0"/>
+                </a:spcBef>
+                <a:spcAft>
+                  <a:spcPts val="0"/>
+                </a:spcAft>
+                <a:buNone/>
+              </a:pPr>
+              <a:endParaRPr/>
+            </a:p>
+          </p:txBody>
+        </p:sp>
+      </p:grpSp>
     </p:spTree>
     <p:extLst>
       <p:ext uri="{BB962C8B-B14F-4D97-AF65-F5344CB8AC3E}">
@@ -8000,136 +7591,7 @@
 </p:sld>
 </file>
 
-<file path=ppt/slides/slide4.xml><?xml version="1.0" encoding="utf-8"?>
-<p:sld xmlns:a="http://schemas.openxmlformats.org/drawingml/2006/main" xmlns:r="http://schemas.openxmlformats.org/officeDocument/2006/relationships" xmlns:p="http://schemas.openxmlformats.org/presentationml/2006/main">
-  <p:cSld>
-    <p:spTree>
-      <p:nvGrpSpPr>
-        <p:cNvPr id="1" name="Shape 390">
-          <a:extLst>
-            <a:ext uri="{FF2B5EF4-FFF2-40B4-BE49-F238E27FC236}">
-              <a16:creationId xmlns:a16="http://schemas.microsoft.com/office/drawing/2014/main" id="{E7D9CED1-729D-941B-DE99-C93BE8867A2D}"/>
-            </a:ext>
-          </a:extLst>
-        </p:cNvPr>
-        <p:cNvGrpSpPr/>
-        <p:nvPr/>
-      </p:nvGrpSpPr>
-      <p:grpSpPr>
-        <a:xfrm>
-          <a:off x="0" y="0"/>
-          <a:ext cx="0" cy="0"/>
-          <a:chOff x="0" y="0"/>
-          <a:chExt cx="0" cy="0"/>
-        </a:xfrm>
-      </p:grpSpPr>
-      <p:sp>
-        <p:nvSpPr>
-          <p:cNvPr id="391" name="Google Shape;391;p35">
-            <a:extLst>
-              <a:ext uri="{FF2B5EF4-FFF2-40B4-BE49-F238E27FC236}">
-                <a16:creationId xmlns:a16="http://schemas.microsoft.com/office/drawing/2014/main" id="{495E817E-0248-98EA-A257-3804368C3176}"/>
-              </a:ext>
-            </a:extLst>
-          </p:cNvPr>
-          <p:cNvSpPr txBox="1">
-            <a:spLocks noGrp="1"/>
-          </p:cNvSpPr>
-          <p:nvPr>
-            <p:ph type="title"/>
-          </p:nvPr>
-        </p:nvSpPr>
-        <p:spPr>
-          <a:xfrm>
-            <a:off x="311700" y="2150850"/>
-            <a:ext cx="8520600" cy="841800"/>
-          </a:xfrm>
-          <a:prstGeom prst="rect">
-            <a:avLst/>
-          </a:prstGeom>
-        </p:spPr>
-        <p:txBody>
-          <a:bodyPr spcFirstLastPara="1" wrap="square" lIns="91425" tIns="91425" rIns="91425" bIns="91425" anchor="ctr" anchorCtr="0">
-            <a:normAutofit/>
-          </a:bodyPr>
-          <a:lstStyle/>
-          <a:p>
-            <a:pPr lvl="0"/>
-            <a:r>
-              <a:rPr lang="en-US" dirty="0"/>
-              <a:t>What did you do?</a:t>
-            </a:r>
-            <a:endParaRPr b="1" dirty="0">
-              <a:latin typeface="Assistant"/>
-              <a:ea typeface="Assistant"/>
-              <a:cs typeface="Assistant"/>
-              <a:sym typeface="Assistant"/>
-            </a:endParaRPr>
-          </a:p>
-        </p:txBody>
-      </p:sp>
-      <p:sp>
-        <p:nvSpPr>
-          <p:cNvPr id="392" name="Google Shape;392;p35">
-            <a:extLst>
-              <a:ext uri="{FF2B5EF4-FFF2-40B4-BE49-F238E27FC236}">
-                <a16:creationId xmlns:a16="http://schemas.microsoft.com/office/drawing/2014/main" id="{B269E638-B034-373D-44BE-973D20B52045}"/>
-              </a:ext>
-            </a:extLst>
-          </p:cNvPr>
-          <p:cNvSpPr txBox="1">
-            <a:spLocks noGrp="1"/>
-          </p:cNvSpPr>
-          <p:nvPr>
-            <p:ph type="sldNum" idx="12"/>
-          </p:nvPr>
-        </p:nvSpPr>
-        <p:spPr>
-          <a:xfrm>
-            <a:off x="8466613" y="4762672"/>
-            <a:ext cx="365700" cy="274200"/>
-          </a:xfrm>
-          <a:prstGeom prst="rect">
-            <a:avLst/>
-          </a:prstGeom>
-        </p:spPr>
-        <p:txBody>
-          <a:bodyPr spcFirstLastPara="1" wrap="square" lIns="91425" tIns="91425" rIns="91425" bIns="91425" anchor="ctr" anchorCtr="0">
-            <a:normAutofit fontScale="92500" lnSpcReduction="20000"/>
-          </a:bodyPr>
-          <a:lstStyle/>
-          <a:p>
-            <a:pPr marL="0" lvl="0" indent="0" algn="r" rtl="0">
-              <a:spcBef>
-                <a:spcPts val="0"/>
-              </a:spcBef>
-              <a:spcAft>
-                <a:spcPts val="0"/>
-              </a:spcAft>
-              <a:buNone/>
-            </a:pPr>
-            <a:fld id="{00000000-1234-1234-1234-123412341234}" type="slidenum">
-              <a:rPr lang="en"/>
-              <a:t>4</a:t>
-            </a:fld>
-            <a:endParaRPr/>
-          </a:p>
-        </p:txBody>
-      </p:sp>
-    </p:spTree>
-    <p:extLst>
-      <p:ext uri="{BB962C8B-B14F-4D97-AF65-F5344CB8AC3E}">
-        <p14:creationId xmlns:p14="http://schemas.microsoft.com/office/powerpoint/2010/main" val="1680309226"/>
-      </p:ext>
-    </p:extLst>
-  </p:cSld>
-  <p:clrMapOvr>
-    <a:masterClrMapping/>
-  </p:clrMapOvr>
-</p:sld>
-</file>
-
-<file path=ppt/slides/slide5.xml><?xml version="1.0" encoding="utf-8"?>
+<file path=ppt/slides/slide3.xml><?xml version="1.0" encoding="utf-8"?>
 <p:sld xmlns:a="http://schemas.openxmlformats.org/drawingml/2006/main" xmlns:r="http://schemas.openxmlformats.org/officeDocument/2006/relationships" xmlns:p="http://schemas.openxmlformats.org/presentationml/2006/main">
   <p:cSld>
     <p:spTree>
@@ -8174,7 +7636,7 @@
             <a:pPr lvl="0"/>
             <a:r>
               <a:rPr lang="en-US" dirty="0"/>
-              <a:t>Development tools and libraries </a:t>
+              <a:t>What did you do?</a:t>
             </a:r>
             <a:endParaRPr b="1" dirty="0">
               <a:latin typeface="Assistant"/>
@@ -8197,8 +7659,8 @@
         </p:nvSpPr>
         <p:spPr>
           <a:xfrm>
-            <a:off x="311700" y="915600"/>
-            <a:ext cx="8520600" cy="3747600"/>
+            <a:off x="323726" y="963193"/>
+            <a:ext cx="8560695" cy="3936579"/>
           </a:xfrm>
           <a:prstGeom prst="rect">
             <a:avLst/>
@@ -8206,163 +7668,13 @@
         </p:spPr>
         <p:txBody>
           <a:bodyPr spcFirstLastPara="1" wrap="square" lIns="91425" tIns="91425" rIns="91425" bIns="91425" anchor="t" anchorCtr="0">
-            <a:normAutofit lnSpcReduction="10000"/>
+            <a:normAutofit/>
           </a:bodyPr>
           <a:lstStyle/>
           <a:p>
             <a:pPr marL="0" indent="0">
               <a:buNone/>
             </a:pPr>
-            <a:r>
-              <a:rPr lang="en-US" sz="1400" dirty="0"/>
-              <a:t>The following tools and libraries were used in this project</a:t>
-            </a:r>
-          </a:p>
-          <a:p>
-            <a:pPr marL="0" indent="0">
-              <a:buNone/>
-            </a:pPr>
-            <a:endParaRPr lang="en-US" sz="1400" dirty="0"/>
-          </a:p>
-          <a:p>
-            <a:pPr lvl="0">
-              <a:spcBef>
-                <a:spcPts val="600"/>
-              </a:spcBef>
-            </a:pPr>
-            <a:r>
-              <a:rPr lang="en-US" sz="1400" dirty="0"/>
-              <a:t>Python 3.13.1</a:t>
-            </a:r>
-          </a:p>
-          <a:p>
-            <a:pPr lvl="0">
-              <a:spcBef>
-                <a:spcPts val="600"/>
-              </a:spcBef>
-            </a:pPr>
-            <a:r>
-              <a:rPr lang="en-US" sz="1400" dirty="0" err="1"/>
-              <a:t>Xgboost</a:t>
-            </a:r>
-            <a:endParaRPr lang="en-US" sz="1400" dirty="0"/>
-          </a:p>
-          <a:p>
-            <a:pPr lvl="0">
-              <a:spcBef>
-                <a:spcPts val="600"/>
-              </a:spcBef>
-            </a:pPr>
-            <a:r>
-              <a:rPr lang="en-US" sz="1400" dirty="0" err="1"/>
-              <a:t>shap</a:t>
-            </a:r>
-            <a:r>
-              <a:rPr lang="en-US" sz="1400" dirty="0"/>
-              <a:t> </a:t>
-            </a:r>
-          </a:p>
-          <a:p>
-            <a:pPr lvl="0">
-              <a:spcBef>
-                <a:spcPts val="600"/>
-              </a:spcBef>
-            </a:pPr>
-            <a:r>
-              <a:rPr lang="en-US" sz="1400" dirty="0" err="1"/>
-              <a:t>JupyterLab</a:t>
-            </a:r>
-            <a:endParaRPr lang="en-US" sz="1400" dirty="0"/>
-          </a:p>
-          <a:p>
-            <a:pPr lvl="0">
-              <a:spcBef>
-                <a:spcPts val="600"/>
-              </a:spcBef>
-            </a:pPr>
-            <a:r>
-              <a:rPr lang="en" sz="1400" dirty="0"/>
-              <a:t>CSV </a:t>
-            </a:r>
-            <a:r>
-              <a:rPr lang="en-US" sz="1400" dirty="0"/>
-              <a:t>Module </a:t>
-            </a:r>
-          </a:p>
-          <a:p>
-            <a:pPr lvl="0">
-              <a:spcBef>
-                <a:spcPts val="600"/>
-              </a:spcBef>
-              <a:spcAft>
-                <a:spcPts val="600"/>
-              </a:spcAft>
-            </a:pPr>
-            <a:r>
-              <a:rPr lang="en-US" sz="1400" dirty="0"/>
-              <a:t>scikit-learn</a:t>
-            </a:r>
-            <a:endParaRPr sz="1400" dirty="0"/>
-          </a:p>
-          <a:p>
-            <a:pPr marL="457200" lvl="0" indent="-342900" algn="l" rtl="0">
-              <a:lnSpc>
-                <a:spcPct val="110000"/>
-              </a:lnSpc>
-              <a:spcAft>
-                <a:spcPts val="600"/>
-              </a:spcAft>
-              <a:buSzPts val="1800"/>
-              <a:buChar char="●"/>
-            </a:pPr>
-            <a:r>
-              <a:rPr lang="en" sz="1400" dirty="0"/>
-              <a:t>Pandas</a:t>
-            </a:r>
-          </a:p>
-          <a:p>
-            <a:pPr marL="457200" lvl="0" indent="-342900" algn="l" rtl="0">
-              <a:lnSpc>
-                <a:spcPct val="110000"/>
-              </a:lnSpc>
-              <a:spcAft>
-                <a:spcPts val="600"/>
-              </a:spcAft>
-              <a:buSzPts val="1800"/>
-              <a:buChar char="●"/>
-            </a:pPr>
-            <a:r>
-              <a:rPr lang="en" sz="1400" dirty="0"/>
-              <a:t>NumPy</a:t>
-            </a:r>
-          </a:p>
-          <a:p>
-            <a:pPr lvl="0">
-              <a:lnSpc>
-                <a:spcPct val="110000"/>
-              </a:lnSpc>
-              <a:spcAft>
-                <a:spcPts val="600"/>
-              </a:spcAft>
-            </a:pPr>
-            <a:r>
-              <a:rPr lang="en-US" sz="1400" dirty="0"/>
-              <a:t>Matplotlib: Data visualization</a:t>
-            </a:r>
-          </a:p>
-          <a:p>
-            <a:pPr lvl="0">
-              <a:lnSpc>
-                <a:spcPct val="110000"/>
-              </a:lnSpc>
-              <a:spcAft>
-                <a:spcPts val="600"/>
-              </a:spcAft>
-            </a:pPr>
-            <a:r>
-              <a:rPr lang="en-US" sz="1400" dirty="0"/>
-              <a:t>seaborn</a:t>
-            </a:r>
             <a:endParaRPr sz="1400" dirty="0"/>
           </a:p>
         </p:txBody>
@@ -8403,7 +7715,7 @@
             </a:pPr>
             <a:fld id="{00000000-1234-1234-1234-123412341234}" type="slidenum">
               <a:rPr lang="en"/>
-              <a:t>5</a:t>
+              <a:t>3</a:t>
             </a:fld>
             <a:endParaRPr/>
           </a:p>
@@ -8417,8 +7729,8 @@
         </p:nvGrpSpPr>
         <p:grpSpPr>
           <a:xfrm rot="2700000">
-            <a:off x="7815861" y="3738066"/>
-            <a:ext cx="1067690" cy="867892"/>
+            <a:off x="7987474" y="4271799"/>
+            <a:ext cx="674998" cy="405243"/>
             <a:chOff x="919500" y="1916075"/>
             <a:chExt cx="1067700" cy="867900"/>
           </a:xfrm>
@@ -8615,6 +7927,415 @@
           </p:txBody>
         </p:sp>
       </p:grpSp>
+      <p:sp>
+        <p:nvSpPr>
+          <p:cNvPr id="2" name="Rectangle 1">
+            <a:extLst>
+              <a:ext uri="{FF2B5EF4-FFF2-40B4-BE49-F238E27FC236}">
+                <a16:creationId xmlns:a16="http://schemas.microsoft.com/office/drawing/2014/main" id="{AC6AE117-276F-4685-9A58-7DE95331B5C2}"/>
+              </a:ext>
+            </a:extLst>
+          </p:cNvPr>
+          <p:cNvSpPr/>
+          <p:nvPr/>
+        </p:nvSpPr>
+        <p:spPr>
+          <a:xfrm>
+            <a:off x="354769" y="2379889"/>
+            <a:ext cx="1381864" cy="391885"/>
+          </a:xfrm>
+          <a:prstGeom prst="rect">
+            <a:avLst/>
+          </a:prstGeom>
+        </p:spPr>
+        <p:style>
+          <a:lnRef idx="2">
+            <a:schemeClr val="accent1">
+              <a:shade val="15000"/>
+            </a:schemeClr>
+          </a:lnRef>
+          <a:fillRef idx="1">
+            <a:schemeClr val="accent1"/>
+          </a:fillRef>
+          <a:effectRef idx="0">
+            <a:schemeClr val="accent1"/>
+          </a:effectRef>
+          <a:fontRef idx="minor">
+            <a:schemeClr val="lt1"/>
+          </a:fontRef>
+        </p:style>
+        <p:txBody>
+          <a:bodyPr rtlCol="0" anchor="ctr"/>
+          <a:lstStyle/>
+          <a:p>
+            <a:pPr algn="ctr"/>
+            <a:r>
+              <a:rPr lang="en-US" sz="1200" dirty="0"/>
+              <a:t>Customer Churn Prediction</a:t>
+            </a:r>
+          </a:p>
+        </p:txBody>
+      </p:sp>
+      <p:sp>
+        <p:nvSpPr>
+          <p:cNvPr id="4" name="Rectangle 3">
+            <a:extLst>
+              <a:ext uri="{FF2B5EF4-FFF2-40B4-BE49-F238E27FC236}">
+                <a16:creationId xmlns:a16="http://schemas.microsoft.com/office/drawing/2014/main" id="{6E39AAC0-9698-FA86-2CEC-D5A0F65847BF}"/>
+              </a:ext>
+            </a:extLst>
+          </p:cNvPr>
+          <p:cNvSpPr/>
+          <p:nvPr/>
+        </p:nvSpPr>
+        <p:spPr>
+          <a:xfrm>
+            <a:off x="3882071" y="2371724"/>
+            <a:ext cx="1381864" cy="391885"/>
+          </a:xfrm>
+          <a:prstGeom prst="rect">
+            <a:avLst/>
+          </a:prstGeom>
+        </p:spPr>
+        <p:style>
+          <a:lnRef idx="2">
+            <a:schemeClr val="accent1">
+              <a:shade val="15000"/>
+            </a:schemeClr>
+          </a:lnRef>
+          <a:fillRef idx="1">
+            <a:schemeClr val="accent1"/>
+          </a:fillRef>
+          <a:effectRef idx="0">
+            <a:schemeClr val="accent1"/>
+          </a:effectRef>
+          <a:fontRef idx="minor">
+            <a:schemeClr val="lt1"/>
+          </a:fontRef>
+        </p:style>
+        <p:txBody>
+          <a:bodyPr rtlCol="0" anchor="ctr"/>
+          <a:lstStyle/>
+          <a:p>
+            <a:pPr algn="ctr"/>
+            <a:r>
+              <a:rPr lang="en-US" sz="1200" dirty="0"/>
+              <a:t>Feature Engineering</a:t>
+            </a:r>
+          </a:p>
+        </p:txBody>
+      </p:sp>
+      <p:sp>
+        <p:nvSpPr>
+          <p:cNvPr id="5" name="Rectangle 4">
+            <a:extLst>
+              <a:ext uri="{FF2B5EF4-FFF2-40B4-BE49-F238E27FC236}">
+                <a16:creationId xmlns:a16="http://schemas.microsoft.com/office/drawing/2014/main" id="{F45BD7B3-7CD8-4DC3-1D4D-037CDC4DB396}"/>
+              </a:ext>
+            </a:extLst>
+          </p:cNvPr>
+          <p:cNvSpPr/>
+          <p:nvPr/>
+        </p:nvSpPr>
+        <p:spPr>
+          <a:xfrm>
+            <a:off x="5651572" y="2371723"/>
+            <a:ext cx="1381864" cy="391885"/>
+          </a:xfrm>
+          <a:prstGeom prst="rect">
+            <a:avLst/>
+          </a:prstGeom>
+        </p:spPr>
+        <p:style>
+          <a:lnRef idx="2">
+            <a:schemeClr val="accent1">
+              <a:shade val="15000"/>
+            </a:schemeClr>
+          </a:lnRef>
+          <a:fillRef idx="1">
+            <a:schemeClr val="accent1"/>
+          </a:fillRef>
+          <a:effectRef idx="0">
+            <a:schemeClr val="accent1"/>
+          </a:effectRef>
+          <a:fontRef idx="minor">
+            <a:schemeClr val="lt1"/>
+          </a:fontRef>
+        </p:style>
+        <p:txBody>
+          <a:bodyPr rtlCol="0" anchor="ctr"/>
+          <a:lstStyle/>
+          <a:p>
+            <a:pPr algn="ctr"/>
+            <a:r>
+              <a:rPr lang="en-US" sz="1200" dirty="0"/>
+              <a:t>Modelling</a:t>
+            </a:r>
+          </a:p>
+        </p:txBody>
+      </p:sp>
+      <p:sp>
+        <p:nvSpPr>
+          <p:cNvPr id="6" name="Rectangle 5">
+            <a:extLst>
+              <a:ext uri="{FF2B5EF4-FFF2-40B4-BE49-F238E27FC236}">
+                <a16:creationId xmlns:a16="http://schemas.microsoft.com/office/drawing/2014/main" id="{9E863EAA-A6D6-1B50-464E-E74768A1AB8A}"/>
+              </a:ext>
+            </a:extLst>
+          </p:cNvPr>
+          <p:cNvSpPr/>
+          <p:nvPr/>
+        </p:nvSpPr>
+        <p:spPr>
+          <a:xfrm>
+            <a:off x="2105823" y="2382776"/>
+            <a:ext cx="1381864" cy="391885"/>
+          </a:xfrm>
+          <a:prstGeom prst="rect">
+            <a:avLst/>
+          </a:prstGeom>
+        </p:spPr>
+        <p:style>
+          <a:lnRef idx="2">
+            <a:schemeClr val="accent1">
+              <a:shade val="15000"/>
+            </a:schemeClr>
+          </a:lnRef>
+          <a:fillRef idx="1">
+            <a:schemeClr val="accent1"/>
+          </a:fillRef>
+          <a:effectRef idx="0">
+            <a:schemeClr val="accent1"/>
+          </a:effectRef>
+          <a:fontRef idx="minor">
+            <a:schemeClr val="lt1"/>
+          </a:fontRef>
+        </p:style>
+        <p:txBody>
+          <a:bodyPr rtlCol="0" anchor="ctr"/>
+          <a:lstStyle/>
+          <a:p>
+            <a:pPr algn="ctr"/>
+            <a:r>
+              <a:rPr lang="en-US" sz="1200" dirty="0"/>
+              <a:t>Data Cleaning</a:t>
+            </a:r>
+          </a:p>
+        </p:txBody>
+      </p:sp>
+      <p:sp>
+        <p:nvSpPr>
+          <p:cNvPr id="7" name="Rectangle 6">
+            <a:extLst>
+              <a:ext uri="{FF2B5EF4-FFF2-40B4-BE49-F238E27FC236}">
+                <a16:creationId xmlns:a16="http://schemas.microsoft.com/office/drawing/2014/main" id="{945414EA-9846-73CF-01E4-2DDDBDA9EB04}"/>
+              </a:ext>
+            </a:extLst>
+          </p:cNvPr>
+          <p:cNvSpPr/>
+          <p:nvPr/>
+        </p:nvSpPr>
+        <p:spPr>
+          <a:xfrm>
+            <a:off x="7390030" y="2379889"/>
+            <a:ext cx="1381864" cy="391885"/>
+          </a:xfrm>
+          <a:prstGeom prst="rect">
+            <a:avLst/>
+          </a:prstGeom>
+        </p:spPr>
+        <p:style>
+          <a:lnRef idx="2">
+            <a:schemeClr val="accent1">
+              <a:shade val="15000"/>
+            </a:schemeClr>
+          </a:lnRef>
+          <a:fillRef idx="1">
+            <a:schemeClr val="accent1"/>
+          </a:fillRef>
+          <a:effectRef idx="0">
+            <a:schemeClr val="accent1"/>
+          </a:effectRef>
+          <a:fontRef idx="minor">
+            <a:schemeClr val="lt1"/>
+          </a:fontRef>
+        </p:style>
+        <p:txBody>
+          <a:bodyPr rtlCol="0" anchor="ctr"/>
+          <a:lstStyle/>
+          <a:p>
+            <a:pPr algn="ctr"/>
+            <a:r>
+              <a:rPr lang="en-US" sz="1200" dirty="0"/>
+              <a:t>Evaluation</a:t>
+            </a:r>
+          </a:p>
+        </p:txBody>
+      </p:sp>
+      <p:cxnSp>
+        <p:nvCxnSpPr>
+          <p:cNvPr id="14" name="Straight Arrow Connector 13">
+            <a:extLst>
+              <a:ext uri="{FF2B5EF4-FFF2-40B4-BE49-F238E27FC236}">
+                <a16:creationId xmlns:a16="http://schemas.microsoft.com/office/drawing/2014/main" id="{4DCA6191-323F-8ADC-4301-3637AC7F1546}"/>
+              </a:ext>
+            </a:extLst>
+          </p:cNvPr>
+          <p:cNvCxnSpPr>
+            <a:cxnSpLocks/>
+          </p:cNvCxnSpPr>
+          <p:nvPr/>
+        </p:nvCxnSpPr>
+        <p:spPr>
+          <a:xfrm>
+            <a:off x="1736633" y="2578719"/>
+            <a:ext cx="356594" cy="0"/>
+          </a:xfrm>
+          <a:prstGeom prst="straightConnector1">
+            <a:avLst/>
+          </a:prstGeom>
+          <a:ln>
+            <a:tailEnd type="triangle"/>
+          </a:ln>
+        </p:spPr>
+        <p:style>
+          <a:lnRef idx="1">
+            <a:schemeClr val="accent1"/>
+          </a:lnRef>
+          <a:fillRef idx="0">
+            <a:schemeClr val="accent1"/>
+          </a:fillRef>
+          <a:effectRef idx="0">
+            <a:schemeClr val="accent1"/>
+          </a:effectRef>
+          <a:fontRef idx="minor">
+            <a:schemeClr val="tx1"/>
+          </a:fontRef>
+        </p:style>
+      </p:cxnSp>
+      <p:cxnSp>
+        <p:nvCxnSpPr>
+          <p:cNvPr id="15" name="Straight Arrow Connector 14">
+            <a:extLst>
+              <a:ext uri="{FF2B5EF4-FFF2-40B4-BE49-F238E27FC236}">
+                <a16:creationId xmlns:a16="http://schemas.microsoft.com/office/drawing/2014/main" id="{E53F671D-B6F4-CACE-A338-ABEE9AA12D93}"/>
+              </a:ext>
+            </a:extLst>
+          </p:cNvPr>
+          <p:cNvCxnSpPr>
+            <a:cxnSpLocks/>
+          </p:cNvCxnSpPr>
+          <p:nvPr/>
+        </p:nvCxnSpPr>
+        <p:spPr>
+          <a:xfrm>
+            <a:off x="3500284" y="2575831"/>
+            <a:ext cx="356594" cy="0"/>
+          </a:xfrm>
+          <a:prstGeom prst="straightConnector1">
+            <a:avLst/>
+          </a:prstGeom>
+          <a:ln>
+            <a:tailEnd type="triangle"/>
+          </a:ln>
+        </p:spPr>
+        <p:style>
+          <a:lnRef idx="1">
+            <a:schemeClr val="accent1"/>
+          </a:lnRef>
+          <a:fillRef idx="0">
+            <a:schemeClr val="accent1"/>
+          </a:fillRef>
+          <a:effectRef idx="0">
+            <a:schemeClr val="accent1"/>
+          </a:effectRef>
+          <a:fontRef idx="minor">
+            <a:schemeClr val="tx1"/>
+          </a:fontRef>
+        </p:style>
+      </p:cxnSp>
+      <p:cxnSp>
+        <p:nvCxnSpPr>
+          <p:cNvPr id="16" name="Straight Arrow Connector 15">
+            <a:extLst>
+              <a:ext uri="{FF2B5EF4-FFF2-40B4-BE49-F238E27FC236}">
+                <a16:creationId xmlns:a16="http://schemas.microsoft.com/office/drawing/2014/main" id="{BF08029A-7C3F-8C84-519F-1E6402D6EC85}"/>
+              </a:ext>
+            </a:extLst>
+          </p:cNvPr>
+          <p:cNvCxnSpPr>
+            <a:cxnSpLocks/>
+          </p:cNvCxnSpPr>
+          <p:nvPr/>
+        </p:nvCxnSpPr>
+        <p:spPr>
+          <a:xfrm>
+            <a:off x="5263935" y="2567666"/>
+            <a:ext cx="356594" cy="0"/>
+          </a:xfrm>
+          <a:prstGeom prst="straightConnector1">
+            <a:avLst/>
+          </a:prstGeom>
+          <a:ln>
+            <a:tailEnd type="triangle"/>
+          </a:ln>
+        </p:spPr>
+        <p:style>
+          <a:lnRef idx="1">
+            <a:schemeClr val="accent1"/>
+          </a:lnRef>
+          <a:fillRef idx="0">
+            <a:schemeClr val="accent1"/>
+          </a:fillRef>
+          <a:effectRef idx="0">
+            <a:schemeClr val="accent1"/>
+          </a:effectRef>
+          <a:fontRef idx="minor">
+            <a:schemeClr val="tx1"/>
+          </a:fontRef>
+        </p:style>
+      </p:cxnSp>
+      <p:cxnSp>
+        <p:nvCxnSpPr>
+          <p:cNvPr id="17" name="Straight Arrow Connector 16">
+            <a:extLst>
+              <a:ext uri="{FF2B5EF4-FFF2-40B4-BE49-F238E27FC236}">
+                <a16:creationId xmlns:a16="http://schemas.microsoft.com/office/drawing/2014/main" id="{1046F171-91AF-0B8D-A1E4-6D2DF501072D}"/>
+              </a:ext>
+            </a:extLst>
+          </p:cNvPr>
+          <p:cNvCxnSpPr>
+            <a:cxnSpLocks/>
+          </p:cNvCxnSpPr>
+          <p:nvPr/>
+        </p:nvCxnSpPr>
+        <p:spPr>
+          <a:xfrm>
+            <a:off x="7033436" y="2567665"/>
+            <a:ext cx="356594" cy="0"/>
+          </a:xfrm>
+          <a:prstGeom prst="straightConnector1">
+            <a:avLst/>
+          </a:prstGeom>
+          <a:ln>
+            <a:tailEnd type="triangle"/>
+          </a:ln>
+        </p:spPr>
+        <p:style>
+          <a:lnRef idx="1">
+            <a:schemeClr val="accent1"/>
+          </a:lnRef>
+          <a:fillRef idx="0">
+            <a:schemeClr val="accent1"/>
+          </a:fillRef>
+          <a:effectRef idx="0">
+            <a:schemeClr val="accent1"/>
+          </a:effectRef>
+          <a:fontRef idx="minor">
+            <a:schemeClr val="tx1"/>
+          </a:fontRef>
+        </p:style>
+      </p:cxnSp>
     </p:spTree>
   </p:cSld>
   <p:clrMapOvr>
@@ -8623,7 +8344,493 @@
 </p:sld>
 </file>
 
-<file path=ppt/slides/slide6.xml><?xml version="1.0" encoding="utf-8"?>
+<file path=ppt/slides/slide4.xml><?xml version="1.0" encoding="utf-8"?>
+<p:sld xmlns:a="http://schemas.openxmlformats.org/drawingml/2006/main" xmlns:r="http://schemas.openxmlformats.org/officeDocument/2006/relationships" xmlns:p="http://schemas.openxmlformats.org/presentationml/2006/main">
+  <p:cSld>
+    <p:spTree>
+      <p:nvGrpSpPr>
+        <p:cNvPr id="1" name="Shape 431">
+          <a:extLst>
+            <a:ext uri="{FF2B5EF4-FFF2-40B4-BE49-F238E27FC236}">
+              <a16:creationId xmlns:a16="http://schemas.microsoft.com/office/drawing/2014/main" id="{DDCB67D5-2C00-FA2A-58D5-10C7573D5DF9}"/>
+            </a:ext>
+          </a:extLst>
+        </p:cNvPr>
+        <p:cNvGrpSpPr/>
+        <p:nvPr/>
+      </p:nvGrpSpPr>
+      <p:grpSpPr>
+        <a:xfrm>
+          <a:off x="0" y="0"/>
+          <a:ext cx="0" cy="0"/>
+          <a:chOff x="0" y="0"/>
+          <a:chExt cx="0" cy="0"/>
+        </a:xfrm>
+      </p:grpSpPr>
+      <p:sp>
+        <p:nvSpPr>
+          <p:cNvPr id="432" name="Google Shape;432;p41">
+            <a:extLst>
+              <a:ext uri="{FF2B5EF4-FFF2-40B4-BE49-F238E27FC236}">
+                <a16:creationId xmlns:a16="http://schemas.microsoft.com/office/drawing/2014/main" id="{2B6D6A31-56F9-9F23-B7B8-78977F8AB087}"/>
+              </a:ext>
+            </a:extLst>
+          </p:cNvPr>
+          <p:cNvSpPr txBox="1">
+            <a:spLocks noGrp="1"/>
+          </p:cNvSpPr>
+          <p:nvPr>
+            <p:ph type="title"/>
+          </p:nvPr>
+        </p:nvSpPr>
+        <p:spPr>
+          <a:xfrm>
+            <a:off x="311700" y="342900"/>
+            <a:ext cx="8147100" cy="572700"/>
+          </a:xfrm>
+          <a:prstGeom prst="rect">
+            <a:avLst/>
+          </a:prstGeom>
+        </p:spPr>
+        <p:txBody>
+          <a:bodyPr spcFirstLastPara="1" wrap="square" lIns="91425" tIns="91425" rIns="91425" bIns="91425" anchor="ctr" anchorCtr="0">
+            <a:normAutofit fontScale="90000"/>
+          </a:bodyPr>
+          <a:lstStyle/>
+          <a:p>
+            <a:pPr lvl="0"/>
+            <a:r>
+              <a:rPr lang="en-US" dirty="0"/>
+              <a:t>Tools and libraries used</a:t>
+            </a:r>
+            <a:endParaRPr b="1" dirty="0">
+              <a:latin typeface="Assistant"/>
+              <a:ea typeface="Assistant"/>
+              <a:cs typeface="Assistant"/>
+              <a:sym typeface="Assistant"/>
+            </a:endParaRPr>
+          </a:p>
+        </p:txBody>
+      </p:sp>
+      <p:sp>
+        <p:nvSpPr>
+          <p:cNvPr id="433" name="Google Shape;433;p41">
+            <a:extLst>
+              <a:ext uri="{FF2B5EF4-FFF2-40B4-BE49-F238E27FC236}">
+                <a16:creationId xmlns:a16="http://schemas.microsoft.com/office/drawing/2014/main" id="{5ACFBE8F-615F-6E0A-7599-419C6C8BF165}"/>
+              </a:ext>
+            </a:extLst>
+          </p:cNvPr>
+          <p:cNvSpPr txBox="1">
+            <a:spLocks noGrp="1"/>
+          </p:cNvSpPr>
+          <p:nvPr>
+            <p:ph type="body" idx="1"/>
+          </p:nvPr>
+        </p:nvSpPr>
+        <p:spPr>
+          <a:xfrm>
+            <a:off x="311700" y="915600"/>
+            <a:ext cx="8520600" cy="3747600"/>
+          </a:xfrm>
+          <a:prstGeom prst="rect">
+            <a:avLst/>
+          </a:prstGeom>
+        </p:spPr>
+        <p:txBody>
+          <a:bodyPr spcFirstLastPara="1" wrap="square" lIns="91425" tIns="91425" rIns="91425" bIns="91425" anchor="t" anchorCtr="0">
+            <a:normAutofit/>
+          </a:bodyPr>
+          <a:lstStyle/>
+          <a:p>
+            <a:pPr marL="0" indent="0" algn="just">
+              <a:buNone/>
+            </a:pPr>
+            <a:r>
+              <a:rPr lang="en-US" dirty="0"/>
+              <a:t>The following tools and libraries were used in this project</a:t>
+            </a:r>
+          </a:p>
+          <a:p>
+            <a:pPr marL="0" indent="0" algn="just">
+              <a:lnSpc>
+                <a:spcPct val="200000"/>
+              </a:lnSpc>
+              <a:buNone/>
+            </a:pPr>
+            <a:endParaRPr lang="en-US" dirty="0"/>
+          </a:p>
+          <a:p>
+            <a:pPr marL="0" indent="0" algn="just">
+              <a:lnSpc>
+                <a:spcPct val="200000"/>
+              </a:lnSpc>
+              <a:buNone/>
+            </a:pPr>
+            <a:r>
+              <a:rPr lang="en-US" dirty="0"/>
+              <a:t>	Data &amp; Modelling          	Visualisation       		Environment</a:t>
+            </a:r>
+          </a:p>
+          <a:p>
+            <a:pPr marL="0" indent="0" algn="just">
+              <a:lnSpc>
+                <a:spcPct val="200000"/>
+              </a:lnSpc>
+              <a:buNone/>
+            </a:pPr>
+            <a:r>
+              <a:rPr lang="en-US" dirty="0"/>
+              <a:t>	pandas, </a:t>
+            </a:r>
+            <a:r>
+              <a:rPr lang="en-US" dirty="0" err="1"/>
+              <a:t>numpy</a:t>
+            </a:r>
+            <a:r>
+              <a:rPr lang="en-US" dirty="0"/>
+              <a:t>             	matplotlib          		</a:t>
+            </a:r>
+            <a:r>
+              <a:rPr lang="en-US" dirty="0" err="1"/>
+              <a:t>JupyterLab</a:t>
+            </a:r>
+            <a:endParaRPr lang="en-US" dirty="0"/>
+          </a:p>
+          <a:p>
+            <a:pPr marL="0" indent="0" algn="just">
+              <a:lnSpc>
+                <a:spcPct val="200000"/>
+              </a:lnSpc>
+              <a:buNone/>
+            </a:pPr>
+            <a:r>
+              <a:rPr lang="en-US" dirty="0"/>
+              <a:t>	scikit-learn, </a:t>
+            </a:r>
+            <a:r>
+              <a:rPr lang="en-US" dirty="0" err="1"/>
+              <a:t>xgboost</a:t>
+            </a:r>
+            <a:r>
+              <a:rPr lang="en-US" dirty="0"/>
+              <a:t>     	seaborn, </a:t>
+            </a:r>
+            <a:r>
+              <a:rPr lang="en-US" dirty="0" err="1"/>
+              <a:t>shap</a:t>
+            </a:r>
+            <a:r>
+              <a:rPr lang="en-US" dirty="0"/>
+              <a:t>       		Python 3.13</a:t>
+            </a:r>
+          </a:p>
+        </p:txBody>
+      </p:sp>
+      <p:sp>
+        <p:nvSpPr>
+          <p:cNvPr id="434" name="Google Shape;434;p41">
+            <a:extLst>
+              <a:ext uri="{FF2B5EF4-FFF2-40B4-BE49-F238E27FC236}">
+                <a16:creationId xmlns:a16="http://schemas.microsoft.com/office/drawing/2014/main" id="{6CC618BE-E6E7-9065-17ED-1959EE57D72F}"/>
+              </a:ext>
+            </a:extLst>
+          </p:cNvPr>
+          <p:cNvSpPr txBox="1">
+            <a:spLocks noGrp="1"/>
+          </p:cNvSpPr>
+          <p:nvPr>
+            <p:ph type="sldNum" idx="12"/>
+          </p:nvPr>
+        </p:nvSpPr>
+        <p:spPr>
+          <a:xfrm>
+            <a:off x="8466613" y="4762672"/>
+            <a:ext cx="365700" cy="274200"/>
+          </a:xfrm>
+          <a:prstGeom prst="rect">
+            <a:avLst/>
+          </a:prstGeom>
+        </p:spPr>
+        <p:txBody>
+          <a:bodyPr spcFirstLastPara="1" wrap="square" lIns="91425" tIns="91425" rIns="91425" bIns="91425" anchor="ctr" anchorCtr="0">
+            <a:normAutofit fontScale="92500" lnSpcReduction="20000"/>
+          </a:bodyPr>
+          <a:lstStyle/>
+          <a:p>
+            <a:pPr marL="0" lvl="0" indent="0" algn="r" rtl="0">
+              <a:spcBef>
+                <a:spcPts val="0"/>
+              </a:spcBef>
+              <a:spcAft>
+                <a:spcPts val="0"/>
+              </a:spcAft>
+              <a:buNone/>
+            </a:pPr>
+            <a:fld id="{00000000-1234-1234-1234-123412341234}" type="slidenum">
+              <a:rPr lang="en"/>
+              <a:t>4</a:t>
+            </a:fld>
+            <a:endParaRPr/>
+          </a:p>
+        </p:txBody>
+      </p:sp>
+      <p:grpSp>
+        <p:nvGrpSpPr>
+          <p:cNvPr id="435" name="Google Shape;435;p41">
+            <a:extLst>
+              <a:ext uri="{FF2B5EF4-FFF2-40B4-BE49-F238E27FC236}">
+                <a16:creationId xmlns:a16="http://schemas.microsoft.com/office/drawing/2014/main" id="{1AEA91F6-951A-CDB7-124C-E33449FE7CA6}"/>
+              </a:ext>
+            </a:extLst>
+          </p:cNvPr>
+          <p:cNvGrpSpPr/>
+          <p:nvPr/>
+        </p:nvGrpSpPr>
+        <p:grpSpPr>
+          <a:xfrm rot="2700000">
+            <a:off x="8244027" y="4346890"/>
+            <a:ext cx="846530" cy="501804"/>
+            <a:chOff x="919500" y="1916075"/>
+            <a:chExt cx="1067700" cy="867900"/>
+          </a:xfrm>
+        </p:grpSpPr>
+        <p:sp>
+          <p:nvSpPr>
+            <p:cNvPr id="436" name="Google Shape;436;p41">
+              <a:extLst>
+                <a:ext uri="{FF2B5EF4-FFF2-40B4-BE49-F238E27FC236}">
+                  <a16:creationId xmlns:a16="http://schemas.microsoft.com/office/drawing/2014/main" id="{58B94CE5-2813-5792-66D1-4F1241820D66}"/>
+                </a:ext>
+              </a:extLst>
+            </p:cNvPr>
+            <p:cNvSpPr/>
+            <p:nvPr/>
+          </p:nvSpPr>
+          <p:spPr>
+            <a:xfrm>
+              <a:off x="919500" y="1992275"/>
+              <a:ext cx="915300" cy="791700"/>
+            </a:xfrm>
+            <a:prstGeom prst="triangle">
+              <a:avLst>
+                <a:gd name="adj" fmla="val 50000"/>
+              </a:avLst>
+            </a:prstGeom>
+            <a:solidFill>
+              <a:schemeClr val="accent4"/>
+            </a:solidFill>
+            <a:ln>
+              <a:noFill/>
+            </a:ln>
+          </p:spPr>
+          <p:txBody>
+            <a:bodyPr spcFirstLastPara="1" wrap="square" lIns="91425" tIns="91425" rIns="91425" bIns="91425" anchor="ctr" anchorCtr="0">
+              <a:noAutofit/>
+            </a:bodyPr>
+            <a:lstStyle/>
+            <a:p>
+              <a:pPr marL="0" lvl="0" indent="0" algn="l" rtl="0">
+                <a:spcBef>
+                  <a:spcPts val="0"/>
+                </a:spcBef>
+                <a:spcAft>
+                  <a:spcPts val="0"/>
+                </a:spcAft>
+                <a:buNone/>
+              </a:pPr>
+              <a:endParaRPr/>
+            </a:p>
+          </p:txBody>
+        </p:sp>
+        <p:sp>
+          <p:nvSpPr>
+            <p:cNvPr id="437" name="Google Shape;437;p41">
+              <a:extLst>
+                <a:ext uri="{FF2B5EF4-FFF2-40B4-BE49-F238E27FC236}">
+                  <a16:creationId xmlns:a16="http://schemas.microsoft.com/office/drawing/2014/main" id="{A1A0D544-770E-138B-7A00-9DF64021FC3A}"/>
+                </a:ext>
+              </a:extLst>
+            </p:cNvPr>
+            <p:cNvSpPr/>
+            <p:nvPr/>
+          </p:nvSpPr>
+          <p:spPr>
+            <a:xfrm>
+              <a:off x="1071900" y="1916075"/>
+              <a:ext cx="915300" cy="791700"/>
+            </a:xfrm>
+            <a:prstGeom prst="triangle">
+              <a:avLst>
+                <a:gd name="adj" fmla="val 50000"/>
+              </a:avLst>
+            </a:prstGeom>
+            <a:noFill/>
+            <a:ln w="19050" cap="flat" cmpd="sng">
+              <a:solidFill>
+                <a:schemeClr val="dk1"/>
+              </a:solidFill>
+              <a:prstDash val="solid"/>
+              <a:round/>
+              <a:headEnd type="none" w="sm" len="sm"/>
+              <a:tailEnd type="none" w="sm" len="sm"/>
+            </a:ln>
+          </p:spPr>
+          <p:txBody>
+            <a:bodyPr spcFirstLastPara="1" wrap="square" lIns="91425" tIns="91425" rIns="91425" bIns="91425" anchor="ctr" anchorCtr="0">
+              <a:noAutofit/>
+            </a:bodyPr>
+            <a:lstStyle/>
+            <a:p>
+              <a:pPr marL="0" lvl="0" indent="0" algn="l" rtl="0">
+                <a:spcBef>
+                  <a:spcPts val="0"/>
+                </a:spcBef>
+                <a:spcAft>
+                  <a:spcPts val="0"/>
+                </a:spcAft>
+                <a:buNone/>
+              </a:pPr>
+              <a:endParaRPr/>
+            </a:p>
+          </p:txBody>
+        </p:sp>
+      </p:grpSp>
+      <p:grpSp>
+        <p:nvGrpSpPr>
+          <p:cNvPr id="438" name="Google Shape;438;p41">
+            <a:extLst>
+              <a:ext uri="{FF2B5EF4-FFF2-40B4-BE49-F238E27FC236}">
+                <a16:creationId xmlns:a16="http://schemas.microsoft.com/office/drawing/2014/main" id="{E615F5C5-3E3D-41AE-5ECD-69FA5597CC79}"/>
+              </a:ext>
+            </a:extLst>
+          </p:cNvPr>
+          <p:cNvGrpSpPr/>
+          <p:nvPr/>
+        </p:nvGrpSpPr>
+        <p:grpSpPr>
+          <a:xfrm rot="8100353">
+            <a:off x="349361" y="4583695"/>
+            <a:ext cx="516372" cy="433809"/>
+            <a:chOff x="521400" y="3135325"/>
+            <a:chExt cx="1067700" cy="867900"/>
+          </a:xfrm>
+        </p:grpSpPr>
+        <p:sp>
+          <p:nvSpPr>
+            <p:cNvPr id="439" name="Google Shape;439;p41">
+              <a:extLst>
+                <a:ext uri="{FF2B5EF4-FFF2-40B4-BE49-F238E27FC236}">
+                  <a16:creationId xmlns:a16="http://schemas.microsoft.com/office/drawing/2014/main" id="{938184C6-7A17-C785-3E8A-1D373DB7D041}"/>
+                </a:ext>
+              </a:extLst>
+            </p:cNvPr>
+            <p:cNvSpPr/>
+            <p:nvPr/>
+          </p:nvSpPr>
+          <p:spPr>
+            <a:xfrm>
+              <a:off x="521400" y="3211525"/>
+              <a:ext cx="915300" cy="791700"/>
+            </a:xfrm>
+            <a:prstGeom prst="triangle">
+              <a:avLst>
+                <a:gd name="adj" fmla="val 50000"/>
+              </a:avLst>
+            </a:prstGeom>
+            <a:solidFill>
+              <a:schemeClr val="accent1"/>
+            </a:solidFill>
+            <a:ln>
+              <a:noFill/>
+            </a:ln>
+          </p:spPr>
+          <p:txBody>
+            <a:bodyPr spcFirstLastPara="1" wrap="square" lIns="91425" tIns="91425" rIns="91425" bIns="91425" anchor="ctr" anchorCtr="0">
+              <a:noAutofit/>
+            </a:bodyPr>
+            <a:lstStyle/>
+            <a:p>
+              <a:pPr marL="0" lvl="0" indent="0" algn="l" rtl="0">
+                <a:spcBef>
+                  <a:spcPts val="0"/>
+                </a:spcBef>
+                <a:spcAft>
+                  <a:spcPts val="0"/>
+                </a:spcAft>
+                <a:buNone/>
+              </a:pPr>
+              <a:endParaRPr/>
+            </a:p>
+          </p:txBody>
+        </p:sp>
+        <p:sp>
+          <p:nvSpPr>
+            <p:cNvPr id="440" name="Google Shape;440;p41">
+              <a:extLst>
+                <a:ext uri="{FF2B5EF4-FFF2-40B4-BE49-F238E27FC236}">
+                  <a16:creationId xmlns:a16="http://schemas.microsoft.com/office/drawing/2014/main" id="{C4DB2721-5A28-9545-8656-F0D92CC74AA4}"/>
+                </a:ext>
+              </a:extLst>
+            </p:cNvPr>
+            <p:cNvSpPr/>
+            <p:nvPr/>
+          </p:nvSpPr>
+          <p:spPr>
+            <a:xfrm>
+              <a:off x="673800" y="3135325"/>
+              <a:ext cx="915300" cy="791700"/>
+            </a:xfrm>
+            <a:prstGeom prst="triangle">
+              <a:avLst>
+                <a:gd name="adj" fmla="val 50000"/>
+              </a:avLst>
+            </a:prstGeom>
+            <a:noFill/>
+            <a:ln w="19050" cap="flat" cmpd="sng">
+              <a:solidFill>
+                <a:schemeClr val="dk1"/>
+              </a:solidFill>
+              <a:prstDash val="solid"/>
+              <a:round/>
+              <a:headEnd type="none" w="sm" len="sm"/>
+              <a:tailEnd type="none" w="sm" len="sm"/>
+            </a:ln>
+          </p:spPr>
+          <p:txBody>
+            <a:bodyPr spcFirstLastPara="1" wrap="square" lIns="91425" tIns="91425" rIns="91425" bIns="91425" anchor="ctr" anchorCtr="0">
+              <a:noAutofit/>
+            </a:bodyPr>
+            <a:lstStyle/>
+            <a:p>
+              <a:pPr marL="0" lvl="0" indent="0" algn="l" rtl="0">
+                <a:spcBef>
+                  <a:spcPts val="0"/>
+                </a:spcBef>
+                <a:spcAft>
+                  <a:spcPts val="0"/>
+                </a:spcAft>
+                <a:buNone/>
+              </a:pPr>
+              <a:endParaRPr/>
+            </a:p>
+          </p:txBody>
+        </p:sp>
+      </p:grpSp>
+    </p:spTree>
+    <p:extLst>
+      <p:ext uri="{BB962C8B-B14F-4D97-AF65-F5344CB8AC3E}">
+        <p14:creationId xmlns:p14="http://schemas.microsoft.com/office/powerpoint/2010/main" val="2873514580"/>
+      </p:ext>
+    </p:extLst>
+  </p:cSld>
+  <p:clrMapOvr>
+    <a:masterClrMapping/>
+  </p:clrMapOvr>
+</p:sld>
+</file>
+
+<file path=ppt/slides/slide5.xml><?xml version="1.0" encoding="utf-8"?>
 <p:sld xmlns:a="http://schemas.openxmlformats.org/drawingml/2006/main" xmlns:r="http://schemas.openxmlformats.org/officeDocument/2006/relationships" xmlns:p="http://schemas.openxmlformats.org/presentationml/2006/main">
   <p:cSld>
     <p:spTree>
@@ -8733,7 +8940,7 @@
             </a:pPr>
             <a:fld id="{00000000-1234-1234-1234-123412341234}" type="slidenum">
               <a:rPr lang="en"/>
-              <a:t>6</a:t>
+              <a:t>5</a:t>
             </a:fld>
             <a:endParaRPr/>
           </a:p>
@@ -8741,10 +8948,10 @@
       </p:sp>
       <p:pic>
         <p:nvPicPr>
-          <p:cNvPr id="4" name="Picture 3">
+          <p:cNvPr id="10" name="Picture 9">
             <a:extLst>
               <a:ext uri="{FF2B5EF4-FFF2-40B4-BE49-F238E27FC236}">
-                <a16:creationId xmlns:a16="http://schemas.microsoft.com/office/drawing/2014/main" id="{9D3B881C-2767-A3A0-4409-6182B1A95EFB}"/>
+                <a16:creationId xmlns:a16="http://schemas.microsoft.com/office/drawing/2014/main" id="{DF18D0E6-B67C-D47D-197A-E638FD9297D4}"/>
               </a:ext>
             </a:extLst>
           </p:cNvPr>
@@ -8761,8 +8968,8 @@
         </p:blipFill>
         <p:spPr>
           <a:xfrm>
-            <a:off x="395691" y="3078796"/>
-            <a:ext cx="2377116" cy="1862137"/>
+            <a:off x="311700" y="3077913"/>
+            <a:ext cx="6426498" cy="1821859"/>
           </a:xfrm>
           <a:prstGeom prst="rect">
             <a:avLst/>
@@ -8771,10 +8978,10 @@
       </p:pic>
       <p:pic>
         <p:nvPicPr>
-          <p:cNvPr id="8" name="Picture 7">
+          <p:cNvPr id="3" name="Picture 2">
             <a:extLst>
               <a:ext uri="{FF2B5EF4-FFF2-40B4-BE49-F238E27FC236}">
-                <a16:creationId xmlns:a16="http://schemas.microsoft.com/office/drawing/2014/main" id="{A41A2246-6704-7346-ED40-BE1A0A888388}"/>
+                <a16:creationId xmlns:a16="http://schemas.microsoft.com/office/drawing/2014/main" id="{A08A3F67-8E69-41C4-BE7E-D7232EA1A6BA}"/>
               </a:ext>
             </a:extLst>
           </p:cNvPr>
@@ -8791,8 +8998,8 @@
         </p:blipFill>
         <p:spPr>
           <a:xfrm>
-            <a:off x="395691" y="1052344"/>
-            <a:ext cx="4347760" cy="1288085"/>
+            <a:off x="6771597" y="1048972"/>
+            <a:ext cx="2247875" cy="1770202"/>
           </a:xfrm>
           <a:prstGeom prst="rect">
             <a:avLst/>
@@ -8801,10 +9008,10 @@
       </p:pic>
       <p:pic>
         <p:nvPicPr>
-          <p:cNvPr id="10" name="Picture 9">
+          <p:cNvPr id="5" name="Picture 4">
             <a:extLst>
               <a:ext uri="{FF2B5EF4-FFF2-40B4-BE49-F238E27FC236}">
-                <a16:creationId xmlns:a16="http://schemas.microsoft.com/office/drawing/2014/main" id="{DF18D0E6-B67C-D47D-197A-E638FD9297D4}"/>
+                <a16:creationId xmlns:a16="http://schemas.microsoft.com/office/drawing/2014/main" id="{DC432B93-6FC7-0F59-28A4-279EF58A9893}"/>
               </a:ext>
             </a:extLst>
           </p:cNvPr>
@@ -8821,20 +9028,120 @@
         </p:blipFill>
         <p:spPr>
           <a:xfrm>
-            <a:off x="2890115" y="3502818"/>
-            <a:ext cx="5576498" cy="1580891"/>
+            <a:off x="124528" y="1048972"/>
+            <a:ext cx="6613670" cy="1770202"/>
           </a:xfrm>
           <a:prstGeom prst="rect">
             <a:avLst/>
           </a:prstGeom>
         </p:spPr>
       </p:pic>
+    </p:spTree>
+    <p:extLst>
+      <p:ext uri="{BB962C8B-B14F-4D97-AF65-F5344CB8AC3E}">
+        <p14:creationId xmlns:p14="http://schemas.microsoft.com/office/powerpoint/2010/main" val="814987966"/>
+      </p:ext>
+    </p:extLst>
+  </p:cSld>
+  <p:clrMapOvr>
+    <a:masterClrMapping/>
+  </p:clrMapOvr>
+</p:sld>
+</file>
+
+<file path=ppt/slides/slide6.xml><?xml version="1.0" encoding="utf-8"?>
+<p:sld xmlns:a="http://schemas.openxmlformats.org/drawingml/2006/main" xmlns:r="http://schemas.openxmlformats.org/officeDocument/2006/relationships" xmlns:p="http://schemas.openxmlformats.org/presentationml/2006/main">
+  <p:cSld>
+    <p:spTree>
+      <p:nvGrpSpPr>
+        <p:cNvPr id="1" name=""/>
+        <p:cNvGrpSpPr/>
+        <p:nvPr/>
+      </p:nvGrpSpPr>
+      <p:grpSpPr>
+        <a:xfrm>
+          <a:off x="0" y="0"/>
+          <a:ext cx="0" cy="0"/>
+          <a:chOff x="0" y="0"/>
+          <a:chExt cx="0" cy="0"/>
+        </a:xfrm>
+      </p:grpSpPr>
+      <p:sp>
+        <p:nvSpPr>
+          <p:cNvPr id="2" name="Title 1">
+            <a:extLst>
+              <a:ext uri="{FF2B5EF4-FFF2-40B4-BE49-F238E27FC236}">
+                <a16:creationId xmlns:a16="http://schemas.microsoft.com/office/drawing/2014/main" id="{8DF4698D-09A2-3639-2628-D0534E58E34B}"/>
+              </a:ext>
+            </a:extLst>
+          </p:cNvPr>
+          <p:cNvSpPr>
+            <a:spLocks noGrp="1"/>
+          </p:cNvSpPr>
+          <p:nvPr>
+            <p:ph type="title"/>
+          </p:nvPr>
+        </p:nvSpPr>
+        <p:spPr/>
+        <p:txBody>
+          <a:bodyPr>
+            <a:normAutofit fontScale="90000"/>
+          </a:bodyPr>
+          <a:lstStyle/>
+          <a:p>
+            <a:r>
+              <a:rPr lang="en-US" dirty="0"/>
+              <a:t>Relationship between the numeric variable</a:t>
+            </a:r>
+          </a:p>
+        </p:txBody>
+      </p:sp>
+      <p:sp>
+        <p:nvSpPr>
+          <p:cNvPr id="4" name="Slide Number Placeholder 3">
+            <a:extLst>
+              <a:ext uri="{FF2B5EF4-FFF2-40B4-BE49-F238E27FC236}">
+                <a16:creationId xmlns:a16="http://schemas.microsoft.com/office/drawing/2014/main" id="{2ED2967B-D214-37F0-F6E0-63DDAE2C5E3D}"/>
+              </a:ext>
+            </a:extLst>
+          </p:cNvPr>
+          <p:cNvSpPr>
+            <a:spLocks noGrp="1"/>
+          </p:cNvSpPr>
+          <p:nvPr>
+            <p:ph type="sldNum" idx="12"/>
+          </p:nvPr>
+        </p:nvSpPr>
+        <p:spPr/>
+        <p:txBody>
+          <a:bodyPr>
+            <a:normAutofit fontScale="92500" lnSpcReduction="20000"/>
+          </a:bodyPr>
+          <a:lstStyle/>
+          <a:p>
+            <a:pPr marL="0" lvl="0" indent="0" algn="r" rtl="0">
+              <a:spcBef>
+                <a:spcPts val="0"/>
+              </a:spcBef>
+              <a:spcAft>
+                <a:spcPts val="0"/>
+              </a:spcAft>
+              <a:buNone/>
+            </a:pPr>
+            <a:fld id="{00000000-1234-1234-1234-123412341234}" type="slidenum">
+              <a:rPr lang="en" smtClean="0"/>
+              <a:t>6</a:t>
+            </a:fld>
+            <a:endParaRPr lang="en"/>
+          </a:p>
+        </p:txBody>
+      </p:sp>
       <p:pic>
         <p:nvPicPr>
-          <p:cNvPr id="12" name="Picture 11">
+          <p:cNvPr id="5" name="Picture 4">
             <a:extLst>
               <a:ext uri="{FF2B5EF4-FFF2-40B4-BE49-F238E27FC236}">
-                <a16:creationId xmlns:a16="http://schemas.microsoft.com/office/drawing/2014/main" id="{688E2838-D2F1-277F-0783-385FEA0E38E7}"/>
+                <a16:creationId xmlns:a16="http://schemas.microsoft.com/office/drawing/2014/main" id="{8EDF0461-1E26-9F8E-1067-523EDED6AC5B}"/>
               </a:ext>
             </a:extLst>
           </p:cNvPr>
@@ -8844,25 +9151,268 @@
           <p:nvPr/>
         </p:nvPicPr>
         <p:blipFill>
-          <a:blip r:embed="rId6"/>
+          <a:blip r:embed="rId2"/>
+          <a:srcRect t="6236" r="658"/>
           <a:stretch>
             <a:fillRect/>
           </a:stretch>
         </p:blipFill>
         <p:spPr>
           <a:xfrm>
-            <a:off x="4758752" y="1093338"/>
-            <a:ext cx="3982136" cy="1985458"/>
+            <a:off x="1001776" y="1349298"/>
+            <a:ext cx="6581043" cy="3097009"/>
           </a:xfrm>
           <a:prstGeom prst="rect">
             <a:avLst/>
           </a:prstGeom>
         </p:spPr>
       </p:pic>
+      <p:grpSp>
+        <p:nvGrpSpPr>
+          <p:cNvPr id="6" name="Google Shape;438;p41">
+            <a:extLst>
+              <a:ext uri="{FF2B5EF4-FFF2-40B4-BE49-F238E27FC236}">
+                <a16:creationId xmlns:a16="http://schemas.microsoft.com/office/drawing/2014/main" id="{3DBD4C97-7BB4-83D6-A665-AB89EF683A4D}"/>
+              </a:ext>
+            </a:extLst>
+          </p:cNvPr>
+          <p:cNvGrpSpPr/>
+          <p:nvPr/>
+        </p:nvGrpSpPr>
+        <p:grpSpPr>
+          <a:xfrm rot="8100353">
+            <a:off x="316841" y="4203434"/>
+            <a:ext cx="474828" cy="511970"/>
+            <a:chOff x="673800" y="3053202"/>
+            <a:chExt cx="948075" cy="873823"/>
+          </a:xfrm>
+        </p:grpSpPr>
+        <p:sp>
+          <p:nvSpPr>
+            <p:cNvPr id="7" name="Google Shape;439;p41">
+              <a:extLst>
+                <a:ext uri="{FF2B5EF4-FFF2-40B4-BE49-F238E27FC236}">
+                  <a16:creationId xmlns:a16="http://schemas.microsoft.com/office/drawing/2014/main" id="{1B3CC85F-8594-85D2-4F62-B86BF5EB5317}"/>
+                </a:ext>
+              </a:extLst>
+            </p:cNvPr>
+            <p:cNvSpPr/>
+            <p:nvPr/>
+          </p:nvSpPr>
+          <p:spPr>
+            <a:xfrm>
+              <a:off x="706575" y="3053202"/>
+              <a:ext cx="915300" cy="791701"/>
+            </a:xfrm>
+            <a:prstGeom prst="triangle">
+              <a:avLst>
+                <a:gd name="adj" fmla="val 50000"/>
+              </a:avLst>
+            </a:prstGeom>
+            <a:solidFill>
+              <a:schemeClr val="accent1"/>
+            </a:solidFill>
+            <a:ln>
+              <a:noFill/>
+            </a:ln>
+          </p:spPr>
+          <p:txBody>
+            <a:bodyPr spcFirstLastPara="1" wrap="square" lIns="91425" tIns="91425" rIns="91425" bIns="91425" anchor="ctr" anchorCtr="0">
+              <a:noAutofit/>
+            </a:bodyPr>
+            <a:lstStyle/>
+            <a:p>
+              <a:pPr marL="0" lvl="0" indent="0" algn="l" rtl="0">
+                <a:spcBef>
+                  <a:spcPts val="0"/>
+                </a:spcBef>
+                <a:spcAft>
+                  <a:spcPts val="0"/>
+                </a:spcAft>
+                <a:buNone/>
+              </a:pPr>
+              <a:endParaRPr dirty="0"/>
+            </a:p>
+          </p:txBody>
+        </p:sp>
+        <p:sp>
+          <p:nvSpPr>
+            <p:cNvPr id="8" name="Google Shape;440;p41">
+              <a:extLst>
+                <a:ext uri="{FF2B5EF4-FFF2-40B4-BE49-F238E27FC236}">
+                  <a16:creationId xmlns:a16="http://schemas.microsoft.com/office/drawing/2014/main" id="{C2BA447F-873E-EE66-230B-271BC61D2441}"/>
+                </a:ext>
+              </a:extLst>
+            </p:cNvPr>
+            <p:cNvSpPr/>
+            <p:nvPr/>
+          </p:nvSpPr>
+          <p:spPr>
+            <a:xfrm>
+              <a:off x="673800" y="3135325"/>
+              <a:ext cx="915300" cy="791700"/>
+            </a:xfrm>
+            <a:prstGeom prst="triangle">
+              <a:avLst>
+                <a:gd name="adj" fmla="val 50000"/>
+              </a:avLst>
+            </a:prstGeom>
+            <a:noFill/>
+            <a:ln w="19050" cap="flat" cmpd="sng">
+              <a:solidFill>
+                <a:schemeClr val="dk1"/>
+              </a:solidFill>
+              <a:prstDash val="solid"/>
+              <a:round/>
+              <a:headEnd type="none" w="sm" len="sm"/>
+              <a:tailEnd type="none" w="sm" len="sm"/>
+            </a:ln>
+          </p:spPr>
+          <p:txBody>
+            <a:bodyPr spcFirstLastPara="1" wrap="square" lIns="91425" tIns="91425" rIns="91425" bIns="91425" anchor="ctr" anchorCtr="0">
+              <a:noAutofit/>
+            </a:bodyPr>
+            <a:lstStyle/>
+            <a:p>
+              <a:pPr marL="0" lvl="0" indent="0" algn="l" rtl="0">
+                <a:spcBef>
+                  <a:spcPts val="0"/>
+                </a:spcBef>
+                <a:spcAft>
+                  <a:spcPts val="0"/>
+                </a:spcAft>
+                <a:buNone/>
+              </a:pPr>
+              <a:endParaRPr/>
+            </a:p>
+          </p:txBody>
+        </p:sp>
+      </p:grpSp>
+      <p:grpSp>
+        <p:nvGrpSpPr>
+          <p:cNvPr id="9" name="Google Shape;435;p41">
+            <a:extLst>
+              <a:ext uri="{FF2B5EF4-FFF2-40B4-BE49-F238E27FC236}">
+                <a16:creationId xmlns:a16="http://schemas.microsoft.com/office/drawing/2014/main" id="{69E825AD-9EB5-12B5-099E-C3A59461D09E}"/>
+              </a:ext>
+            </a:extLst>
+          </p:cNvPr>
+          <p:cNvGrpSpPr/>
+          <p:nvPr/>
+        </p:nvGrpSpPr>
+        <p:grpSpPr>
+          <a:xfrm rot="2700000">
+            <a:off x="8304594" y="4088595"/>
+            <a:ext cx="485529" cy="524937"/>
+            <a:chOff x="919500" y="1916075"/>
+            <a:chExt cx="1067700" cy="867900"/>
+          </a:xfrm>
+        </p:grpSpPr>
+        <p:sp>
+          <p:nvSpPr>
+            <p:cNvPr id="10" name="Google Shape;436;p41">
+              <a:extLst>
+                <a:ext uri="{FF2B5EF4-FFF2-40B4-BE49-F238E27FC236}">
+                  <a16:creationId xmlns:a16="http://schemas.microsoft.com/office/drawing/2014/main" id="{8F7B5051-B832-7DBF-6D7D-8CAF3876FD8E}"/>
+                </a:ext>
+              </a:extLst>
+            </p:cNvPr>
+            <p:cNvSpPr/>
+            <p:nvPr/>
+          </p:nvSpPr>
+          <p:spPr>
+            <a:xfrm>
+              <a:off x="919500" y="1992275"/>
+              <a:ext cx="915300" cy="791700"/>
+            </a:xfrm>
+            <a:prstGeom prst="triangle">
+              <a:avLst>
+                <a:gd name="adj" fmla="val 50000"/>
+              </a:avLst>
+            </a:prstGeom>
+            <a:solidFill>
+              <a:schemeClr val="accent4"/>
+            </a:solidFill>
+            <a:ln>
+              <a:noFill/>
+            </a:ln>
+          </p:spPr>
+          <p:txBody>
+            <a:bodyPr spcFirstLastPara="1" wrap="square" lIns="91425" tIns="91425" rIns="91425" bIns="91425" anchor="ctr" anchorCtr="0">
+              <a:noAutofit/>
+            </a:bodyPr>
+            <a:lstStyle/>
+            <a:p>
+              <a:pPr marL="0" lvl="0" indent="0" algn="l" rtl="0">
+                <a:spcBef>
+                  <a:spcPts val="0"/>
+                </a:spcBef>
+                <a:spcAft>
+                  <a:spcPts val="0"/>
+                </a:spcAft>
+                <a:buNone/>
+              </a:pPr>
+              <a:endParaRPr/>
+            </a:p>
+          </p:txBody>
+        </p:sp>
+        <p:sp>
+          <p:nvSpPr>
+            <p:cNvPr id="11" name="Google Shape;437;p41">
+              <a:extLst>
+                <a:ext uri="{FF2B5EF4-FFF2-40B4-BE49-F238E27FC236}">
+                  <a16:creationId xmlns:a16="http://schemas.microsoft.com/office/drawing/2014/main" id="{28735C90-3429-9A76-B451-83BE824628A8}"/>
+                </a:ext>
+              </a:extLst>
+            </p:cNvPr>
+            <p:cNvSpPr/>
+            <p:nvPr/>
+          </p:nvSpPr>
+          <p:spPr>
+            <a:xfrm>
+              <a:off x="1071900" y="1916075"/>
+              <a:ext cx="915300" cy="791700"/>
+            </a:xfrm>
+            <a:prstGeom prst="triangle">
+              <a:avLst>
+                <a:gd name="adj" fmla="val 50000"/>
+              </a:avLst>
+            </a:prstGeom>
+            <a:noFill/>
+            <a:ln w="19050" cap="flat" cmpd="sng">
+              <a:solidFill>
+                <a:schemeClr val="dk1"/>
+              </a:solidFill>
+              <a:prstDash val="solid"/>
+              <a:round/>
+              <a:headEnd type="none" w="sm" len="sm"/>
+              <a:tailEnd type="none" w="sm" len="sm"/>
+            </a:ln>
+          </p:spPr>
+          <p:txBody>
+            <a:bodyPr spcFirstLastPara="1" wrap="square" lIns="91425" tIns="91425" rIns="91425" bIns="91425" anchor="ctr" anchorCtr="0">
+              <a:noAutofit/>
+            </a:bodyPr>
+            <a:lstStyle/>
+            <a:p>
+              <a:pPr marL="0" lvl="0" indent="0" algn="l" rtl="0">
+                <a:spcBef>
+                  <a:spcPts val="0"/>
+                </a:spcBef>
+                <a:spcAft>
+                  <a:spcPts val="0"/>
+                </a:spcAft>
+                <a:buNone/>
+              </a:pPr>
+              <a:endParaRPr/>
+            </a:p>
+          </p:txBody>
+        </p:sp>
+      </p:grpSp>
     </p:spTree>
     <p:extLst>
       <p:ext uri="{BB962C8B-B14F-4D97-AF65-F5344CB8AC3E}">
-        <p14:creationId xmlns:p14="http://schemas.microsoft.com/office/powerpoint/2010/main" val="814987966"/>
+        <p14:creationId xmlns:p14="http://schemas.microsoft.com/office/powerpoint/2010/main" val="2553649666"/>
       </p:ext>
     </p:extLst>
   </p:cSld>
@@ -8913,7 +9463,7 @@
         </p:nvSpPr>
         <p:spPr>
           <a:xfrm>
-            <a:off x="311700" y="342900"/>
+            <a:off x="319513" y="34849"/>
             <a:ext cx="8147100" cy="572700"/>
           </a:xfrm>
           <a:prstGeom prst="rect">
@@ -8928,26 +9478,8 @@
           <a:p>
             <a:pPr lvl="0"/>
             <a:r>
-              <a:rPr lang="en-US" b="1" dirty="0">
-                <a:latin typeface="Assistant"/>
-                <a:ea typeface="Assistant"/>
-                <a:cs typeface="Assistant"/>
-                <a:sym typeface="Assistant"/>
-              </a:rPr>
-              <a:t>Membership type and churn </a:t>
-            </a:r>
-            <a:r>
               <a:rPr lang="en-US" dirty="0"/>
-              <a:t>s</a:t>
-            </a:r>
-            <a:r>
-              <a:rPr lang="en-US" b="1" dirty="0">
-                <a:latin typeface="Assistant"/>
-                <a:ea typeface="Assistant"/>
-                <a:cs typeface="Assistant"/>
-                <a:sym typeface="Assistant"/>
-              </a:rPr>
-              <a:t>tatus</a:t>
+              <a:t>Contract type drives churn</a:t>
             </a:r>
             <a:endParaRPr b="1" dirty="0">
               <a:latin typeface="Assistant"/>
@@ -9070,7 +9602,7 @@
         </p:nvGrpSpPr>
         <p:grpSpPr>
           <a:xfrm>
-            <a:off x="-56079" y="4800600"/>
+            <a:off x="31320" y="4656678"/>
             <a:ext cx="410072" cy="410168"/>
             <a:chOff x="3717325" y="2137000"/>
             <a:chExt cx="1104178" cy="1104176"/>
@@ -9187,7 +9719,7 @@
         </p:nvGrpSpPr>
         <p:grpSpPr>
           <a:xfrm rot="10800000">
-            <a:off x="7824975" y="4459962"/>
+            <a:off x="8404714" y="4497989"/>
             <a:ext cx="427586" cy="471802"/>
             <a:chOff x="4185575" y="3320360"/>
             <a:chExt cx="1104178" cy="1104176"/>
@@ -9290,45 +9822,6 @@
           </p:txBody>
         </p:sp>
       </p:grpSp>
-      <p:sp>
-        <p:nvSpPr>
-          <p:cNvPr id="6" name="TextBox 5">
-            <a:extLst>
-              <a:ext uri="{FF2B5EF4-FFF2-40B4-BE49-F238E27FC236}">
-                <a16:creationId xmlns:a16="http://schemas.microsoft.com/office/drawing/2014/main" id="{F6A901A9-E69E-C2CB-3466-CBC7B0855BF5}"/>
-              </a:ext>
-            </a:extLst>
-          </p:cNvPr>
-          <p:cNvSpPr txBox="1"/>
-          <p:nvPr/>
-        </p:nvSpPr>
-        <p:spPr>
-          <a:xfrm>
-            <a:off x="353992" y="909587"/>
-            <a:ext cx="4102405" cy="307777"/>
-          </a:xfrm>
-          <a:prstGeom prst="rect">
-            <a:avLst/>
-          </a:prstGeom>
-          <a:noFill/>
-        </p:spPr>
-        <p:txBody>
-          <a:bodyPr wrap="none" rtlCol="0">
-            <a:spAutoFit/>
-          </a:bodyPr>
-          <a:lstStyle/>
-          <a:p>
-            <a:pPr marL="285750" indent="-285750">
-              <a:buFont typeface="Arial" panose="020B0604020202020204" pitchFamily="34" charset="0"/>
-              <a:buChar char="•"/>
-            </a:pPr>
-            <a:r>
-              <a:rPr lang="en-US" dirty="0"/>
-              <a:t>Monthly customer have the highest churn rate</a:t>
-            </a:r>
-          </a:p>
-        </p:txBody>
-      </p:sp>
       <p:pic>
         <p:nvPicPr>
           <p:cNvPr id="2" name="Picture 1">
@@ -9352,14 +9845,53 @@
         </p:blipFill>
         <p:spPr>
           <a:xfrm>
-            <a:off x="1042622" y="1281793"/>
-            <a:ext cx="5965371" cy="3861707"/>
+            <a:off x="1258886" y="549686"/>
+            <a:ext cx="6328334" cy="4096672"/>
           </a:xfrm>
           <a:prstGeom prst="rect">
             <a:avLst/>
           </a:prstGeom>
         </p:spPr>
       </p:pic>
+      <p:sp>
+        <p:nvSpPr>
+          <p:cNvPr id="3" name="TextBox 2">
+            <a:extLst>
+              <a:ext uri="{FF2B5EF4-FFF2-40B4-BE49-F238E27FC236}">
+                <a16:creationId xmlns:a16="http://schemas.microsoft.com/office/drawing/2014/main" id="{DDAD7E55-61B7-DDBE-75E6-34CB7810C7F8}"/>
+              </a:ext>
+            </a:extLst>
+          </p:cNvPr>
+          <p:cNvSpPr txBox="1"/>
+          <p:nvPr/>
+        </p:nvSpPr>
+        <p:spPr>
+          <a:xfrm>
+            <a:off x="684048" y="4674723"/>
+            <a:ext cx="4102405" cy="307777"/>
+          </a:xfrm>
+          <a:prstGeom prst="rect">
+            <a:avLst/>
+          </a:prstGeom>
+          <a:noFill/>
+        </p:spPr>
+        <p:txBody>
+          <a:bodyPr wrap="none" rtlCol="0">
+            <a:spAutoFit/>
+          </a:bodyPr>
+          <a:lstStyle/>
+          <a:p>
+            <a:pPr marL="285750" indent="-285750">
+              <a:buFont typeface="Arial" panose="020B0604020202020204" pitchFamily="34" charset="0"/>
+              <a:buChar char="•"/>
+            </a:pPr>
+            <a:r>
+              <a:rPr lang="en-US" dirty="0"/>
+              <a:t>Monthly customer have the highest churn rate</a:t>
+            </a:r>
+          </a:p>
+        </p:txBody>
+      </p:sp>
     </p:spTree>
     <p:extLst>
       <p:ext uri="{BB962C8B-B14F-4D97-AF65-F5344CB8AC3E}">
@@ -9374,6 +9906,379 @@
 </file>
 
 <file path=ppt/slides/slide8.xml><?xml version="1.0" encoding="utf-8"?>
+<p:sld xmlns:a="http://schemas.openxmlformats.org/drawingml/2006/main" xmlns:r="http://schemas.openxmlformats.org/officeDocument/2006/relationships" xmlns:p="http://schemas.openxmlformats.org/presentationml/2006/main">
+  <p:cSld>
+    <p:spTree>
+      <p:nvGrpSpPr>
+        <p:cNvPr id="1" name=""/>
+        <p:cNvGrpSpPr/>
+        <p:nvPr/>
+      </p:nvGrpSpPr>
+      <p:grpSpPr>
+        <a:xfrm>
+          <a:off x="0" y="0"/>
+          <a:ext cx="0" cy="0"/>
+          <a:chOff x="0" y="0"/>
+          <a:chExt cx="0" cy="0"/>
+        </a:xfrm>
+      </p:grpSpPr>
+      <p:sp>
+        <p:nvSpPr>
+          <p:cNvPr id="2" name="Title 1">
+            <a:extLst>
+              <a:ext uri="{FF2B5EF4-FFF2-40B4-BE49-F238E27FC236}">
+                <a16:creationId xmlns:a16="http://schemas.microsoft.com/office/drawing/2014/main" id="{E5388E5D-9CF3-1DC2-997E-A817D466913D}"/>
+              </a:ext>
+            </a:extLst>
+          </p:cNvPr>
+          <p:cNvSpPr>
+            <a:spLocks noGrp="1"/>
+          </p:cNvSpPr>
+          <p:nvPr>
+            <p:ph type="title"/>
+          </p:nvPr>
+        </p:nvSpPr>
+        <p:spPr>
+          <a:xfrm>
+            <a:off x="311700" y="113100"/>
+            <a:ext cx="8147100" cy="572700"/>
+          </a:xfrm>
+        </p:spPr>
+        <p:txBody>
+          <a:bodyPr>
+            <a:normAutofit fontScale="90000"/>
+          </a:bodyPr>
+          <a:lstStyle/>
+          <a:p>
+            <a:r>
+              <a:rPr lang="en-US" dirty="0"/>
+              <a:t>Full model comparison </a:t>
+            </a:r>
+          </a:p>
+        </p:txBody>
+      </p:sp>
+      <p:pic>
+        <p:nvPicPr>
+          <p:cNvPr id="5" name="Picture 4">
+            <a:extLst>
+              <a:ext uri="{FF2B5EF4-FFF2-40B4-BE49-F238E27FC236}">
+                <a16:creationId xmlns:a16="http://schemas.microsoft.com/office/drawing/2014/main" id="{A26C7132-E05F-7721-FFC6-B27FF150DEC5}"/>
+              </a:ext>
+            </a:extLst>
+          </p:cNvPr>
+          <p:cNvPicPr>
+            <a:picLocks noChangeAspect="1"/>
+          </p:cNvPicPr>
+          <p:nvPr/>
+        </p:nvPicPr>
+        <p:blipFill>
+          <a:blip r:embed="rId2"/>
+          <a:stretch>
+            <a:fillRect/>
+          </a:stretch>
+        </p:blipFill>
+        <p:spPr>
+          <a:xfrm>
+            <a:off x="1231900" y="990772"/>
+            <a:ext cx="6680200" cy="3771900"/>
+          </a:xfrm>
+          <a:prstGeom prst="rect">
+            <a:avLst/>
+          </a:prstGeom>
+        </p:spPr>
+      </p:pic>
+      <p:sp>
+        <p:nvSpPr>
+          <p:cNvPr id="4" name="Slide Number Placeholder 3">
+            <a:extLst>
+              <a:ext uri="{FF2B5EF4-FFF2-40B4-BE49-F238E27FC236}">
+                <a16:creationId xmlns:a16="http://schemas.microsoft.com/office/drawing/2014/main" id="{025ED3E3-6D52-CDE8-B556-F9F8944C8FB3}"/>
+              </a:ext>
+            </a:extLst>
+          </p:cNvPr>
+          <p:cNvSpPr>
+            <a:spLocks noGrp="1"/>
+          </p:cNvSpPr>
+          <p:nvPr>
+            <p:ph type="sldNum" idx="12"/>
+          </p:nvPr>
+        </p:nvSpPr>
+        <p:spPr/>
+        <p:txBody>
+          <a:bodyPr>
+            <a:normAutofit fontScale="92500" lnSpcReduction="20000"/>
+          </a:bodyPr>
+          <a:lstStyle/>
+          <a:p>
+            <a:pPr marL="0" lvl="0" indent="0" algn="r" rtl="0">
+              <a:spcBef>
+                <a:spcPts val="0"/>
+              </a:spcBef>
+              <a:spcAft>
+                <a:spcPts val="0"/>
+              </a:spcAft>
+              <a:buNone/>
+            </a:pPr>
+            <a:fld id="{00000000-1234-1234-1234-123412341234}" type="slidenum">
+              <a:rPr lang="en" smtClean="0"/>
+              <a:t>8</a:t>
+            </a:fld>
+            <a:endParaRPr lang="en"/>
+          </a:p>
+        </p:txBody>
+      </p:sp>
+      <p:grpSp>
+        <p:nvGrpSpPr>
+          <p:cNvPr id="6" name="Google Shape;435;p41">
+            <a:extLst>
+              <a:ext uri="{FF2B5EF4-FFF2-40B4-BE49-F238E27FC236}">
+                <a16:creationId xmlns:a16="http://schemas.microsoft.com/office/drawing/2014/main" id="{32C64681-D7DD-1D5A-C22B-B6C51A977023}"/>
+              </a:ext>
+            </a:extLst>
+          </p:cNvPr>
+          <p:cNvGrpSpPr/>
+          <p:nvPr/>
+        </p:nvGrpSpPr>
+        <p:grpSpPr>
+          <a:xfrm rot="2700000">
+            <a:off x="8299315" y="4323284"/>
+            <a:ext cx="393597" cy="288061"/>
+            <a:chOff x="919500" y="1916075"/>
+            <a:chExt cx="1067700" cy="867900"/>
+          </a:xfrm>
+        </p:grpSpPr>
+        <p:sp>
+          <p:nvSpPr>
+            <p:cNvPr id="7" name="Google Shape;436;p41">
+              <a:extLst>
+                <a:ext uri="{FF2B5EF4-FFF2-40B4-BE49-F238E27FC236}">
+                  <a16:creationId xmlns:a16="http://schemas.microsoft.com/office/drawing/2014/main" id="{1AF355F9-0FE4-B10F-30ED-F6E8777CF9D6}"/>
+                </a:ext>
+              </a:extLst>
+            </p:cNvPr>
+            <p:cNvSpPr/>
+            <p:nvPr/>
+          </p:nvSpPr>
+          <p:spPr>
+            <a:xfrm>
+              <a:off x="919500" y="1992275"/>
+              <a:ext cx="915300" cy="791700"/>
+            </a:xfrm>
+            <a:prstGeom prst="triangle">
+              <a:avLst>
+                <a:gd name="adj" fmla="val 50000"/>
+              </a:avLst>
+            </a:prstGeom>
+            <a:solidFill>
+              <a:schemeClr val="accent4"/>
+            </a:solidFill>
+            <a:ln>
+              <a:noFill/>
+            </a:ln>
+          </p:spPr>
+          <p:txBody>
+            <a:bodyPr spcFirstLastPara="1" wrap="square" lIns="91425" tIns="91425" rIns="91425" bIns="91425" anchor="ctr" anchorCtr="0">
+              <a:noAutofit/>
+            </a:bodyPr>
+            <a:lstStyle/>
+            <a:p>
+              <a:pPr marL="0" lvl="0" indent="0" algn="l" rtl="0">
+                <a:spcBef>
+                  <a:spcPts val="0"/>
+                </a:spcBef>
+                <a:spcAft>
+                  <a:spcPts val="0"/>
+                </a:spcAft>
+                <a:buNone/>
+              </a:pPr>
+              <a:endParaRPr/>
+            </a:p>
+          </p:txBody>
+        </p:sp>
+        <p:sp>
+          <p:nvSpPr>
+            <p:cNvPr id="8" name="Google Shape;437;p41">
+              <a:extLst>
+                <a:ext uri="{FF2B5EF4-FFF2-40B4-BE49-F238E27FC236}">
+                  <a16:creationId xmlns:a16="http://schemas.microsoft.com/office/drawing/2014/main" id="{58C1CB2A-1743-096D-D3F0-CF91CC9ED94F}"/>
+                </a:ext>
+              </a:extLst>
+            </p:cNvPr>
+            <p:cNvSpPr/>
+            <p:nvPr/>
+          </p:nvSpPr>
+          <p:spPr>
+            <a:xfrm>
+              <a:off x="1071900" y="1916075"/>
+              <a:ext cx="915300" cy="791700"/>
+            </a:xfrm>
+            <a:prstGeom prst="triangle">
+              <a:avLst>
+                <a:gd name="adj" fmla="val 50000"/>
+              </a:avLst>
+            </a:prstGeom>
+            <a:noFill/>
+            <a:ln w="19050" cap="flat" cmpd="sng">
+              <a:solidFill>
+                <a:schemeClr val="dk1"/>
+              </a:solidFill>
+              <a:prstDash val="solid"/>
+              <a:round/>
+              <a:headEnd type="none" w="sm" len="sm"/>
+              <a:tailEnd type="none" w="sm" len="sm"/>
+            </a:ln>
+          </p:spPr>
+          <p:txBody>
+            <a:bodyPr spcFirstLastPara="1" wrap="square" lIns="91425" tIns="91425" rIns="91425" bIns="91425" anchor="ctr" anchorCtr="0">
+              <a:noAutofit/>
+            </a:bodyPr>
+            <a:lstStyle/>
+            <a:p>
+              <a:pPr marL="0" lvl="0" indent="0" algn="l" rtl="0">
+                <a:spcBef>
+                  <a:spcPts val="0"/>
+                </a:spcBef>
+                <a:spcAft>
+                  <a:spcPts val="0"/>
+                </a:spcAft>
+                <a:buNone/>
+              </a:pPr>
+              <a:endParaRPr/>
+            </a:p>
+          </p:txBody>
+        </p:sp>
+      </p:grpSp>
+      <p:grpSp>
+        <p:nvGrpSpPr>
+          <p:cNvPr id="9" name="Google Shape;451;p42">
+            <a:extLst>
+              <a:ext uri="{FF2B5EF4-FFF2-40B4-BE49-F238E27FC236}">
+                <a16:creationId xmlns:a16="http://schemas.microsoft.com/office/drawing/2014/main" id="{D1901897-28A7-68A2-6E04-62A6EC0820CE}"/>
+              </a:ext>
+            </a:extLst>
+          </p:cNvPr>
+          <p:cNvGrpSpPr/>
+          <p:nvPr/>
+        </p:nvGrpSpPr>
+        <p:grpSpPr>
+          <a:xfrm rot="10800000">
+            <a:off x="36907" y="4571342"/>
+            <a:ext cx="427586" cy="471802"/>
+            <a:chOff x="4185575" y="3320360"/>
+            <a:chExt cx="1104178" cy="1104176"/>
+          </a:xfrm>
+        </p:grpSpPr>
+        <p:sp>
+          <p:nvSpPr>
+            <p:cNvPr id="10" name="Google Shape;452;p42">
+              <a:extLst>
+                <a:ext uri="{FF2B5EF4-FFF2-40B4-BE49-F238E27FC236}">
+                  <a16:creationId xmlns:a16="http://schemas.microsoft.com/office/drawing/2014/main" id="{66B67516-FABB-FC96-C7F5-E8E764894A18}"/>
+                </a:ext>
+              </a:extLst>
+            </p:cNvPr>
+            <p:cNvSpPr/>
+            <p:nvPr/>
+          </p:nvSpPr>
+          <p:spPr>
+            <a:xfrm>
+              <a:off x="4185575" y="3421936"/>
+              <a:ext cx="1002600" cy="1002600"/>
+            </a:xfrm>
+            <a:prstGeom prst="ellipse">
+              <a:avLst/>
+            </a:prstGeom>
+            <a:solidFill>
+              <a:schemeClr val="accent1"/>
+            </a:solidFill>
+            <a:ln>
+              <a:noFill/>
+            </a:ln>
+          </p:spPr>
+          <p:txBody>
+            <a:bodyPr spcFirstLastPara="1" wrap="square" lIns="91425" tIns="91425" rIns="91425" bIns="91425" anchor="ctr" anchorCtr="0">
+              <a:noAutofit/>
+            </a:bodyPr>
+            <a:lstStyle/>
+            <a:p>
+              <a:pPr marL="0" lvl="0" indent="0" algn="l" rtl="0">
+                <a:spcBef>
+                  <a:spcPts val="0"/>
+                </a:spcBef>
+                <a:spcAft>
+                  <a:spcPts val="0"/>
+                </a:spcAft>
+                <a:buNone/>
+              </a:pPr>
+              <a:endParaRPr/>
+            </a:p>
+          </p:txBody>
+        </p:sp>
+        <p:sp>
+          <p:nvSpPr>
+            <p:cNvPr id="11" name="Google Shape;453;p42">
+              <a:extLst>
+                <a:ext uri="{FF2B5EF4-FFF2-40B4-BE49-F238E27FC236}">
+                  <a16:creationId xmlns:a16="http://schemas.microsoft.com/office/drawing/2014/main" id="{8AF5F3BB-72C6-7A8B-7F1F-765C90C088D2}"/>
+                </a:ext>
+              </a:extLst>
+            </p:cNvPr>
+            <p:cNvSpPr/>
+            <p:nvPr/>
+          </p:nvSpPr>
+          <p:spPr>
+            <a:xfrm>
+              <a:off x="4287153" y="3320360"/>
+              <a:ext cx="1002600" cy="1002600"/>
+            </a:xfrm>
+            <a:prstGeom prst="ellipse">
+              <a:avLst/>
+            </a:prstGeom>
+            <a:noFill/>
+            <a:ln w="19050" cap="flat" cmpd="sng">
+              <a:solidFill>
+                <a:schemeClr val="dk1"/>
+              </a:solidFill>
+              <a:prstDash val="solid"/>
+              <a:round/>
+              <a:headEnd type="none" w="sm" len="sm"/>
+              <a:tailEnd type="none" w="sm" len="sm"/>
+            </a:ln>
+          </p:spPr>
+          <p:txBody>
+            <a:bodyPr spcFirstLastPara="1" wrap="square" lIns="91425" tIns="91425" rIns="91425" bIns="91425" anchor="ctr" anchorCtr="0">
+              <a:noAutofit/>
+            </a:bodyPr>
+            <a:lstStyle/>
+            <a:p>
+              <a:pPr marL="0" lvl="0" indent="0" algn="l" rtl="0">
+                <a:spcBef>
+                  <a:spcPts val="0"/>
+                </a:spcBef>
+                <a:spcAft>
+                  <a:spcPts val="0"/>
+                </a:spcAft>
+                <a:buNone/>
+              </a:pPr>
+              <a:endParaRPr/>
+            </a:p>
+          </p:txBody>
+        </p:sp>
+      </p:grpSp>
+    </p:spTree>
+    <p:extLst>
+      <p:ext uri="{BB962C8B-B14F-4D97-AF65-F5344CB8AC3E}">
+        <p14:creationId xmlns:p14="http://schemas.microsoft.com/office/powerpoint/2010/main" val="1352144156"/>
+      </p:ext>
+    </p:extLst>
+  </p:cSld>
+  <p:clrMapOvr>
+    <a:masterClrMapping/>
+  </p:clrMapOvr>
+</p:sld>
+</file>
+
+<file path=ppt/slides/slide9.xml><?xml version="1.0" encoding="utf-8"?>
 <p:sld xmlns:a="http://schemas.openxmlformats.org/drawingml/2006/main" xmlns:r="http://schemas.openxmlformats.org/officeDocument/2006/relationships" xmlns:p="http://schemas.openxmlformats.org/presentationml/2006/main">
   <p:cSld>
     <p:spTree>
@@ -9424,7 +10329,7 @@
             </a:br>
             <a:r>
               <a:rPr lang="en-US" sz="2000" dirty="0"/>
-              <a:t>Confusion Matrices (Top 3 Models</a:t>
+              <a:t>Confusion matrices of the top three models</a:t>
             </a:r>
             <a:br>
               <a:rPr lang="en-US" sz="2000" dirty="0"/>
@@ -9438,10 +10343,10 @@
       </p:sp>
       <p:pic>
         <p:nvPicPr>
-          <p:cNvPr id="6" name="Picture 5">
+          <p:cNvPr id="2" name="Picture 1">
             <a:extLst>
               <a:ext uri="{FF2B5EF4-FFF2-40B4-BE49-F238E27FC236}">
-                <a16:creationId xmlns:a16="http://schemas.microsoft.com/office/drawing/2014/main" id="{CCE4A964-A845-B07F-1248-2177BCE705F3}"/>
+                <a16:creationId xmlns:a16="http://schemas.microsoft.com/office/drawing/2014/main" id="{F17063A0-1668-E1C1-15DC-00A9D37F2D53}"/>
               </a:ext>
             </a:extLst>
           </p:cNvPr>
@@ -9452,92 +10357,261 @@
         </p:nvPicPr>
         <p:blipFill>
           <a:blip r:embed="rId3"/>
+          <a:srcRect t="8895" r="1219"/>
           <a:stretch>
             <a:fillRect/>
           </a:stretch>
         </p:blipFill>
         <p:spPr>
           <a:xfrm>
-            <a:off x="61198" y="1355021"/>
-            <a:ext cx="9021603" cy="2433458"/>
+            <a:off x="546442" y="915600"/>
+            <a:ext cx="7677615" cy="1943278"/>
           </a:xfrm>
           <a:prstGeom prst="rect">
             <a:avLst/>
           </a:prstGeom>
         </p:spPr>
       </p:pic>
-    </p:spTree>
-    <p:extLst>
-      <p:ext uri="{BB962C8B-B14F-4D97-AF65-F5344CB8AC3E}">
-        <p14:creationId xmlns:p14="http://schemas.microsoft.com/office/powerpoint/2010/main" val="1141351483"/>
-      </p:ext>
-    </p:extLst>
-  </p:cSld>
-  <p:clrMapOvr>
-    <a:masterClrMapping/>
-  </p:clrMapOvr>
-</p:sld>
-</file>
-
-<file path=ppt/slides/slide9.xml><?xml version="1.0" encoding="utf-8"?>
-<p:sld xmlns:a="http://schemas.openxmlformats.org/drawingml/2006/main" xmlns:r="http://schemas.openxmlformats.org/officeDocument/2006/relationships" xmlns:p="http://schemas.openxmlformats.org/presentationml/2006/main">
-  <p:cSld>
-    <p:spTree>
-      <p:nvGrpSpPr>
-        <p:cNvPr id="1" name="Shape 444">
-          <a:extLst>
-            <a:ext uri="{FF2B5EF4-FFF2-40B4-BE49-F238E27FC236}">
-              <a16:creationId xmlns:a16="http://schemas.microsoft.com/office/drawing/2014/main" id="{A7C46DA7-78FD-6408-34B2-0DF18A62D8ED}"/>
-            </a:ext>
-          </a:extLst>
-        </p:cNvPr>
-        <p:cNvGrpSpPr/>
-        <p:nvPr/>
-      </p:nvGrpSpPr>
-      <p:grpSpPr>
-        <a:xfrm>
-          <a:off x="0" y="0"/>
-          <a:ext cx="0" cy="0"/>
-          <a:chOff x="0" y="0"/>
-          <a:chExt cx="0" cy="0"/>
-        </a:xfrm>
-      </p:grpSpPr>
-      <p:sp>
-        <p:nvSpPr>
-          <p:cNvPr id="3" name="Title 2">
+      <p:grpSp>
+        <p:nvGrpSpPr>
+          <p:cNvPr id="4" name="Google Shape;448;p42">
             <a:extLst>
               <a:ext uri="{FF2B5EF4-FFF2-40B4-BE49-F238E27FC236}">
-                <a16:creationId xmlns:a16="http://schemas.microsoft.com/office/drawing/2014/main" id="{6E99D350-BB3B-3CA5-D285-B8F1977E51F4}"/>
+                <a16:creationId xmlns:a16="http://schemas.microsoft.com/office/drawing/2014/main" id="{C85D75ED-C8D5-71D6-86F5-4CFFF18C3747}"/>
               </a:ext>
             </a:extLst>
           </p:cNvPr>
-          <p:cNvSpPr>
-            <a:spLocks noGrp="1"/>
-          </p:cNvSpPr>
-          <p:nvPr>
-            <p:ph type="title"/>
-          </p:nvPr>
-        </p:nvSpPr>
-        <p:spPr/>
-        <p:txBody>
-          <a:bodyPr>
-            <a:noAutofit/>
-          </a:bodyPr>
-          <a:lstStyle/>
-          <a:p>
-            <a:r>
-              <a:rPr lang="en-US" sz="2000" dirty="0"/>
-              <a:t>Confusion Matrices of Top 3 Models</a:t>
-            </a:r>
-          </a:p>
-        </p:txBody>
-      </p:sp>
+          <p:cNvGrpSpPr/>
+          <p:nvPr/>
+        </p:nvGrpSpPr>
+        <p:grpSpPr>
+          <a:xfrm>
+            <a:off x="31320" y="4656678"/>
+            <a:ext cx="410072" cy="410168"/>
+            <a:chOff x="3717325" y="2137000"/>
+            <a:chExt cx="1104178" cy="1104176"/>
+          </a:xfrm>
+        </p:grpSpPr>
+        <p:sp>
+          <p:nvSpPr>
+            <p:cNvPr id="5" name="Google Shape;449;p42">
+              <a:extLst>
+                <a:ext uri="{FF2B5EF4-FFF2-40B4-BE49-F238E27FC236}">
+                  <a16:creationId xmlns:a16="http://schemas.microsoft.com/office/drawing/2014/main" id="{C8D213FA-D982-4D3B-8039-9C5A77CFCE9C}"/>
+                </a:ext>
+              </a:extLst>
+            </p:cNvPr>
+            <p:cNvSpPr/>
+            <p:nvPr/>
+          </p:nvSpPr>
+          <p:spPr>
+            <a:xfrm>
+              <a:off x="3717325" y="2238576"/>
+              <a:ext cx="1002600" cy="1002600"/>
+            </a:xfrm>
+            <a:prstGeom prst="ellipse">
+              <a:avLst/>
+            </a:prstGeom>
+            <a:solidFill>
+              <a:schemeClr val="accent4"/>
+            </a:solidFill>
+            <a:ln>
+              <a:noFill/>
+            </a:ln>
+          </p:spPr>
+          <p:txBody>
+            <a:bodyPr spcFirstLastPara="1" wrap="square" lIns="91425" tIns="91425" rIns="91425" bIns="91425" anchor="ctr" anchorCtr="0">
+              <a:noAutofit/>
+            </a:bodyPr>
+            <a:lstStyle/>
+            <a:p>
+              <a:pPr marL="0" lvl="0" indent="0" algn="l" rtl="0">
+                <a:spcBef>
+                  <a:spcPts val="0"/>
+                </a:spcBef>
+                <a:spcAft>
+                  <a:spcPts val="0"/>
+                </a:spcAft>
+                <a:buNone/>
+              </a:pPr>
+              <a:endParaRPr/>
+            </a:p>
+          </p:txBody>
+        </p:sp>
+        <p:sp>
+          <p:nvSpPr>
+            <p:cNvPr id="7" name="Google Shape;450;p42">
+              <a:extLst>
+                <a:ext uri="{FF2B5EF4-FFF2-40B4-BE49-F238E27FC236}">
+                  <a16:creationId xmlns:a16="http://schemas.microsoft.com/office/drawing/2014/main" id="{98B6CF92-079B-76EB-3251-54D25610288C}"/>
+                </a:ext>
+              </a:extLst>
+            </p:cNvPr>
+            <p:cNvSpPr/>
+            <p:nvPr/>
+          </p:nvSpPr>
+          <p:spPr>
+            <a:xfrm>
+              <a:off x="3818903" y="2137000"/>
+              <a:ext cx="1002600" cy="1002600"/>
+            </a:xfrm>
+            <a:prstGeom prst="ellipse">
+              <a:avLst/>
+            </a:prstGeom>
+            <a:noFill/>
+            <a:ln w="19050" cap="flat" cmpd="sng">
+              <a:solidFill>
+                <a:schemeClr val="dk1"/>
+              </a:solidFill>
+              <a:prstDash val="solid"/>
+              <a:round/>
+              <a:headEnd type="none" w="sm" len="sm"/>
+              <a:tailEnd type="none" w="sm" len="sm"/>
+            </a:ln>
+          </p:spPr>
+          <p:txBody>
+            <a:bodyPr spcFirstLastPara="1" wrap="square" lIns="91425" tIns="91425" rIns="91425" bIns="91425" anchor="ctr" anchorCtr="0">
+              <a:noAutofit/>
+            </a:bodyPr>
+            <a:lstStyle/>
+            <a:p>
+              <a:pPr marL="0" lvl="0" indent="0" algn="l" rtl="0">
+                <a:spcBef>
+                  <a:spcPts val="0"/>
+                </a:spcBef>
+                <a:spcAft>
+                  <a:spcPts val="0"/>
+                </a:spcAft>
+                <a:buNone/>
+              </a:pPr>
+              <a:endParaRPr/>
+            </a:p>
+          </p:txBody>
+        </p:sp>
+      </p:grpSp>
+      <p:grpSp>
+        <p:nvGrpSpPr>
+          <p:cNvPr id="8" name="Google Shape;451;p42">
+            <a:extLst>
+              <a:ext uri="{FF2B5EF4-FFF2-40B4-BE49-F238E27FC236}">
+                <a16:creationId xmlns:a16="http://schemas.microsoft.com/office/drawing/2014/main" id="{6AE5E81E-B24B-7BC7-25C9-AB40904448B2}"/>
+              </a:ext>
+            </a:extLst>
+          </p:cNvPr>
+          <p:cNvGrpSpPr/>
+          <p:nvPr/>
+        </p:nvGrpSpPr>
+        <p:grpSpPr>
+          <a:xfrm rot="10800000">
+            <a:off x="8458800" y="4557312"/>
+            <a:ext cx="427586" cy="471802"/>
+            <a:chOff x="4185575" y="3320360"/>
+            <a:chExt cx="1104178" cy="1104176"/>
+          </a:xfrm>
+        </p:grpSpPr>
+        <p:sp>
+          <p:nvSpPr>
+            <p:cNvPr id="9" name="Google Shape;452;p42">
+              <a:extLst>
+                <a:ext uri="{FF2B5EF4-FFF2-40B4-BE49-F238E27FC236}">
+                  <a16:creationId xmlns:a16="http://schemas.microsoft.com/office/drawing/2014/main" id="{245F225A-E938-EC28-C97A-978A8FE22531}"/>
+                </a:ext>
+              </a:extLst>
+            </p:cNvPr>
+            <p:cNvSpPr/>
+            <p:nvPr/>
+          </p:nvSpPr>
+          <p:spPr>
+            <a:xfrm>
+              <a:off x="4185575" y="3421936"/>
+              <a:ext cx="1002600" cy="1002600"/>
+            </a:xfrm>
+            <a:prstGeom prst="ellipse">
+              <a:avLst/>
+            </a:prstGeom>
+            <a:solidFill>
+              <a:schemeClr val="accent1"/>
+            </a:solidFill>
+            <a:ln>
+              <a:noFill/>
+            </a:ln>
+          </p:spPr>
+          <p:txBody>
+            <a:bodyPr spcFirstLastPara="1" wrap="square" lIns="91425" tIns="91425" rIns="91425" bIns="91425" anchor="ctr" anchorCtr="0">
+              <a:noAutofit/>
+            </a:bodyPr>
+            <a:lstStyle/>
+            <a:p>
+              <a:pPr marL="0" lvl="0" indent="0" algn="l" rtl="0">
+                <a:spcBef>
+                  <a:spcPts val="0"/>
+                </a:spcBef>
+                <a:spcAft>
+                  <a:spcPts val="0"/>
+                </a:spcAft>
+                <a:buNone/>
+              </a:pPr>
+              <a:endParaRPr/>
+            </a:p>
+          </p:txBody>
+        </p:sp>
+        <p:sp>
+          <p:nvSpPr>
+            <p:cNvPr id="10" name="Google Shape;453;p42">
+              <a:extLst>
+                <a:ext uri="{FF2B5EF4-FFF2-40B4-BE49-F238E27FC236}">
+                  <a16:creationId xmlns:a16="http://schemas.microsoft.com/office/drawing/2014/main" id="{8CC64425-2DA5-39C1-9288-C55894EA039D}"/>
+                </a:ext>
+              </a:extLst>
+            </p:cNvPr>
+            <p:cNvSpPr/>
+            <p:nvPr/>
+          </p:nvSpPr>
+          <p:spPr>
+            <a:xfrm>
+              <a:off x="4287153" y="3320360"/>
+              <a:ext cx="1002600" cy="1002600"/>
+            </a:xfrm>
+            <a:prstGeom prst="ellipse">
+              <a:avLst/>
+            </a:prstGeom>
+            <a:noFill/>
+            <a:ln w="19050" cap="flat" cmpd="sng">
+              <a:solidFill>
+                <a:schemeClr val="dk1"/>
+              </a:solidFill>
+              <a:prstDash val="solid"/>
+              <a:round/>
+              <a:headEnd type="none" w="sm" len="sm"/>
+              <a:tailEnd type="none" w="sm" len="sm"/>
+            </a:ln>
+          </p:spPr>
+          <p:txBody>
+            <a:bodyPr spcFirstLastPara="1" wrap="square" lIns="91425" tIns="91425" rIns="91425" bIns="91425" anchor="ctr" anchorCtr="0">
+              <a:noAutofit/>
+            </a:bodyPr>
+            <a:lstStyle/>
+            <a:p>
+              <a:pPr marL="0" lvl="0" indent="0" algn="l" rtl="0">
+                <a:spcBef>
+                  <a:spcPts val="0"/>
+                </a:spcBef>
+                <a:spcAft>
+                  <a:spcPts val="0"/>
+                </a:spcAft>
+                <a:buNone/>
+              </a:pPr>
+              <a:endParaRPr/>
+            </a:p>
+          </p:txBody>
+        </p:sp>
+      </p:grpSp>
       <p:sp>
         <p:nvSpPr>
-          <p:cNvPr id="4" name="TextBox 3">
+          <p:cNvPr id="12" name="TextBox 11">
             <a:extLst>
               <a:ext uri="{FF2B5EF4-FFF2-40B4-BE49-F238E27FC236}">
-                <a16:creationId xmlns:a16="http://schemas.microsoft.com/office/drawing/2014/main" id="{77635EC7-2E34-396A-C103-BCF852AA9DD1}"/>
+                <a16:creationId xmlns:a16="http://schemas.microsoft.com/office/drawing/2014/main" id="{E4E41E38-90C1-9228-5B29-18377686B036}"/>
               </a:ext>
             </a:extLst>
           </p:cNvPr>
@@ -9546,8 +10620,8 @@
         </p:nvSpPr>
         <p:spPr>
           <a:xfrm>
-            <a:off x="631371" y="1143001"/>
-            <a:ext cx="6226629" cy="1815882"/>
+            <a:off x="1371600" y="3646448"/>
+            <a:ext cx="5553307" cy="1169551"/>
           </a:xfrm>
           <a:prstGeom prst="rect">
             <a:avLst/>
@@ -9561,12 +10635,8 @@
           <a:lstStyle/>
           <a:p>
             <a:r>
-              <a:rPr lang="en-US" dirty="0" err="1"/>
-              <a:t>XGBoost</a:t>
-            </a:r>
-            <a:r>
               <a:rPr lang="en-US" dirty="0"/>
-              <a:t> Optimized makes the most correct predictions (5,757)</a:t>
+              <a:t>		Predicted: No Churn    Predicted: Churn</a:t>
             </a:r>
           </a:p>
           <a:p>
@@ -9575,7 +10645,7 @@
           <a:p>
             <a:r>
               <a:rPr lang="en-US" dirty="0"/>
-              <a:t>Gradient Boosting misses the fewest churners (817)</a:t>
+              <a:t>Actual: No Churn      		  TN                    	FP</a:t>
             </a:r>
           </a:p>
           <a:p>
@@ -9584,16 +10654,7 @@
           <a:p>
             <a:r>
               <a:rPr lang="en-US" dirty="0"/>
-              <a:t>All models struggle with False Positives (~2,400-2,500)</a:t>
-            </a:r>
-          </a:p>
-          <a:p>
-            <a:endParaRPr lang="en-US" dirty="0"/>
-          </a:p>
-          <a:p>
-            <a:r>
-              <a:rPr lang="en-US" dirty="0"/>
-              <a:t>False Negatives are most costly, because the business loses customers that could have been saved.</a:t>
+              <a:t>Actual: Churn       		  FN                    	TP</a:t>
             </a:r>
           </a:p>
         </p:txBody>
@@ -9601,7 +10662,7 @@
     </p:spTree>
     <p:extLst>
       <p:ext uri="{BB962C8B-B14F-4D97-AF65-F5344CB8AC3E}">
-        <p14:creationId xmlns:p14="http://schemas.microsoft.com/office/powerpoint/2010/main" val="2026826386"/>
+        <p14:creationId xmlns:p14="http://schemas.microsoft.com/office/powerpoint/2010/main" val="1141351483"/>
       </p:ext>
     </p:extLst>
   </p:cSld>

--- a/Project_presentation.pptx
+++ b/Project_presentation.pptx
@@ -8887,7 +8887,11 @@
             <a:pPr lvl="0"/>
             <a:r>
               <a:rPr lang="en-US" sz="2000" dirty="0"/>
-              <a:t>The characteristics and behavioral outcome of the gym members </a:t>
+              <a:t>Customer profile and churn </a:t>
+            </a:r>
+            <a:r>
+              <a:rPr lang="en-US" sz="2000" dirty="0" err="1"/>
+              <a:t>behaviour</a:t>
             </a:r>
             <a:endParaRPr sz="2000" b="1" dirty="0">
               <a:latin typeface="Assistant"/>

--- a/Project_presentation.pptx
+++ b/Project_presentation.pptx
@@ -5,7 +5,7 @@
     <p:sldMasterId id="2147483667" r:id="rId1"/>
   </p:sldMasterIdLst>
   <p:notesMasterIdLst>
-    <p:notesMasterId r:id="rId16"/>
+    <p:notesMasterId r:id="rId17"/>
   </p:notesMasterIdLst>
   <p:sldIdLst>
     <p:sldId id="271" r:id="rId2"/>
@@ -17,19 +17,20 @@
     <p:sldId id="308" r:id="rId8"/>
     <p:sldId id="314" r:id="rId9"/>
     <p:sldId id="302" r:id="rId10"/>
-    <p:sldId id="311" r:id="rId11"/>
-    <p:sldId id="310" r:id="rId12"/>
+    <p:sldId id="310" r:id="rId11"/>
+    <p:sldId id="315" r:id="rId12"/>
     <p:sldId id="303" r:id="rId13"/>
-    <p:sldId id="278" r:id="rId14"/>
-    <p:sldId id="296" r:id="rId15"/>
+    <p:sldId id="317" r:id="rId14"/>
+    <p:sldId id="278" r:id="rId15"/>
+    <p:sldId id="296" r:id="rId16"/>
   </p:sldIdLst>
   <p:sldSz cx="9144000" cy="5143500" type="screen16x9"/>
   <p:notesSz cx="6858000" cy="9144000"/>
   <p:embeddedFontLst>
     <p:embeddedFont>
       <p:font typeface="Assistant" pitchFamily="2" charset="-79"/>
-      <p:regular r:id="rId17"/>
-      <p:bold r:id="rId18"/>
+      <p:regular r:id="rId18"/>
+      <p:bold r:id="rId19"/>
     </p:embeddedFont>
   </p:embeddedFontLst>
   <p:defaultTextStyle>
@@ -344,6 +345,13 @@
             <a:tailEnd type="none" w="sm" len="sm"/>
           </a:ln>
         </p:spPr>
+        <p:txBody>
+          <a:bodyPr/>
+          <a:lstStyle/>
+          <a:p>
+            <a:endParaRPr lang="en-US"/>
+          </a:p>
+        </p:txBody>
       </p:sp>
       <p:sp>
         <p:nvSpPr>
@@ -770,6 +778,13 @@
             </a:pathLst>
           </a:custGeom>
         </p:spPr>
+        <p:txBody>
+          <a:bodyPr/>
+          <a:lstStyle/>
+          <a:p>
+            <a:endParaRPr lang="en-US"/>
+          </a:p>
+        </p:txBody>
       </p:sp>
       <p:sp>
         <p:nvSpPr>
@@ -886,6 +901,13 @@
             </a:pathLst>
           </a:custGeom>
         </p:spPr>
+        <p:txBody>
+          <a:bodyPr/>
+          <a:lstStyle/>
+          <a:p>
+            <a:endParaRPr lang="en-US"/>
+          </a:p>
+        </p:txBody>
       </p:sp>
       <p:sp>
         <p:nvSpPr>
@@ -1001,6 +1023,13 @@
             </a:pathLst>
           </a:custGeom>
         </p:spPr>
+        <p:txBody>
+          <a:bodyPr/>
+          <a:lstStyle/>
+          <a:p>
+            <a:endParaRPr lang="en-US"/>
+          </a:p>
+        </p:txBody>
       </p:sp>
       <p:sp>
         <p:nvSpPr>
@@ -1105,6 +1134,13 @@
             </a:pathLst>
           </a:custGeom>
         </p:spPr>
+        <p:txBody>
+          <a:bodyPr/>
+          <a:lstStyle/>
+          <a:p>
+            <a:endParaRPr lang="en-US"/>
+          </a:p>
+        </p:txBody>
       </p:sp>
       <p:sp>
         <p:nvSpPr>
@@ -1221,6 +1257,13 @@
             </a:pathLst>
           </a:custGeom>
         </p:spPr>
+        <p:txBody>
+          <a:bodyPr/>
+          <a:lstStyle/>
+          <a:p>
+            <a:endParaRPr lang="en-US"/>
+          </a:p>
+        </p:txBody>
       </p:sp>
       <p:sp>
         <p:nvSpPr>
@@ -1336,6 +1379,13 @@
             </a:pathLst>
           </a:custGeom>
         </p:spPr>
+        <p:txBody>
+          <a:bodyPr/>
+          <a:lstStyle/>
+          <a:p>
+            <a:endParaRPr lang="en-US"/>
+          </a:p>
+        </p:txBody>
       </p:sp>
       <p:sp>
         <p:nvSpPr>
@@ -1452,6 +1502,13 @@
             </a:pathLst>
           </a:custGeom>
         </p:spPr>
+        <p:txBody>
+          <a:bodyPr/>
+          <a:lstStyle/>
+          <a:p>
+            <a:endParaRPr lang="en-US"/>
+          </a:p>
+        </p:txBody>
       </p:sp>
       <p:sp>
         <p:nvSpPr>
@@ -1579,6 +1636,13 @@
             </a:pathLst>
           </a:custGeom>
         </p:spPr>
+        <p:txBody>
+          <a:bodyPr/>
+          <a:lstStyle/>
+          <a:p>
+            <a:endParaRPr lang="en-US"/>
+          </a:p>
+        </p:txBody>
       </p:sp>
       <p:sp>
         <p:nvSpPr>
@@ -1706,6 +1770,13 @@
             </a:pathLst>
           </a:custGeom>
         </p:spPr>
+        <p:txBody>
+          <a:bodyPr/>
+          <a:lstStyle/>
+          <a:p>
+            <a:endParaRPr lang="en-US"/>
+          </a:p>
+        </p:txBody>
       </p:sp>
       <p:sp>
         <p:nvSpPr>
@@ -1833,6 +1904,13 @@
             </a:pathLst>
           </a:custGeom>
         </p:spPr>
+        <p:txBody>
+          <a:bodyPr/>
+          <a:lstStyle/>
+          <a:p>
+            <a:endParaRPr lang="en-US"/>
+          </a:p>
+        </p:txBody>
       </p:sp>
       <p:sp>
         <p:nvSpPr>
@@ -1892,133 +1970,6 @@
 </file>
 
 <file path=ppt/notesSlides/notesSlide8.xml><?xml version="1.0" encoding="utf-8"?>
-<p:notes xmlns:a="http://schemas.openxmlformats.org/drawingml/2006/main" xmlns:r="http://schemas.openxmlformats.org/officeDocument/2006/relationships" xmlns:p="http://schemas.openxmlformats.org/presentationml/2006/main" showMasterSp="0" showMasterPhAnim="0">
-  <p:cSld>
-    <p:spTree>
-      <p:nvGrpSpPr>
-        <p:cNvPr id="1" name="Shape 441">
-          <a:extLst>
-            <a:ext uri="{FF2B5EF4-FFF2-40B4-BE49-F238E27FC236}">
-              <a16:creationId xmlns:a16="http://schemas.microsoft.com/office/drawing/2014/main" id="{1DC65EF7-451A-79D6-1361-D903A016D4A0}"/>
-            </a:ext>
-          </a:extLst>
-        </p:cNvPr>
-        <p:cNvGrpSpPr/>
-        <p:nvPr/>
-      </p:nvGrpSpPr>
-      <p:grpSpPr>
-        <a:xfrm>
-          <a:off x="0" y="0"/>
-          <a:ext cx="0" cy="0"/>
-          <a:chOff x="0" y="0"/>
-          <a:chExt cx="0" cy="0"/>
-        </a:xfrm>
-      </p:grpSpPr>
-      <p:sp>
-        <p:nvSpPr>
-          <p:cNvPr id="442" name="Google Shape;442;gaf83f1124d_0_42:notes">
-            <a:extLst>
-              <a:ext uri="{FF2B5EF4-FFF2-40B4-BE49-F238E27FC236}">
-                <a16:creationId xmlns:a16="http://schemas.microsoft.com/office/drawing/2014/main" id="{3FB6211C-FBF3-2CC3-1AF4-45BE9EE1491C}"/>
-              </a:ext>
-            </a:extLst>
-          </p:cNvPr>
-          <p:cNvSpPr>
-            <a:spLocks noGrp="1" noRot="1" noChangeAspect="1"/>
-          </p:cNvSpPr>
-          <p:nvPr>
-            <p:ph type="sldImg" idx="2"/>
-          </p:nvPr>
-        </p:nvSpPr>
-        <p:spPr>
-          <a:xfrm>
-            <a:off x="381000" y="685800"/>
-            <a:ext cx="6096000" cy="3429000"/>
-          </a:xfrm>
-          <a:custGeom>
-            <a:avLst/>
-            <a:gdLst/>
-            <a:ahLst/>
-            <a:cxnLst/>
-            <a:rect l="l" t="t" r="r" b="b"/>
-            <a:pathLst>
-              <a:path w="120000" h="120000" extrusionOk="0">
-                <a:moveTo>
-                  <a:pt x="0" y="0"/>
-                </a:moveTo>
-                <a:lnTo>
-                  <a:pt x="120000" y="0"/>
-                </a:lnTo>
-                <a:lnTo>
-                  <a:pt x="120000" y="120000"/>
-                </a:lnTo>
-                <a:lnTo>
-                  <a:pt x="0" y="120000"/>
-                </a:lnTo>
-                <a:close/>
-              </a:path>
-            </a:pathLst>
-          </a:custGeom>
-        </p:spPr>
-      </p:sp>
-      <p:sp>
-        <p:nvSpPr>
-          <p:cNvPr id="443" name="Google Shape;443;gaf83f1124d_0_42:notes">
-            <a:extLst>
-              <a:ext uri="{FF2B5EF4-FFF2-40B4-BE49-F238E27FC236}">
-                <a16:creationId xmlns:a16="http://schemas.microsoft.com/office/drawing/2014/main" id="{6B3901D1-C1DB-38C3-DE86-B0E148394117}"/>
-              </a:ext>
-            </a:extLst>
-          </p:cNvPr>
-          <p:cNvSpPr txBox="1">
-            <a:spLocks noGrp="1"/>
-          </p:cNvSpPr>
-          <p:nvPr>
-            <p:ph type="body" idx="1"/>
-          </p:nvPr>
-        </p:nvSpPr>
-        <p:spPr>
-          <a:xfrm>
-            <a:off x="685800" y="4343400"/>
-            <a:ext cx="5486400" cy="4114800"/>
-          </a:xfrm>
-          <a:prstGeom prst="rect">
-            <a:avLst/>
-          </a:prstGeom>
-        </p:spPr>
-        <p:txBody>
-          <a:bodyPr spcFirstLastPara="1" wrap="square" lIns="91425" tIns="91425" rIns="91425" bIns="91425" anchor="t" anchorCtr="0">
-            <a:noAutofit/>
-          </a:bodyPr>
-          <a:lstStyle/>
-          <a:p>
-            <a:pPr marL="0" lvl="0" indent="0" algn="l" rtl="0">
-              <a:spcBef>
-                <a:spcPts val="0"/>
-              </a:spcBef>
-              <a:spcAft>
-                <a:spcPts val="0"/>
-              </a:spcAft>
-              <a:buNone/>
-            </a:pPr>
-            <a:endParaRPr/>
-          </a:p>
-        </p:txBody>
-      </p:sp>
-    </p:spTree>
-    <p:extLst>
-      <p:ext uri="{BB962C8B-B14F-4D97-AF65-F5344CB8AC3E}">
-        <p14:creationId xmlns:p14="http://schemas.microsoft.com/office/powerpoint/2010/main" val="3504596559"/>
-      </p:ext>
-    </p:extLst>
-  </p:cSld>
-  <p:clrMapOvr>
-    <a:masterClrMapping/>
-  </p:clrMapOvr>
-</p:notes>
-</file>
-
-<file path=ppt/notesSlides/notesSlide9.xml><?xml version="1.0" encoding="utf-8"?>
 <p:notes xmlns:a="http://schemas.openxmlformats.org/drawingml/2006/main" xmlns:r="http://schemas.openxmlformats.org/officeDocument/2006/relationships" xmlns:p="http://schemas.openxmlformats.org/presentationml/2006/main" showMasterSp="0" showMasterPhAnim="0">
   <p:cSld>
     <p:spTree>
@@ -2087,6 +2038,13 @@
             </a:pathLst>
           </a:custGeom>
         </p:spPr>
+        <p:txBody>
+          <a:bodyPr/>
+          <a:lstStyle/>
+          <a:p>
+            <a:endParaRPr lang="en-US"/>
+          </a:p>
+        </p:txBody>
       </p:sp>
       <p:sp>
         <p:nvSpPr>
@@ -2136,6 +2094,79 @@
     <p:extLst>
       <p:ext uri="{BB962C8B-B14F-4D97-AF65-F5344CB8AC3E}">
         <p14:creationId xmlns:p14="http://schemas.microsoft.com/office/powerpoint/2010/main" val="3692360795"/>
+      </p:ext>
+    </p:extLst>
+  </p:cSld>
+  <p:clrMapOvr>
+    <a:masterClrMapping/>
+  </p:clrMapOvr>
+</p:notes>
+</file>
+
+<file path=ppt/notesSlides/notesSlide9.xml><?xml version="1.0" encoding="utf-8"?>
+<p:notes xmlns:a="http://schemas.openxmlformats.org/drawingml/2006/main" xmlns:r="http://schemas.openxmlformats.org/officeDocument/2006/relationships" xmlns:p="http://schemas.openxmlformats.org/presentationml/2006/main">
+  <p:cSld>
+    <p:spTree>
+      <p:nvGrpSpPr>
+        <p:cNvPr id="1" name=""/>
+        <p:cNvGrpSpPr/>
+        <p:nvPr/>
+      </p:nvGrpSpPr>
+      <p:grpSpPr>
+        <a:xfrm>
+          <a:off x="0" y="0"/>
+          <a:ext cx="0" cy="0"/>
+          <a:chOff x="0" y="0"/>
+          <a:chExt cx="0" cy="0"/>
+        </a:xfrm>
+      </p:grpSpPr>
+      <p:sp>
+        <p:nvSpPr>
+          <p:cNvPr id="2" name="Slide Image Placeholder 1"/>
+          <p:cNvSpPr>
+            <a:spLocks noGrp="1" noRot="1" noChangeAspect="1"/>
+          </p:cNvSpPr>
+          <p:nvPr>
+            <p:ph type="sldImg"/>
+          </p:nvPr>
+        </p:nvSpPr>
+        <p:spPr>
+          <a:xfrm>
+            <a:off x="381000" y="685800"/>
+            <a:ext cx="6096000" cy="3429000"/>
+          </a:xfrm>
+        </p:spPr>
+        <p:txBody>
+          <a:bodyPr/>
+          <a:lstStyle/>
+          <a:p>
+            <a:endParaRPr lang="en-US"/>
+          </a:p>
+        </p:txBody>
+      </p:sp>
+      <p:sp>
+        <p:nvSpPr>
+          <p:cNvPr id="3" name="Notes Placeholder 2"/>
+          <p:cNvSpPr>
+            <a:spLocks noGrp="1"/>
+          </p:cNvSpPr>
+          <p:nvPr>
+            <p:ph type="body" idx="1"/>
+          </p:nvPr>
+        </p:nvSpPr>
+        <p:spPr/>
+        <p:txBody>
+          <a:bodyPr/>
+          <a:lstStyle/>
+          <a:p>
+            <a:endParaRPr lang="en-US" dirty="0"/>
+          </a:p>
+        </p:txBody>
+      </p:sp>
+    </p:spTree>
+    <p:extLst>
+      <p:ext uri="{BB962C8B-B14F-4D97-AF65-F5344CB8AC3E}">
+        <p14:creationId xmlns:p14="http://schemas.microsoft.com/office/powerpoint/2010/main" val="438929749"/>
       </p:ext>
     </p:extLst>
   </p:cSld>
@@ -3000,6 +3031,13 @@
             <a:noFill/>
           </a:ln>
         </p:spPr>
+        <p:txBody>
+          <a:bodyPr/>
+          <a:lstStyle/>
+          <a:p>
+            <a:endParaRPr lang="en-US"/>
+          </a:p>
+        </p:txBody>
       </p:sp>
       <p:sp>
         <p:nvSpPr>
@@ -3102,6 +3140,13 @@
             <a:noFill/>
           </a:ln>
         </p:spPr>
+        <p:txBody>
+          <a:bodyPr/>
+          <a:lstStyle/>
+          <a:p>
+            <a:endParaRPr lang="en-US"/>
+          </a:p>
+        </p:txBody>
       </p:sp>
     </p:spTree>
   </p:cSld>
@@ -5611,376 +5656,6 @@
   <p:cSld>
     <p:spTree>
       <p:nvGrpSpPr>
-        <p:cNvPr id="1" name="Shape 444">
-          <a:extLst>
-            <a:ext uri="{FF2B5EF4-FFF2-40B4-BE49-F238E27FC236}">
-              <a16:creationId xmlns:a16="http://schemas.microsoft.com/office/drawing/2014/main" id="{A7C46DA7-78FD-6408-34B2-0DF18A62D8ED}"/>
-            </a:ext>
-          </a:extLst>
-        </p:cNvPr>
-        <p:cNvGrpSpPr/>
-        <p:nvPr/>
-      </p:nvGrpSpPr>
-      <p:grpSpPr>
-        <a:xfrm>
-          <a:off x="0" y="0"/>
-          <a:ext cx="0" cy="0"/>
-          <a:chOff x="0" y="0"/>
-          <a:chExt cx="0" cy="0"/>
-        </a:xfrm>
-      </p:grpSpPr>
-      <p:sp>
-        <p:nvSpPr>
-          <p:cNvPr id="3" name="Title 2">
-            <a:extLst>
-              <a:ext uri="{FF2B5EF4-FFF2-40B4-BE49-F238E27FC236}">
-                <a16:creationId xmlns:a16="http://schemas.microsoft.com/office/drawing/2014/main" id="{6E99D350-BB3B-3CA5-D285-B8F1977E51F4}"/>
-              </a:ext>
-            </a:extLst>
-          </p:cNvPr>
-          <p:cNvSpPr>
-            <a:spLocks noGrp="1"/>
-          </p:cNvSpPr>
-          <p:nvPr>
-            <p:ph type="title"/>
-          </p:nvPr>
-        </p:nvSpPr>
-        <p:spPr/>
-        <p:txBody>
-          <a:bodyPr>
-            <a:noAutofit/>
-          </a:bodyPr>
-          <a:lstStyle/>
-          <a:p>
-            <a:r>
-              <a:rPr lang="en-US" sz="2000" dirty="0"/>
-              <a:t>Confusion Matrices of Top 3 Models</a:t>
-            </a:r>
-          </a:p>
-        </p:txBody>
-      </p:sp>
-      <p:sp>
-        <p:nvSpPr>
-          <p:cNvPr id="4" name="TextBox 3">
-            <a:extLst>
-              <a:ext uri="{FF2B5EF4-FFF2-40B4-BE49-F238E27FC236}">
-                <a16:creationId xmlns:a16="http://schemas.microsoft.com/office/drawing/2014/main" id="{77635EC7-2E34-396A-C103-BCF852AA9DD1}"/>
-              </a:ext>
-            </a:extLst>
-          </p:cNvPr>
-          <p:cNvSpPr txBox="1"/>
-          <p:nvPr/>
-        </p:nvSpPr>
-        <p:spPr>
-          <a:xfrm>
-            <a:off x="631371" y="1143001"/>
-            <a:ext cx="6226629" cy="1815882"/>
-          </a:xfrm>
-          <a:prstGeom prst="rect">
-            <a:avLst/>
-          </a:prstGeom>
-          <a:noFill/>
-        </p:spPr>
-        <p:txBody>
-          <a:bodyPr wrap="square">
-            <a:spAutoFit/>
-          </a:bodyPr>
-          <a:lstStyle/>
-          <a:p>
-            <a:r>
-              <a:rPr lang="en-US" dirty="0" err="1"/>
-              <a:t>XGBoost</a:t>
-            </a:r>
-            <a:r>
-              <a:rPr lang="en-US" dirty="0"/>
-              <a:t> Optimized makes the most correct predictions (5,757)</a:t>
-            </a:r>
-          </a:p>
-          <a:p>
-            <a:endParaRPr lang="en-US" dirty="0"/>
-          </a:p>
-          <a:p>
-            <a:r>
-              <a:rPr lang="en-US" dirty="0"/>
-              <a:t>Gradient Boosting misses the fewest churners (817)</a:t>
-            </a:r>
-          </a:p>
-          <a:p>
-            <a:endParaRPr lang="en-US" dirty="0"/>
-          </a:p>
-          <a:p>
-            <a:r>
-              <a:rPr lang="en-US" dirty="0"/>
-              <a:t>All models struggle with False Positives (~2,400-2,500)</a:t>
-            </a:r>
-          </a:p>
-          <a:p>
-            <a:endParaRPr lang="en-US" dirty="0"/>
-          </a:p>
-          <a:p>
-            <a:r>
-              <a:rPr lang="en-US" dirty="0"/>
-              <a:t>False Negatives are most costly, because the business loses customers that could have been saved.</a:t>
-            </a:r>
-          </a:p>
-        </p:txBody>
-      </p:sp>
-      <p:grpSp>
-        <p:nvGrpSpPr>
-          <p:cNvPr id="2" name="Google Shape;451;p42">
-            <a:extLst>
-              <a:ext uri="{FF2B5EF4-FFF2-40B4-BE49-F238E27FC236}">
-                <a16:creationId xmlns:a16="http://schemas.microsoft.com/office/drawing/2014/main" id="{D176D2F1-EEA0-6034-89BF-F7B7CC757C8D}"/>
-              </a:ext>
-            </a:extLst>
-          </p:cNvPr>
-          <p:cNvGrpSpPr/>
-          <p:nvPr/>
-        </p:nvGrpSpPr>
-        <p:grpSpPr>
-          <a:xfrm rot="10800000">
-            <a:off x="203785" y="4564699"/>
-            <a:ext cx="427586" cy="471802"/>
-            <a:chOff x="4185575" y="3320360"/>
-            <a:chExt cx="1104178" cy="1104176"/>
-          </a:xfrm>
-        </p:grpSpPr>
-        <p:sp>
-          <p:nvSpPr>
-            <p:cNvPr id="5" name="Google Shape;452;p42">
-              <a:extLst>
-                <a:ext uri="{FF2B5EF4-FFF2-40B4-BE49-F238E27FC236}">
-                  <a16:creationId xmlns:a16="http://schemas.microsoft.com/office/drawing/2014/main" id="{5AD37647-041B-FB21-C2D2-EC24F7EC9FCD}"/>
-                </a:ext>
-              </a:extLst>
-            </p:cNvPr>
-            <p:cNvSpPr/>
-            <p:nvPr/>
-          </p:nvSpPr>
-          <p:spPr>
-            <a:xfrm>
-              <a:off x="4185575" y="3421936"/>
-              <a:ext cx="1002600" cy="1002600"/>
-            </a:xfrm>
-            <a:prstGeom prst="ellipse">
-              <a:avLst/>
-            </a:prstGeom>
-            <a:solidFill>
-              <a:schemeClr val="accent1"/>
-            </a:solidFill>
-            <a:ln>
-              <a:noFill/>
-            </a:ln>
-          </p:spPr>
-          <p:txBody>
-            <a:bodyPr spcFirstLastPara="1" wrap="square" lIns="91425" tIns="91425" rIns="91425" bIns="91425" anchor="ctr" anchorCtr="0">
-              <a:noAutofit/>
-            </a:bodyPr>
-            <a:lstStyle/>
-            <a:p>
-              <a:pPr marL="0" lvl="0" indent="0" algn="l" rtl="0">
-                <a:spcBef>
-                  <a:spcPts val="0"/>
-                </a:spcBef>
-                <a:spcAft>
-                  <a:spcPts val="0"/>
-                </a:spcAft>
-                <a:buNone/>
-              </a:pPr>
-              <a:endParaRPr/>
-            </a:p>
-          </p:txBody>
-        </p:sp>
-        <p:sp>
-          <p:nvSpPr>
-            <p:cNvPr id="6" name="Google Shape;453;p42">
-              <a:extLst>
-                <a:ext uri="{FF2B5EF4-FFF2-40B4-BE49-F238E27FC236}">
-                  <a16:creationId xmlns:a16="http://schemas.microsoft.com/office/drawing/2014/main" id="{FBE4F53B-76A7-FB67-268F-40EAB1BF5A25}"/>
-                </a:ext>
-              </a:extLst>
-            </p:cNvPr>
-            <p:cNvSpPr/>
-            <p:nvPr/>
-          </p:nvSpPr>
-          <p:spPr>
-            <a:xfrm>
-              <a:off x="4287153" y="3320360"/>
-              <a:ext cx="1002600" cy="1002600"/>
-            </a:xfrm>
-            <a:prstGeom prst="ellipse">
-              <a:avLst/>
-            </a:prstGeom>
-            <a:noFill/>
-            <a:ln w="19050" cap="flat" cmpd="sng">
-              <a:solidFill>
-                <a:schemeClr val="dk1"/>
-              </a:solidFill>
-              <a:prstDash val="solid"/>
-              <a:round/>
-              <a:headEnd type="none" w="sm" len="sm"/>
-              <a:tailEnd type="none" w="sm" len="sm"/>
-            </a:ln>
-          </p:spPr>
-          <p:txBody>
-            <a:bodyPr spcFirstLastPara="1" wrap="square" lIns="91425" tIns="91425" rIns="91425" bIns="91425" anchor="ctr" anchorCtr="0">
-              <a:noAutofit/>
-            </a:bodyPr>
-            <a:lstStyle/>
-            <a:p>
-              <a:pPr marL="0" lvl="0" indent="0" algn="l" rtl="0">
-                <a:spcBef>
-                  <a:spcPts val="0"/>
-                </a:spcBef>
-                <a:spcAft>
-                  <a:spcPts val="0"/>
-                </a:spcAft>
-                <a:buNone/>
-              </a:pPr>
-              <a:endParaRPr/>
-            </a:p>
-          </p:txBody>
-        </p:sp>
-      </p:grpSp>
-      <p:grpSp>
-        <p:nvGrpSpPr>
-          <p:cNvPr id="7" name="Google Shape;438;p41">
-            <a:extLst>
-              <a:ext uri="{FF2B5EF4-FFF2-40B4-BE49-F238E27FC236}">
-                <a16:creationId xmlns:a16="http://schemas.microsoft.com/office/drawing/2014/main" id="{EBAE6D97-CB67-AC58-1030-54045E9A926A}"/>
-              </a:ext>
-            </a:extLst>
-          </p:cNvPr>
-          <p:cNvGrpSpPr/>
-          <p:nvPr/>
-        </p:nvGrpSpPr>
-        <p:grpSpPr>
-          <a:xfrm rot="8100353">
-            <a:off x="8588324" y="4388227"/>
-            <a:ext cx="474828" cy="511970"/>
-            <a:chOff x="673800" y="3053202"/>
-            <a:chExt cx="948075" cy="873823"/>
-          </a:xfrm>
-        </p:grpSpPr>
-        <p:sp>
-          <p:nvSpPr>
-            <p:cNvPr id="8" name="Google Shape;439;p41">
-              <a:extLst>
-                <a:ext uri="{FF2B5EF4-FFF2-40B4-BE49-F238E27FC236}">
-                  <a16:creationId xmlns:a16="http://schemas.microsoft.com/office/drawing/2014/main" id="{5B1ED891-7350-CC21-C33E-0C61425EF92A}"/>
-                </a:ext>
-              </a:extLst>
-            </p:cNvPr>
-            <p:cNvSpPr/>
-            <p:nvPr/>
-          </p:nvSpPr>
-          <p:spPr>
-            <a:xfrm>
-              <a:off x="706575" y="3053202"/>
-              <a:ext cx="915300" cy="791701"/>
-            </a:xfrm>
-            <a:prstGeom prst="triangle">
-              <a:avLst>
-                <a:gd name="adj" fmla="val 50000"/>
-              </a:avLst>
-            </a:prstGeom>
-            <a:solidFill>
-              <a:schemeClr val="accent1"/>
-            </a:solidFill>
-            <a:ln>
-              <a:noFill/>
-            </a:ln>
-          </p:spPr>
-          <p:txBody>
-            <a:bodyPr spcFirstLastPara="1" wrap="square" lIns="91425" tIns="91425" rIns="91425" bIns="91425" anchor="ctr" anchorCtr="0">
-              <a:noAutofit/>
-            </a:bodyPr>
-            <a:lstStyle/>
-            <a:p>
-              <a:pPr marL="0" lvl="0" indent="0" algn="l" rtl="0">
-                <a:spcBef>
-                  <a:spcPts val="0"/>
-                </a:spcBef>
-                <a:spcAft>
-                  <a:spcPts val="0"/>
-                </a:spcAft>
-                <a:buNone/>
-              </a:pPr>
-              <a:endParaRPr dirty="0"/>
-            </a:p>
-          </p:txBody>
-        </p:sp>
-        <p:sp>
-          <p:nvSpPr>
-            <p:cNvPr id="9" name="Google Shape;440;p41">
-              <a:extLst>
-                <a:ext uri="{FF2B5EF4-FFF2-40B4-BE49-F238E27FC236}">
-                  <a16:creationId xmlns:a16="http://schemas.microsoft.com/office/drawing/2014/main" id="{6846E118-5BCE-C352-E1ED-E834B165A878}"/>
-                </a:ext>
-              </a:extLst>
-            </p:cNvPr>
-            <p:cNvSpPr/>
-            <p:nvPr/>
-          </p:nvSpPr>
-          <p:spPr>
-            <a:xfrm>
-              <a:off x="673800" y="3135325"/>
-              <a:ext cx="915300" cy="791700"/>
-            </a:xfrm>
-            <a:prstGeom prst="triangle">
-              <a:avLst>
-                <a:gd name="adj" fmla="val 50000"/>
-              </a:avLst>
-            </a:prstGeom>
-            <a:noFill/>
-            <a:ln w="19050" cap="flat" cmpd="sng">
-              <a:solidFill>
-                <a:schemeClr val="dk1"/>
-              </a:solidFill>
-              <a:prstDash val="solid"/>
-              <a:round/>
-              <a:headEnd type="none" w="sm" len="sm"/>
-              <a:tailEnd type="none" w="sm" len="sm"/>
-            </a:ln>
-          </p:spPr>
-          <p:txBody>
-            <a:bodyPr spcFirstLastPara="1" wrap="square" lIns="91425" tIns="91425" rIns="91425" bIns="91425" anchor="ctr" anchorCtr="0">
-              <a:noAutofit/>
-            </a:bodyPr>
-            <a:lstStyle/>
-            <a:p>
-              <a:pPr marL="0" lvl="0" indent="0" algn="l" rtl="0">
-                <a:spcBef>
-                  <a:spcPts val="0"/>
-                </a:spcBef>
-                <a:spcAft>
-                  <a:spcPts val="0"/>
-                </a:spcAft>
-                <a:buNone/>
-              </a:pPr>
-              <a:endParaRPr/>
-            </a:p>
-          </p:txBody>
-        </p:sp>
-      </p:grpSp>
-    </p:spTree>
-    <p:extLst>
-      <p:ext uri="{BB962C8B-B14F-4D97-AF65-F5344CB8AC3E}">
-        <p14:creationId xmlns:p14="http://schemas.microsoft.com/office/powerpoint/2010/main" val="2026826386"/>
-      </p:ext>
-    </p:extLst>
-  </p:cSld>
-  <p:clrMapOvr>
-    <a:masterClrMapping/>
-  </p:clrMapOvr>
-</p:sld>
-</file>
-
-<file path=ppt/slides/slide11.xml><?xml version="1.0" encoding="utf-8"?>
-<p:sld xmlns:a="http://schemas.openxmlformats.org/drawingml/2006/main" xmlns:r="http://schemas.openxmlformats.org/officeDocument/2006/relationships" xmlns:p="http://schemas.openxmlformats.org/presentationml/2006/main">
-  <p:cSld>
-    <p:spTree>
-      <p:nvGrpSpPr>
         <p:cNvPr id="1" name="Shape 431">
           <a:extLst>
             <a:ext uri="{FF2B5EF4-FFF2-40B4-BE49-F238E27FC236}">
@@ -6237,6 +5912,155 @@
 </p:sld>
 </file>
 
+<file path=ppt/slides/slide11.xml><?xml version="1.0" encoding="utf-8"?>
+<p:sld xmlns:a="http://schemas.openxmlformats.org/drawingml/2006/main" xmlns:r="http://schemas.openxmlformats.org/officeDocument/2006/relationships" xmlns:p="http://schemas.openxmlformats.org/presentationml/2006/main">
+  <p:cSld>
+    <p:spTree>
+      <p:nvGrpSpPr>
+        <p:cNvPr id="1" name=""/>
+        <p:cNvGrpSpPr/>
+        <p:nvPr/>
+      </p:nvGrpSpPr>
+      <p:grpSpPr>
+        <a:xfrm>
+          <a:off x="0" y="0"/>
+          <a:ext cx="0" cy="0"/>
+          <a:chOff x="0" y="0"/>
+          <a:chExt cx="0" cy="0"/>
+        </a:xfrm>
+      </p:grpSpPr>
+      <p:sp>
+        <p:nvSpPr>
+          <p:cNvPr id="4" name="Slide Number Placeholder 3">
+            <a:extLst>
+              <a:ext uri="{FF2B5EF4-FFF2-40B4-BE49-F238E27FC236}">
+                <a16:creationId xmlns:a16="http://schemas.microsoft.com/office/drawing/2014/main" id="{9DA09F7C-6039-631A-D55F-C0ECFB800174}"/>
+              </a:ext>
+            </a:extLst>
+          </p:cNvPr>
+          <p:cNvSpPr>
+            <a:spLocks noGrp="1"/>
+          </p:cNvSpPr>
+          <p:nvPr>
+            <p:ph type="sldNum" idx="12"/>
+          </p:nvPr>
+        </p:nvSpPr>
+        <p:spPr/>
+        <p:txBody>
+          <a:bodyPr>
+            <a:normAutofit fontScale="92500" lnSpcReduction="20000"/>
+          </a:bodyPr>
+          <a:lstStyle/>
+          <a:p>
+            <a:pPr marL="0" lvl="0" indent="0" algn="r" rtl="0">
+              <a:spcBef>
+                <a:spcPts val="0"/>
+              </a:spcBef>
+              <a:spcAft>
+                <a:spcPts val="0"/>
+              </a:spcAft>
+              <a:buNone/>
+            </a:pPr>
+            <a:fld id="{00000000-1234-1234-1234-123412341234}" type="slidenum">
+              <a:rPr lang="en" smtClean="0"/>
+              <a:t>11</a:t>
+            </a:fld>
+            <a:endParaRPr lang="en"/>
+          </a:p>
+        </p:txBody>
+      </p:sp>
+      <p:pic>
+        <p:nvPicPr>
+          <p:cNvPr id="7" name="Picture 6">
+            <a:extLst>
+              <a:ext uri="{FF2B5EF4-FFF2-40B4-BE49-F238E27FC236}">
+                <a16:creationId xmlns:a16="http://schemas.microsoft.com/office/drawing/2014/main" id="{A777F260-FD4E-11E8-AEA2-A38EFAAB98F7}"/>
+              </a:ext>
+            </a:extLst>
+          </p:cNvPr>
+          <p:cNvPicPr>
+            <a:picLocks noChangeAspect="1"/>
+          </p:cNvPicPr>
+          <p:nvPr/>
+        </p:nvPicPr>
+        <p:blipFill>
+          <a:blip r:embed="rId3"/>
+          <a:stretch>
+            <a:fillRect/>
+          </a:stretch>
+        </p:blipFill>
+        <p:spPr>
+          <a:xfrm>
+            <a:off x="2164465" y="887471"/>
+            <a:ext cx="3819647" cy="4149401"/>
+          </a:xfrm>
+          <a:prstGeom prst="rect">
+            <a:avLst/>
+          </a:prstGeom>
+        </p:spPr>
+      </p:pic>
+      <p:sp>
+        <p:nvSpPr>
+          <p:cNvPr id="10" name="TextBox 9">
+            <a:extLst>
+              <a:ext uri="{FF2B5EF4-FFF2-40B4-BE49-F238E27FC236}">
+                <a16:creationId xmlns:a16="http://schemas.microsoft.com/office/drawing/2014/main" id="{BFB26DE6-9779-0DC5-D87D-4857CC273440}"/>
+              </a:ext>
+            </a:extLst>
+          </p:cNvPr>
+          <p:cNvSpPr txBox="1"/>
+          <p:nvPr/>
+        </p:nvSpPr>
+        <p:spPr>
+          <a:xfrm>
+            <a:off x="1504709" y="231494"/>
+            <a:ext cx="5880136" cy="400110"/>
+          </a:xfrm>
+          <a:prstGeom prst="rect">
+            <a:avLst/>
+          </a:prstGeom>
+          <a:noFill/>
+        </p:spPr>
+        <p:txBody>
+          <a:bodyPr wrap="none" rtlCol="0">
+            <a:spAutoFit/>
+          </a:bodyPr>
+          <a:lstStyle/>
+          <a:p>
+            <a:r>
+              <a:rPr lang="en-US" sz="2000" dirty="0">
+                <a:latin typeface=""/>
+              </a:rPr>
+              <a:t>SHAP Feature Importance for </a:t>
+            </a:r>
+            <a:r>
+              <a:rPr lang="en-US" sz="2000" dirty="0" err="1">
+                <a:latin typeface=""/>
+              </a:rPr>
+              <a:t>XGBoost</a:t>
+            </a:r>
+            <a:r>
+              <a:rPr lang="en-US" sz="2000" dirty="0">
+                <a:latin typeface=""/>
+              </a:rPr>
+              <a:t> Optimized</a:t>
+            </a:r>
+          </a:p>
+        </p:txBody>
+      </p:sp>
+    </p:spTree>
+    <p:extLst>
+      <p:ext uri="{BB962C8B-B14F-4D97-AF65-F5344CB8AC3E}">
+        <p14:creationId xmlns:p14="http://schemas.microsoft.com/office/powerpoint/2010/main" val="635495103"/>
+      </p:ext>
+    </p:extLst>
+  </p:cSld>
+  <p:clrMapOvr>
+    <a:masterClrMapping/>
+  </p:clrMapOvr>
+</p:sld>
+</file>
+
 <file path=ppt/slides/slide12.xml><?xml version="1.0" encoding="utf-8"?>
 <p:sld xmlns:a="http://schemas.openxmlformats.org/drawingml/2006/main" xmlns:r="http://schemas.openxmlformats.org/officeDocument/2006/relationships" xmlns:p="http://schemas.openxmlformats.org/presentationml/2006/main">
   <p:cSld>
@@ -6287,12 +6111,12 @@
         </p:spPr>
         <p:txBody>
           <a:bodyPr spcFirstLastPara="1" wrap="square" lIns="91425" tIns="91425" rIns="91425" bIns="91425" anchor="ctr" anchorCtr="0">
-            <a:normAutofit fontScale="90000"/>
+            <a:normAutofit/>
           </a:bodyPr>
           <a:lstStyle/>
           <a:p>
             <a:r>
-              <a:rPr lang="en-US" dirty="0"/>
+              <a:rPr lang="en-US" sz="2000" dirty="0"/>
               <a:t>Key Takeaways</a:t>
             </a:r>
           </a:p>
@@ -6329,23 +6153,18 @@
           </a:bodyPr>
           <a:lstStyle/>
           <a:p>
-            <a:pPr marL="114300" indent="0">
-              <a:spcBef>
-                <a:spcPts val="1000"/>
-              </a:spcBef>
-              <a:buNone/>
-            </a:pPr>
-            <a:endParaRPr lang="en-US" dirty="0"/>
-          </a:p>
-          <a:p>
             <a:pPr>
               <a:spcBef>
                 <a:spcPts val="1000"/>
               </a:spcBef>
             </a:pPr>
             <a:r>
+              <a:rPr lang="en-US"/>
+              <a:t>Data </a:t>
+            </a:r>
+            <a:r>
               <a:rPr lang="en-US" dirty="0"/>
-              <a:t>Data quality is the foundation — 35 % of effort was cleaning alone </a:t>
+              <a:t>quality is the foundation — 35 % of effort was cleaning alone </a:t>
             </a:r>
           </a:p>
           <a:p>
@@ -6707,6 +6526,164 @@
   <p:cSld>
     <p:spTree>
       <p:nvGrpSpPr>
+        <p:cNvPr id="1" name=""/>
+        <p:cNvGrpSpPr/>
+        <p:nvPr/>
+      </p:nvGrpSpPr>
+      <p:grpSpPr>
+        <a:xfrm>
+          <a:off x="0" y="0"/>
+          <a:ext cx="0" cy="0"/>
+          <a:chOff x="0" y="0"/>
+          <a:chExt cx="0" cy="0"/>
+        </a:xfrm>
+      </p:grpSpPr>
+      <p:sp>
+        <p:nvSpPr>
+          <p:cNvPr id="2" name="Title 1">
+            <a:extLst>
+              <a:ext uri="{FF2B5EF4-FFF2-40B4-BE49-F238E27FC236}">
+                <a16:creationId xmlns:a16="http://schemas.microsoft.com/office/drawing/2014/main" id="{44DD8232-CEB0-5333-15CC-8241C02AC156}"/>
+              </a:ext>
+            </a:extLst>
+          </p:cNvPr>
+          <p:cNvSpPr>
+            <a:spLocks noGrp="1"/>
+          </p:cNvSpPr>
+          <p:nvPr>
+            <p:ph type="title"/>
+          </p:nvPr>
+        </p:nvSpPr>
+        <p:spPr/>
+        <p:txBody>
+          <a:bodyPr>
+            <a:normAutofit/>
+          </a:bodyPr>
+          <a:lstStyle/>
+          <a:p>
+            <a:r>
+              <a:rPr lang="en-US" sz="2000" dirty="0"/>
+              <a:t>Limitations</a:t>
+            </a:r>
+          </a:p>
+        </p:txBody>
+      </p:sp>
+      <p:sp>
+        <p:nvSpPr>
+          <p:cNvPr id="3" name="Text Placeholder 2">
+            <a:extLst>
+              <a:ext uri="{FF2B5EF4-FFF2-40B4-BE49-F238E27FC236}">
+                <a16:creationId xmlns:a16="http://schemas.microsoft.com/office/drawing/2014/main" id="{BDBA7325-6C4D-FB30-667E-AEBAE13D2E1D}"/>
+              </a:ext>
+            </a:extLst>
+          </p:cNvPr>
+          <p:cNvSpPr>
+            <a:spLocks noGrp="1"/>
+          </p:cNvSpPr>
+          <p:nvPr>
+            <p:ph type="body" idx="1"/>
+          </p:nvPr>
+        </p:nvSpPr>
+        <p:spPr/>
+        <p:txBody>
+          <a:bodyPr/>
+          <a:lstStyle/>
+          <a:p>
+            <a:pPr marL="114300" indent="0">
+              <a:lnSpc>
+                <a:spcPct val="150000"/>
+              </a:lnSpc>
+              <a:buNone/>
+            </a:pPr>
+            <a:r>
+              <a:rPr lang="en-US" dirty="0"/>
+              <a:t>No date stamps for sign-up, churn, or billing. This prevents time-to-churn analysis.</a:t>
+            </a:r>
+          </a:p>
+          <a:p>
+            <a:pPr marL="114300" indent="0">
+              <a:lnSpc>
+                <a:spcPct val="150000"/>
+              </a:lnSpc>
+              <a:buNone/>
+            </a:pPr>
+            <a:r>
+              <a:rPr lang="en-US" dirty="0"/>
+              <a:t>Internet service type (Fiber optic) and payment method (Electronic check) correlate with income level.</a:t>
+            </a:r>
+          </a:p>
+          <a:p>
+            <a:pPr marL="114300" indent="0">
+              <a:lnSpc>
+                <a:spcPct val="150000"/>
+              </a:lnSpc>
+              <a:buNone/>
+            </a:pPr>
+            <a:r>
+              <a:rPr lang="en-US" dirty="0"/>
+              <a:t>Very early churners who left before data capture are absent.</a:t>
+            </a:r>
+          </a:p>
+        </p:txBody>
+      </p:sp>
+      <p:sp>
+        <p:nvSpPr>
+          <p:cNvPr id="4" name="Slide Number Placeholder 3">
+            <a:extLst>
+              <a:ext uri="{FF2B5EF4-FFF2-40B4-BE49-F238E27FC236}">
+                <a16:creationId xmlns:a16="http://schemas.microsoft.com/office/drawing/2014/main" id="{1236A76D-D52E-53DE-FF8E-D1EC0B683C4C}"/>
+              </a:ext>
+            </a:extLst>
+          </p:cNvPr>
+          <p:cNvSpPr>
+            <a:spLocks noGrp="1"/>
+          </p:cNvSpPr>
+          <p:nvPr>
+            <p:ph type="sldNum" idx="12"/>
+          </p:nvPr>
+        </p:nvSpPr>
+        <p:spPr/>
+        <p:txBody>
+          <a:bodyPr>
+            <a:normAutofit fontScale="92500" lnSpcReduction="20000"/>
+          </a:bodyPr>
+          <a:lstStyle/>
+          <a:p>
+            <a:pPr marL="0" lvl="0" indent="0" algn="r" rtl="0">
+              <a:spcBef>
+                <a:spcPts val="0"/>
+              </a:spcBef>
+              <a:spcAft>
+                <a:spcPts val="0"/>
+              </a:spcAft>
+              <a:buNone/>
+            </a:pPr>
+            <a:fld id="{00000000-1234-1234-1234-123412341234}" type="slidenum">
+              <a:rPr lang="en" smtClean="0"/>
+              <a:t>13</a:t>
+            </a:fld>
+            <a:endParaRPr lang="en"/>
+          </a:p>
+        </p:txBody>
+      </p:sp>
+    </p:spTree>
+    <p:extLst>
+      <p:ext uri="{BB962C8B-B14F-4D97-AF65-F5344CB8AC3E}">
+        <p14:creationId xmlns:p14="http://schemas.microsoft.com/office/powerpoint/2010/main" val="2466423651"/>
+      </p:ext>
+    </p:extLst>
+  </p:cSld>
+  <p:clrMapOvr>
+    <a:masterClrMapping/>
+  </p:clrMapOvr>
+</p:sld>
+</file>
+
+<file path=ppt/slides/slide14.xml><?xml version="1.0" encoding="utf-8"?>
+<p:sld xmlns:a="http://schemas.openxmlformats.org/drawingml/2006/main" xmlns:r="http://schemas.openxmlformats.org/officeDocument/2006/relationships" xmlns:p="http://schemas.openxmlformats.org/presentationml/2006/main">
+  <p:cSld>
+    <p:spTree>
+      <p:nvGrpSpPr>
         <p:cNvPr id="1" name="Shape 457"/>
         <p:cNvGrpSpPr/>
         <p:nvPr/>
@@ -6740,16 +6717,16 @@
         </p:spPr>
         <p:txBody>
           <a:bodyPr spcFirstLastPara="1" wrap="square" lIns="91425" tIns="91425" rIns="91425" bIns="91425" anchor="ctr" anchorCtr="0">
-            <a:normAutofit fontScale="90000"/>
+            <a:normAutofit/>
           </a:bodyPr>
           <a:lstStyle/>
           <a:p>
             <a:pPr lvl="0"/>
             <a:r>
-              <a:rPr lang="en-US" dirty="0"/>
+              <a:rPr lang="en-US" sz="2000" dirty="0"/>
               <a:t>Next steps</a:t>
             </a:r>
-            <a:endParaRPr dirty="0"/>
+            <a:endParaRPr sz="2000" dirty="0"/>
           </a:p>
         </p:txBody>
       </p:sp>
@@ -6798,7 +6775,7 @@
             </a:pPr>
             <a:r>
               <a:rPr lang="en-US" dirty="0"/>
-              <a:t>A/B test retention offers on model-flagged high-risk customers</a:t>
+              <a:t>Run A/B tests on retention offers for predicted high risk customer to determine the most effective strategy</a:t>
             </a:r>
           </a:p>
           <a:p>
@@ -6814,7 +6791,7 @@
             </a:r>
             <a:r>
               <a:rPr lang="en-US" dirty="0" err="1"/>
-              <a:t>behaviour</a:t>
+              <a:t>behavour</a:t>
             </a:r>
             <a:r>
               <a:rPr lang="en-US" dirty="0"/>
@@ -6871,7 +6848,7 @@
             </a:pPr>
             <a:fld id="{00000000-1234-1234-1234-123412341234}" type="slidenum">
               <a:rPr lang="en"/>
-              <a:t>13</a:t>
+              <a:t>14</a:t>
             </a:fld>
             <a:endParaRPr/>
           </a:p>
@@ -6885,8 +6862,8 @@
         </p:nvGrpSpPr>
         <p:grpSpPr>
           <a:xfrm rot="2699785">
-            <a:off x="482122" y="4029609"/>
-            <a:ext cx="1208946" cy="982653"/>
+            <a:off x="521054" y="3971330"/>
+            <a:ext cx="1029303" cy="946934"/>
             <a:chOff x="2318413" y="2452450"/>
             <a:chExt cx="1067700" cy="867900"/>
           </a:xfrm>
@@ -7020,7 +6997,7 @@
 </p:sld>
 </file>
 
-<file path=ppt/slides/slide14.xml><?xml version="1.0" encoding="utf-8"?>
+<file path=ppt/slides/slide15.xml><?xml version="1.0" encoding="utf-8"?>
 <p:sld xmlns:a="http://schemas.openxmlformats.org/drawingml/2006/main" xmlns:r="http://schemas.openxmlformats.org/officeDocument/2006/relationships" xmlns:p="http://schemas.openxmlformats.org/presentationml/2006/main">
   <p:cSld>
     <p:spTree>
@@ -7073,7 +7050,7 @@
             </a:pPr>
             <a:fld id="{00000000-1234-1234-1234-123412341234}" type="slidenum">
               <a:rPr lang="en"/>
-              <a:t>14</a:t>
+              <a:t>15</a:t>
             </a:fld>
             <a:endParaRPr/>
           </a:p>
@@ -7179,16 +7156,16 @@
         </p:spPr>
         <p:txBody>
           <a:bodyPr spcFirstLastPara="1" wrap="square" lIns="91425" tIns="91425" rIns="91425" bIns="91425" anchor="ctr" anchorCtr="0">
-            <a:normAutofit fontScale="90000"/>
+            <a:normAutofit/>
           </a:bodyPr>
           <a:lstStyle/>
           <a:p>
             <a:pPr lvl="0"/>
             <a:r>
-              <a:rPr lang="en-US" dirty="0"/>
+              <a:rPr lang="en-US" sz="2000" dirty="0"/>
               <a:t>What inspired you to choose this project?</a:t>
             </a:r>
-            <a:endParaRPr b="1" dirty="0">
+            <a:endParaRPr sz="2000" b="1" dirty="0">
               <a:latin typeface="Assistant"/>
               <a:ea typeface="Assistant"/>
               <a:cs typeface="Assistant"/>
@@ -7228,7 +7205,7 @@
           </a:bodyPr>
           <a:lstStyle/>
           <a:p>
-            <a:pPr marL="114300" lvl="0" indent="0" algn="just">
+            <a:pPr marL="114300" indent="0" algn="just">
               <a:lnSpc>
                 <a:spcPct val="150000"/>
               </a:lnSpc>
@@ -7236,17 +7213,6 @@
                 <a:spcPts val="1000"/>
               </a:spcBef>
               <a:buNone/>
-            </a:pPr>
-            <a:endParaRPr lang="en-US" dirty="0"/>
-          </a:p>
-          <a:p>
-            <a:pPr algn="just">
-              <a:lnSpc>
-                <a:spcPct val="150000"/>
-              </a:lnSpc>
-              <a:spcBef>
-                <a:spcPts val="1000"/>
-              </a:spcBef>
             </a:pPr>
             <a:r>
               <a:rPr lang="en-US" dirty="0"/>
@@ -7254,13 +7220,14 @@
             </a:r>
           </a:p>
           <a:p>
-            <a:pPr algn="just">
+            <a:pPr marL="114300" indent="0" algn="just">
               <a:lnSpc>
                 <a:spcPct val="150000"/>
               </a:lnSpc>
               <a:spcBef>
                 <a:spcPts val="1000"/>
               </a:spcBef>
+              <a:buNone/>
             </a:pPr>
             <a:r>
               <a:rPr lang="en-US" dirty="0"/>
@@ -7268,13 +7235,14 @@
             </a:r>
           </a:p>
           <a:p>
-            <a:pPr algn="just">
+            <a:pPr marL="114300" indent="0" algn="just">
               <a:lnSpc>
                 <a:spcPct val="150000"/>
               </a:lnSpc>
               <a:spcBef>
                 <a:spcPts val="1000"/>
               </a:spcBef>
+              <a:buNone/>
             </a:pPr>
             <a:r>
               <a:rPr lang="en-US" dirty="0"/>
@@ -7629,16 +7597,16 @@
         </p:spPr>
         <p:txBody>
           <a:bodyPr spcFirstLastPara="1" wrap="square" lIns="91425" tIns="91425" rIns="91425" bIns="91425" anchor="ctr" anchorCtr="0">
-            <a:normAutofit fontScale="90000"/>
+            <a:normAutofit/>
           </a:bodyPr>
           <a:lstStyle/>
           <a:p>
             <a:pPr lvl="0"/>
             <a:r>
-              <a:rPr lang="en-US" dirty="0"/>
+              <a:rPr lang="en-US" sz="2000" dirty="0"/>
               <a:t>What did you do?</a:t>
             </a:r>
-            <a:endParaRPr b="1" dirty="0">
+            <a:endParaRPr sz="2000" b="1" dirty="0">
               <a:latin typeface="Assistant"/>
               <a:ea typeface="Assistant"/>
               <a:cs typeface="Assistant"/>
@@ -8394,16 +8362,16 @@
         </p:spPr>
         <p:txBody>
           <a:bodyPr spcFirstLastPara="1" wrap="square" lIns="91425" tIns="91425" rIns="91425" bIns="91425" anchor="ctr" anchorCtr="0">
-            <a:normAutofit fontScale="90000"/>
+            <a:normAutofit/>
           </a:bodyPr>
           <a:lstStyle/>
           <a:p>
             <a:pPr lvl="0"/>
             <a:r>
-              <a:rPr lang="en-US" dirty="0"/>
+              <a:rPr lang="en-US" sz="2000" dirty="0"/>
               <a:t>Tools and libraries used</a:t>
             </a:r>
-            <a:endParaRPr b="1" dirty="0">
+            <a:endParaRPr sz="2000" b="1" dirty="0">
               <a:latin typeface="Assistant"/>
               <a:ea typeface="Assistant"/>
               <a:cs typeface="Assistant"/>
@@ -8887,11 +8855,7 @@
             <a:pPr lvl="0"/>
             <a:r>
               <a:rPr lang="en-US" sz="2000" dirty="0"/>
-              <a:t>Customer profile and churn </a:t>
-            </a:r>
-            <a:r>
-              <a:rPr lang="en-US" sz="2000" dirty="0" err="1"/>
-              <a:t>behaviour</a:t>
+              <a:t>Customer profile and churn behaviour</a:t>
             </a:r>
             <a:endParaRPr sz="2000" b="1" dirty="0">
               <a:latin typeface="Assistant"/>
@@ -9089,12 +9053,12 @@
         <p:spPr/>
         <p:txBody>
           <a:bodyPr>
-            <a:normAutofit fontScale="90000"/>
+            <a:normAutofit/>
           </a:bodyPr>
           <a:lstStyle/>
           <a:p>
             <a:r>
-              <a:rPr lang="en-US" dirty="0"/>
+              <a:rPr lang="en-US" sz="2000" dirty="0"/>
               <a:t>Relationship between the numeric variable</a:t>
             </a:r>
           </a:p>
@@ -9476,16 +9440,16 @@
         </p:spPr>
         <p:txBody>
           <a:bodyPr spcFirstLastPara="1" wrap="square" lIns="91425" tIns="91425" rIns="91425" bIns="91425" anchor="ctr" anchorCtr="0">
-            <a:normAutofit fontScale="90000"/>
+            <a:normAutofit/>
           </a:bodyPr>
           <a:lstStyle/>
           <a:p>
             <a:pPr lvl="0"/>
             <a:r>
-              <a:rPr lang="en-US" dirty="0"/>
+              <a:rPr lang="en-US" sz="2000" dirty="0"/>
               <a:t>Contract type drives churn</a:t>
             </a:r>
-            <a:endParaRPr b="1" dirty="0">
+            <a:endParaRPr sz="2000" b="1" dirty="0">
               <a:latin typeface="Assistant"/>
               <a:ea typeface="Assistant"/>
               <a:cs typeface="Assistant"/>
@@ -9950,12 +9914,12 @@
         </p:spPr>
         <p:txBody>
           <a:bodyPr>
-            <a:normAutofit fontScale="90000"/>
+            <a:normAutofit/>
           </a:bodyPr>
           <a:lstStyle/>
           <a:p>
             <a:r>
-              <a:rPr lang="en-US" dirty="0"/>
+              <a:rPr lang="en-US" sz="2000" dirty="0"/>
               <a:t>Full model comparison </a:t>
             </a:r>
           </a:p>
@@ -10333,7 +10297,15 @@
             </a:br>
             <a:r>
               <a:rPr lang="en-US" sz="2000" dirty="0"/>
-              <a:t>Confusion matrices of the top three models</a:t>
+              <a:t>Confusion matrices of </a:t>
+            </a:r>
+            <a:r>
+              <a:rPr lang="en-US" sz="2000" dirty="0" err="1"/>
+              <a:t>Xgboost</a:t>
+            </a:r>
+            <a:r>
+              <a:rPr lang="en-US" sz="2000" dirty="0"/>
+              <a:t> optimized</a:t>
             </a:r>
             <a:br>
               <a:rPr lang="en-US" sz="2000" dirty="0"/>
@@ -10345,37 +10317,6 @@
           </a:p>
         </p:txBody>
       </p:sp>
-      <p:pic>
-        <p:nvPicPr>
-          <p:cNvPr id="2" name="Picture 1">
-            <a:extLst>
-              <a:ext uri="{FF2B5EF4-FFF2-40B4-BE49-F238E27FC236}">
-                <a16:creationId xmlns:a16="http://schemas.microsoft.com/office/drawing/2014/main" id="{F17063A0-1668-E1C1-15DC-00A9D37F2D53}"/>
-              </a:ext>
-            </a:extLst>
-          </p:cNvPr>
-          <p:cNvPicPr>
-            <a:picLocks noChangeAspect="1"/>
-          </p:cNvPicPr>
-          <p:nvPr/>
-        </p:nvPicPr>
-        <p:blipFill>
-          <a:blip r:embed="rId3"/>
-          <a:srcRect t="8895" r="1219"/>
-          <a:stretch>
-            <a:fillRect/>
-          </a:stretch>
-        </p:blipFill>
-        <p:spPr>
-          <a:xfrm>
-            <a:off x="546442" y="915600"/>
-            <a:ext cx="7677615" cy="1943278"/>
-          </a:xfrm>
-          <a:prstGeom prst="rect">
-            <a:avLst/>
-          </a:prstGeom>
-        </p:spPr>
-      </p:pic>
       <p:grpSp>
         <p:nvGrpSpPr>
           <p:cNvPr id="4" name="Google Shape;448;p42">
@@ -10624,8 +10565,8 @@
         </p:nvSpPr>
         <p:spPr>
           <a:xfrm>
-            <a:off x="1371600" y="3646448"/>
-            <a:ext cx="5553307" cy="1169551"/>
+            <a:off x="1354238" y="3761773"/>
+            <a:ext cx="5605393" cy="1200329"/>
           </a:xfrm>
           <a:prstGeom prst="rect">
             <a:avLst/>
@@ -10639,30 +10580,79 @@
           <a:lstStyle/>
           <a:p>
             <a:r>
-              <a:rPr lang="en-US" dirty="0"/>
-              <a:t>		Predicted: No Churn    Predicted: Churn</a:t>
+              <a:rPr lang="en-US" sz="1200" dirty="0">
+                <a:latin typeface=""/>
+              </a:rPr>
+              <a:t>			</a:t>
             </a:r>
           </a:p>
           <a:p>
-            <a:endParaRPr lang="en-US" dirty="0"/>
+            <a:r>
+              <a:rPr lang="en-US" sz="1200" dirty="0">
+                <a:latin typeface=""/>
+              </a:rPr>
+              <a:t>		Predicted: No Churn    	Predicted: Churn</a:t>
+            </a:r>
+          </a:p>
+          <a:p>
+            <a:endParaRPr lang="en-US" sz="1200" dirty="0">
+              <a:latin typeface=""/>
+            </a:endParaRPr>
           </a:p>
           <a:p>
             <a:r>
-              <a:rPr lang="en-US" dirty="0"/>
+              <a:rPr lang="en-US" sz="1200" dirty="0">
+                <a:latin typeface=""/>
+              </a:rPr>
               <a:t>Actual: No Churn      		  TN                    	FP</a:t>
             </a:r>
           </a:p>
           <a:p>
-            <a:endParaRPr lang="en-US" dirty="0"/>
+            <a:endParaRPr lang="en-US" sz="1200" dirty="0">
+              <a:latin typeface=""/>
+            </a:endParaRPr>
           </a:p>
           <a:p>
             <a:r>
-              <a:rPr lang="en-US" dirty="0"/>
+              <a:rPr lang="en-US" sz="1200" dirty="0">
+                <a:latin typeface=""/>
+              </a:rPr>
               <a:t>Actual: Churn       		  FN                    	TP</a:t>
             </a:r>
           </a:p>
         </p:txBody>
       </p:sp>
+      <p:pic>
+        <p:nvPicPr>
+          <p:cNvPr id="6" name="Picture 5">
+            <a:extLst>
+              <a:ext uri="{FF2B5EF4-FFF2-40B4-BE49-F238E27FC236}">
+                <a16:creationId xmlns:a16="http://schemas.microsoft.com/office/drawing/2014/main" id="{C40643CD-0BBE-B11D-3385-BBDB08672659}"/>
+              </a:ext>
+            </a:extLst>
+          </p:cNvPr>
+          <p:cNvPicPr>
+            <a:picLocks noChangeAspect="1"/>
+          </p:cNvPicPr>
+          <p:nvPr/>
+        </p:nvPicPr>
+        <p:blipFill>
+          <a:blip r:embed="rId3"/>
+          <a:srcRect t="13367" r="4348" b="3420"/>
+          <a:stretch>
+            <a:fillRect/>
+          </a:stretch>
+        </p:blipFill>
+        <p:spPr>
+          <a:xfrm>
+            <a:off x="2237368" y="879676"/>
+            <a:ext cx="4295763" cy="2882097"/>
+          </a:xfrm>
+          <a:prstGeom prst="rect">
+            <a:avLst/>
+          </a:prstGeom>
+        </p:spPr>
+      </p:pic>
     </p:spTree>
     <p:extLst>
       <p:ext uri="{BB962C8B-B14F-4D97-AF65-F5344CB8AC3E}">
